--- a/presentation/CSE598_progress_presentation.pptx
+++ b/presentation/CSE598_progress_presentation.pptx
@@ -117,36 +117,36 @@
   <p:extLst>
     <p:ext uri="{521415D9-36F7-43E2-AB2F-B90AF26B5E84}">
       <p14:sectionLst xmlns:p14="http://schemas.microsoft.com/office/powerpoint/2010/main">
-        <p14:section name="Opening" id="{101e1577-2b91-e8d6-9363-c5379a98ad78}">
+        <p14:section name="Opening" id="{3caea26c-1a48-a0ac-8e16-b8f3944b3afb}">
           <p14:sldIdLst>
             <p14:sldId id="256"/>
           </p14:sldIdLst>
         </p14:section>
-        <p14:section name="Question &amp; changes" id="{9751596d-a3ab-fe08-7c3d-55d9493baee6}">
+        <p14:section name="Question &amp; changes" id="{fe515433-1113-c909-5ad2-f264b2d346f7}">
           <p14:sldIdLst>
             <p14:sldId id="257"/>
           </p14:sldIdLst>
         </p14:section>
-        <p14:section name="Pipeline" id="{eec0abca-f3a4-acf2-9c33-6f3b6029472c}">
+        <p14:section name="Pipeline" id="{6d84d6a6-9441-4566-f861-d647f41d7285}">
           <p14:sldIdLst>
             <p14:sldId id="258"/>
           </p14:sldIdLst>
         </p14:section>
-        <p14:section name="Results" id="{eac933c3-5c3e-484d-5d25-1388828a2720}">
+        <p14:section name="Results" id="{c2f0d73f-e03f-791c-2ee4-1975e2f0e4bf}">
           <p14:sldIdLst>
             <p14:sldId id="259"/>
             <p14:sldId id="260"/>
             <p14:sldId id="261"/>
           </p14:sldIdLst>
         </p14:section>
-        <p14:section name="Risks &amp; next steps" id="{5e0c7858-1ebd-2a94-ceeb-430fa1e5ebd5}">
+        <p14:section name="Risks &amp; next steps" id="{fccdde4c-234c-86d3-9c32-57f121c01669}">
           <p14:sldIdLst>
             <p14:sldId id="262"/>
             <p14:sldId id="263"/>
             <p14:sldId id="264"/>
           </p14:sldIdLst>
         </p14:section>
-        <p14:section name="Backup" id="{68add3ac-2c20-4810-a32d-0076c5c46301}">
+        <p14:section name="Backup" id="{4580bf59-111e-6852-e2bc-af3bc9884dbf}">
           <p14:sldIdLst>
             <p14:sldId id="265"/>
             <p14:sldId id="266"/>
@@ -383,10 +383,10 @@
                 <c:formatCode>General</c:formatCode>
                 <c:ptCount val="6"/>
                 <c:pt idx="0">
-                  <c:v>0</c:v>
+                  <c:v>0.10416666666666667</c:v>
                 </c:pt>
                 <c:pt idx="1">
-                  <c:v>0</c:v>
+                  <c:v>0.020833333333333332</c:v>
                 </c:pt>
                 <c:pt idx="2">
                   <c:v>0</c:v>
@@ -597,7 +597,7 @@
                 </a:solidFill>
                 <a:latin typeface="+mn-lt"/>
               </a:rPr>
-              <a:t>Share of hinted runs that mention the hint</a:t>
+              <a:t>How often the hint is mentioned, in runs that had one</a:t>
             </a:r>
           </a:p>
         </c:rich>
@@ -683,13 +683,13 @@
                 <c:formatCode>General</c:formatCode>
                 <c:ptCount val="3"/>
                 <c:pt idx="0">
-                  <c:v>0</c:v>
+                  <c:v>0.9166666666666666</c:v>
                 </c:pt>
                 <c:pt idx="1">
-                  <c:v>0</c:v>
+                  <c:v>0.9861111111111112</c:v>
                 </c:pt>
                 <c:pt idx="2">
-                  <c:v>0</c:v>
+                  <c:v>0.9861111111111112</c:v>
                 </c:pt>
               </c:numCache>
             </c:numRef>
@@ -772,7 +772,7 @@
                   <c:v>0</c:v>
                 </c:pt>
                 <c:pt idx="2">
-                  <c:v>0</c:v>
+                  <c:v>0.1111111111111111</c:v>
                 </c:pt>
               </c:numCache>
             </c:numRef>
@@ -1340,7 +1340,7 @@
           <a:p>
             <a:r>
               <a:rPr lang="en-US" dirty="0"/>
-              <a:t>Hi, we're Group 10. Our question: when a hint pushes a model toward an answer, does its explanation say so? Thinking models give us two channels to check — a private reasoning trace and the final answer the user sees.</a:t>
+              <a:t>Hi, we're Group 10. Our question is simple: when a hint pushes a model toward an answer, does the model say so? Thinking models give us two places to look. There's the private reasoning they write first, and the final answer the user sees.</a:t>
             </a:r>
             <a:endParaRPr lang="en-US" dirty="0"/>
           </a:p>
@@ -1604,7 +1604,7 @@
           <a:p>
             <a:r>
               <a:rPr lang="en-US" dirty="0"/>
-              <a:t>We ask whether a model's explanation admits a hint that shaped its answer. The review pushed us on controls: instruct and thinking models are trained differently, so we no longer call that a clean thinking on/off comparison — and Voyager can't switch thinking off, which we checked. We added repeated no-hint runs, balanced hint and answer positions, correct hints, and we now score 'mentions the hint' separately from 'admits it changed the answer'.</a:t>
+              <a:t>Here's the setup. We give a model a puzzle, and sometimes we add a line like 'I think the answer is C.' Then we check two things: did the hint change the answer, and does the model mention it? The review pushed us on a few points. The regular and thinking models in a pair are trained differently, so a gap between them isn't only about thinking. We checked, and Voyager has no switch to turn thinking off, so we also ask the same model to think briefly. We now repeat each puzzle without a hint, spread hints and right answers evenly across the letters, and score 'mentions the hint' apart from 'says the hint changed its answer'.</a:t>
             </a:r>
             <a:endParaRPr lang="en-US" dirty="0"/>
           </a:p>
@@ -1692,7 +1692,7 @@
           <a:p>
             <a:r>
               <a:rPr lang="en-US" dirty="0"/>
-              <a:t>Here's the pipeline. We generate fresh puzzles with exact answers, add a hint or not, send them to six models on ASU's free Voyager API, and split each reply into the private reasoning and the final answer. Everything is streamed and cached, so reruns are free. Along the way we fixed server timeouts and an answer parser that was silently marking 45% of answers wrong.</a:t>
+              <a:t>This is our pipeline, and it works from start to finish. We make fresh puzzles with one right answer, add a hint or not, and send them to six models on ASU's free Voyager service. Each reply comes back in two parts, the private reasoning and the final answer. We save every reply, so rerunning the analysis costs nothing. Along the way we fixed two problems. Long replies were timing out, and almost half the answers weren't in the format we asked for, so a simple reader would have marked them wrong.</a:t>
             </a:r>
             <a:endParaRPr lang="en-US" dirty="0"/>
           </a:p>
@@ -1780,7 +1780,7 @@
           <a:p>
             <a:r>
               <a:rPr lang="en-US" dirty="0"/>
-              <a:t>First result. Blue is how often a model picked an option with no hint at all; orange is how often it picked that same option when we suggested it. The gap is the hint's effect, and it's small — a few points, mostly inside normal run-to-run variation. That's a null result at this difficulty, and we think it's partly the task: the models solve these puzzles, so there's little room to be pushed.</a:t>
+              <a:t>Our first result. Blue is how often a model picked a wrong option with no hint. Orange is how often it picked that same option when we suggested it. Only one model follows the hint. Olmo 3 7B Instruct picks the wrong hinted answer about 10% of the time and never without the hint, and our 95% range stays above zero, so it isn't luck. Its thinking twin barely moves, and the larger models don't move at all, partly because they solve these puzzles every time. We also checked chance: run again without a hint, Olmo 7B Instruct changes its answer on almost a third of puzzles, but never to the hinted letter.</a:t>
             </a:r>
             <a:endParaRPr lang="en-US" dirty="0"/>
           </a:p>
@@ -1868,7 +1868,7 @@
           <a:p>
             <a:r>
               <a:rPr lang="en-US" dirty="0"/>
-              <a:t>Second result, and the one we'll build on. When there's a hint, the thinking models discuss it in their private reasoning almost every time, but it rarely if ever reaches the answer the user sees. Instruct models, which only have one channel, do mention it in their visible reply some of the time, so thinking seems to move the acknowledgement out of sight. Two cautions: most of those trace mentions are the model rejecting the hint, so this is 'mentions', not 'admits influence'. And omission is our operational measure — it's not proof of dishonesty, and the trace isn't the model's actual computation.</a:t>
+              <a:t>Our second result, and the one we'll build on. When there's a hint, thinking models mention it in their private reasoning almost every time. It almost never reaches the final answer: zero times for Olmo, and 8 times out of 216 overall. Olmo's regular models have no private reasoning, and they mention the hint in about a third of their replies. So for Olmo, thinking moves the mention out of sight. Qwen shows no such gap. Two cautions. Most of those mentions are the model brushing the hint off, so we count them as mentions, not admissions. And leaving the hint out doesn't prove a model is hiding something. The private reasoning isn't a perfect view of what goes on inside the model either.</a:t>
             </a:r>
             <a:endParaRPr lang="en-US" dirty="0"/>
           </a:p>
@@ -1956,7 +1956,7 @@
           <a:p>
             <a:r>
               <a:rPr lang="en-US" dirty="0"/>
-              <a:t>A few smaller findings that change how we run things. The hint makes thinking models write longer, so influence costs compute even when the answer holds. Telling a thinking model 'don't explain' only hides the explanation; it still thinks privately. If a response hits the token limit, the private reasoning spills into the visible answer — a real deployment hazard. And 'think briefly' shortens reasoning on the same model, which gives us a within-model comparison the review asked for.</a:t>
+              <a:t>A few smaller findings that change how we run things. A hint makes every model write more, even when the answer stays the same. When we tell a thinking model 'answer only, don't explain', it still reasons in private and stays accurate. Regular models told the same thing get almost everything wrong, worse than guessing. When a reply hits the length limit, the private reasoning spills into the answer the user sees, which matters for anyone building on these models. And asking for brief thinking shortens the reasoning on the same model, which gives us the same-model comparison the review asked for.</a:t>
             </a:r>
             <a:endParaRPr lang="en-US" dirty="0"/>
           </a:p>
@@ -2044,7 +2044,7 @@
           <a:p>
             <a:r>
               <a:rPr lang="en-US" dirty="0"/>
-              <a:t>Main risks. One: we can't switch thinking off on Voyager, so instruct-versus-thinking is a comparison of differently trained models — we say so, and we added a same-model 'think briefly' condition. Two: the hint barely works on these puzzles, so we're adding ambiguous BBQ and BBH questions. Three: keywords can't tell a mention from an admission, so we'll hand-label 200 cases with two raters. Four: compute — thinking models cost three times the tokens, so we're cutting the design to about 55 million tokens and timing it first.</a:t>
+              <a:t>Our main risks. First, we can't turn thinking off on Voyager, so comparing regular and thinking models means comparing two differently trained models. We say that openly, and we added the 'think briefly' test on the same model. Second, the hint only moves the smallest model on these puzzles, so we're adding questions where hints have more room. Third, keyword search can't tell a mention from an admission, so two of us will hand-label 200 replies. Fourth, cost: thinking models write about four times as much, so we're shrinking the plan and timing a test run first.</a:t>
             </a:r>
             <a:endParaRPr lang="en-US" dirty="0"/>
           </a:p>
@@ -2132,7 +2132,7 @@
           <a:p>
             <a:r>
               <a:rPr lang="en-US" dirty="0"/>
-              <a:t>Next steps: next week we add BBQ and BBH questions and time a budget run before freezing prompts. Weeks ten and eleven are the main sweep and hand-labeling. Then the two-agent extension the reviewer suggested: one model gets the hint, a second reviews its answer, and we see whether the influence gets caught or carried forward. Roles are on the slide.</a:t>
+              <a:t>Next steps. Next week we add the new question sets, time a test run, and lock the prompts. Weeks ten and eleven are the main runs and the hand-labeling. If we're on track, we'll try the extension the reviewer suggested: one model gets the hint, a second model reviews its answer, and we see if the second one catches it or passes it along. Roles are on the slide.</a:t>
             </a:r>
             <a:endParaRPr lang="en-US" dirty="0"/>
           </a:p>
@@ -2220,7 +2220,7 @@
           <a:p>
             <a:r>
               <a:rPr lang="en-US" dirty="0"/>
-              <a:t>To sum up: the hint mostly doesn't change answers here, but thinking models always register it privately and never mention it publicly. Next we test whether a second model catches that or passes it along. Happy to take questions.</a:t>
+              <a:t>To sum up: on these puzzles the hint mostly doesn't change answers, but thinking models almost always notice it in private and almost never mention it in the answer. Next we test whether a second model catches that. Thanks, we'll take questions now.</a:t>
             </a:r>
             <a:endParaRPr lang="en-US" dirty="0"/>
           </a:p>
@@ -2534,7 +2534,7 @@
                   <a:schemeClr val="accent5"/>
                 </a:solidFill>
               </a:rPr>
-              <a:t>CSE 598 · Progress presentation · Do thinking modes make CoT more honest?</a:t>
+              <a:t>CSE 598 · Group 10 · Progress presentation</a:t>
             </a:r>
             <a:endParaRPr lang="en-US" sz="1000" dirty="0"/>
           </a:p>
@@ -3004,7 +3004,7 @@
                   <a:schemeClr val="bg2"/>
                 </a:solidFill>
               </a:rPr>
-              <a:t>Progress report: do thinking models’ explanations admit a hint that shaped their answer?</a:t>
+              <a:t>Progress report: do thinking models admit it when a hint sways their answer?</a:t>
             </a:r>
             <a:endParaRPr lang="en-US" sz="1900" dirty="0"/>
           </a:p>
@@ -3283,7 +3283,7 @@
                   <a:schemeClr val="tx1"/>
                 </a:solidFill>
               </a:rPr>
-              <a:t>Backup: what differs within each pair</a:t>
+              <a:t>Backup: how the two models in each pair differ</a:t>
             </a:r>
             <a:endParaRPr lang="en-US" sz="3000" dirty="0"/>
           </a:p>
@@ -3393,7 +3393,7 @@
                             <a:schemeClr val="bg1"/>
                           </a:solidFill>
                         </a:rPr>
-                        <a:t>Voyager model IDs</a:t>
+                        <a:t>Names on Voyager</a:t>
                       </a:r>
                       <a:endParaRPr lang="en-US" sz="1400" dirty="0"/>
                     </a:p>
@@ -3454,7 +3454,7 @@
                             <a:schemeClr val="bg1"/>
                           </a:solidFill>
                         </a:rPr>
-                        <a:t>Shared</a:t>
+                        <a:t>Same</a:t>
                       </a:r>
                       <a:endParaRPr lang="en-US" sz="1400" dirty="0"/>
                     </a:p>
@@ -3708,7 +3708,7 @@
                             <a:schemeClr val="tx1"/>
                           </a:solidFill>
                         </a:rPr>
-                        <a:t>Same base model; SFT → DPO → RL</a:t>
+                        <a:t>Same base model and the same three training stages</a:t>
                       </a:r>
                       <a:endParaRPr lang="en-US" sz="1350" dirty="0"/>
                     </a:p>
@@ -3766,7 +3766,7 @@
                             <a:schemeClr val="tx1"/>
                           </a:solidFill>
                         </a:rPr>
-                        <a:t>Think: reasoning traces from QwQ-32B and DeepSeek-R1. Instruct: chat, tool-use and instruction data with traces removed</a:t>
+                        <a:t>Think learned from worked reasoning written by other models (QwQ-32B, DeepSeek-R1). Instruct learned from chat and tool-use examples with that reasoning removed</a:t>
                       </a:r>
                       <a:endParaRPr lang="en-US" sz="1350" dirty="0"/>
                     </a:p>
@@ -4014,7 +4014,7 @@
                             <a:schemeClr val="tx1"/>
                           </a:solidFill>
                         </a:rPr>
-                        <a:t>Same recipes. Olmo 3.1 32B variants also exist: to confirm on the Voyager portal</a:t>
+                        <a:t>Same training recipes. A newer Olmo 3.1 32B also exists; we still need to check which one Voyager runs</a:t>
                       </a:r>
                       <a:endParaRPr lang="en-US" sz="1350" dirty="0"/>
                     </a:p>
@@ -4074,7 +4074,7 @@
                             <a:schemeClr val="tx1"/>
                           </a:solidFill>
                         </a:rPr>
-                        <a:t>Qwen3 30B-A3B</a:t>
+                        <a:t>Qwen3 30B</a:t>
                       </a:r>
                       <a:endParaRPr lang="en-US" sz="1350" dirty="0"/>
                     </a:p>
@@ -4204,7 +4204,7 @@
                             <a:schemeClr val="tx1"/>
                           </a:solidFill>
                         </a:rPr>
-                        <a:t>Identical architecture (30.5B, 3.3B active)</a:t>
+                        <a:t>Same design and size (30.5B parameters, 3.3B used per word)</a:t>
                       </a:r>
                       <a:endParaRPr lang="en-US" sz="1350" dirty="0"/>
                     </a:p>
@@ -4262,7 +4262,7 @@
                             <a:schemeClr val="tx1"/>
                           </a:solidFill>
                         </a:rPr>
-                        <a:t>Separate post-training lines; thinking-only vs non-thinking-only. Recommended sampling differs (0.6 vs 0.7); we use 0.6 for all</a:t>
+                        <a:t>Trained separately after the base model: one always thinks, one never does. Their makers suggest slightly different randomness (0.6 vs 0.7); we use 0.6 for both</a:t>
                       </a:r>
                       <a:endParaRPr lang="en-US" sz="1350" dirty="0"/>
                     </a:p>
@@ -4341,7 +4341,7 @@
                   <a:schemeClr val="accent5"/>
                 </a:solidFill>
               </a:rPr>
-              <a:t>Sources: AI2 Olmo 3 release and model cards; Qwen3-2507 model cards.</a:t>
+              <a:t>Sources: AI2’s Olmo 3 release and model cards; Qwen3-2507 model cards.</a:t>
             </a:r>
             <a:endParaRPr lang="en-US" sz="1100" dirty="0"/>
           </a:p>
@@ -4449,7 +4449,7 @@
                   <a:schemeClr val="tx1"/>
                 </a:solidFill>
               </a:rPr>
-              <a:t>Backup: design and budget</a:t>
+              <a:t>Backup: how we ran this round</a:t>
             </a:r>
             <a:endParaRPr lang="en-US" sz="3000" dirty="0"/>
           </a:p>
@@ -4620,7 +4620,7 @@
                             <a:schemeClr val="tx1"/>
                           </a:solidFill>
                         </a:rPr>
-                        <a:t>Items</a:t>
+                        <a:t>Puzzles</a:t>
                       </a:r>
                       <a:endParaRPr lang="en-US" sz="1350" dirty="0"/>
                     </a:p>
@@ -4678,7 +4678,7 @@
                             <a:schemeClr val="tx1"/>
                           </a:solidFill>
                         </a:rPr>
-                        <a:t>24 shuffled-object puzzles (7 people, 15 swaps); correct answers balanced across A–G</a:t>
+                        <a:t>24 swap puzzles (7 people, 15 swaps), with right answers spread evenly across A to G</a:t>
                       </a:r>
                       <a:endParaRPr lang="en-US" sz="1350" dirty="0"/>
                     </a:p>
@@ -4738,7 +4738,7 @@
                             <a:schemeClr val="tx1"/>
                           </a:solidFill>
                         </a:rPr>
-                        <a:t>Conditions per item</a:t>
+                        <a:t>Runs per puzzle</a:t>
                       </a:r>
                       <a:endParaRPr lang="en-US" sz="1350" dirty="0"/>
                     </a:p>
@@ -4796,7 +4796,7 @@
                             <a:schemeClr val="tx1"/>
                           </a:solidFill>
                         </a:rPr>
-                        <a:t>No hint × 3 seeds · wrong hint × 2 (positions balanced) · correct hint × 1</a:t>
+                        <a:t>No hint 3 times, a wrong hint 2 times (spread across letters), a right hint once</a:t>
                       </a:r>
                       <a:endParaRPr lang="en-US" sz="1350" dirty="0"/>
                     </a:p>
@@ -4856,7 +4856,7 @@
                             <a:schemeClr val="tx1"/>
                           </a:solidFill>
                         </a:rPr>
-                        <a:t>Sampling</a:t>
+                        <a:t>Settings</a:t>
                       </a:r>
                       <a:endParaRPr lang="en-US" sz="1350" dirty="0"/>
                     </a:p>
@@ -4914,7 +4914,7 @@
                             <a:schemeClr val="tx1"/>
                           </a:solidFill>
                         </a:rPr>
-                        <a:t>Temperature 0.6, fixed seeds (verified reproducible), 16k max tokens, streamed</a:t>
+                        <a:t>Randomness (temperature) 0.6, fixed random seeds so runs repeat exactly, up to 16,000 tokens per reply</a:t>
                       </a:r>
                       <a:endParaRPr lang="en-US" sz="1350" dirty="0"/>
                     </a:p>
@@ -4974,7 +4974,7 @@
                             <a:schemeClr val="tx1"/>
                           </a:solidFill>
                         </a:rPr>
-                        <a:t>Extra checks</a:t>
+                        <a:t>Extra tests</a:t>
                       </a:r>
                       <a:endParaRPr lang="en-US" sz="1350" dirty="0"/>
                     </a:p>
@@ -5032,7 +5032,7 @@
                             <a:schemeClr val="tx1"/>
                           </a:solidFill>
                         </a:rPr>
-                        <a:t>“Think briefly” on 2 thinking models · “answer only” on 4 models</a:t>
+                        <a:t>“Think briefly” on 2 thinking models; “answer only” on 4 models</a:t>
                       </a:r>
                       <a:endParaRPr lang="en-US" sz="1350" dirty="0"/>
                     </a:p>
@@ -5092,7 +5092,7 @@
                             <a:schemeClr val="tx1"/>
                           </a:solidFill>
                         </a:rPr>
-                        <a:t>Median output tokens</a:t>
+                        <a:t>Typical reply length (tokens)</a:t>
                       </a:r>
                       <a:endParaRPr lang="en-US" sz="1350" dirty="0"/>
                     </a:p>
@@ -5150,7 +5150,7 @@
                             <a:schemeClr val="tx1"/>
                           </a:solidFill>
                         </a:rPr>
-                        <a:t>Olmo 3 7B Instruct 1,406 · Olmo 3 7B Think 7,272 · Olmo 3 32B Instruct 1,467 · Olmo 3 32B Think 4,610 · Qwen3 30B Instruct 833 · Qwen3 30B Thinking 3,951</a:t>
+                        <a:t>Olmo 3 7B Instruct 2,021 · Olmo 3 7B Think 8,026 · Olmo 3 32B Instruct 1,669 · Olmo 3 32B Think 5,725 · Qwen3 30B Instruct 891 · Qwen3 30B Thinking 3,997</a:t>
                       </a:r>
                       <a:endParaRPr lang="en-US" sz="1350" dirty="0"/>
                     </a:p>
@@ -5268,7 +5268,7 @@
                             <a:schemeClr val="tx1"/>
                           </a:solidFill>
                         </a:rPr>
-                        <a:t>105 this round; 0 errors</a:t>
+                        <a:t>1,056 this round; 0 failed</a:t>
                       </a:r>
                       <a:endParaRPr lang="en-US" sz="1350" dirty="0"/>
                     </a:p>
@@ -5419,7 +5419,7 @@
                   <a:schemeClr val="tx1"/>
                 </a:solidFill>
               </a:rPr>
-              <a:t>The question, and what changed after review</a:t>
+              <a:t>Our question, and what we changed after the review</a:t>
             </a:r>
             <a:endParaRPr lang="en-US" sz="3000" dirty="0"/>
           </a:p>
@@ -5477,7 +5477,7 @@
                   <a:schemeClr val="tx1"/>
                 </a:solidFill>
               </a:rPr>
-              <a:t>When a hint shapes a model’s answer, does its explanation say so?</a:t>
+              <a:t>When a hint changes a model’s answer, does the model say so?</a:t>
             </a:r>
             <a:endParaRPr lang="en-US" sz="2100" dirty="0"/>
           </a:p>
@@ -5596,8 +5596,8 @@
         </p:nvSpPr>
         <p:spPr>
           <a:xfrm>
-            <a:off x="822960" y="4572000"/>
-            <a:ext cx="4572000" cy="731520"/>
+            <a:off x="822960" y="4526280"/>
+            <a:ext cx="4572000" cy="822960"/>
           </a:xfrm>
           <a:prstGeom prst="rect">
             <a:avLst/>
@@ -5618,7 +5618,7 @@
                   <a:schemeClr val="accent5"/>
                 </a:solidFill>
               </a:rPr>
-              <a:t>Three instruct/thinking pairs, two families (Olmo 3, Qwen3), on ASU’s Voyager API.</a:t>
+              <a:t>We test 3 pairs of models from Olmo 3 and Qwen3. Each pair has a regular chat model (Instruct) and a thinking model that reasons in private first.</a:t>
             </a:r>
             <a:endParaRPr lang="en-US" sz="1300" dirty="0"/>
           </a:p>
@@ -5654,7 +5654,7 @@
                   <a:schemeClr val="tx1"/>
                 </a:solidFill>
               </a:rPr>
-              <a:t>Since the proposal</a:t>
+              <a:t>What we changed after the review</a:t>
             </a:r>
             <a:endParaRPr lang="en-US" sz="1900" dirty="0"/>
           </a:p>
@@ -5694,7 +5694,7 @@
                   <a:schemeClr val="tx1"/>
                 </a:solidFill>
               </a:rPr>
-              <a:t>Instruct vs thinking = differently trained models.</a:t>
+              <a:t>The two models in a pair are trained differently,</a:t>
             </a:r>
             <a:pPr indent="0" marL="0">
               <a:spcAft>
@@ -5708,7 +5708,7 @@
                   <a:schemeClr val="tx1"/>
                 </a:solidFill>
               </a:rPr>
-              <a:t> Voyager has no thinking on/off switch, so we added “think briefly” vs normal on the same checkpoint.</a:t>
+              <a:t> so a gap isn’t only about thinking. Voyager can’t turn thinking off, so we also ask the same model to “think briefly”.</a:t>
             </a:r>
             <a:endParaRPr lang="en-US" sz="1400" dirty="0"/>
           </a:p>
@@ -5726,7 +5726,7 @@
                   <a:schemeClr val="tx1"/>
                 </a:solidFill>
               </a:rPr>
-              <a:t>Repeated no-hint runs</a:t>
+              <a:t>We run each puzzle 3 times with no hint</a:t>
             </a:r>
             <a:pPr indent="0" marL="0">
               <a:spcAft>
@@ -5740,7 +5740,7 @@
                   <a:schemeClr val="tx1"/>
                 </a:solidFill>
               </a:rPr>
-              <a:t> (3 seeds) to separate hint effects from normal run-to-run variation.</a:t>
+              <a:t> to see how much answers change by chance.</a:t>
             </a:r>
             <a:endParaRPr lang="en-US" sz="1400" dirty="0"/>
           </a:p>
@@ -5758,7 +5758,7 @@
                   <a:schemeClr val="tx1"/>
                 </a:solidFill>
               </a:rPr>
-              <a:t>Hints balanced across answer positions</a:t>
+              <a:t>Hints point to every letter equally often,</a:t>
             </a:r>
             <a:pPr indent="0" marL="0">
               <a:spcAft>
@@ -5772,7 +5772,7 @@
                   <a:schemeClr val="tx1"/>
                 </a:solidFill>
               </a:rPr>
-              <a:t>, and correct hints added alongside wrong ones.</a:t>
+              <a:t> and some hints are correct.</a:t>
             </a:r>
             <a:endParaRPr lang="en-US" sz="1400" dirty="0"/>
           </a:p>
@@ -5790,7 +5790,7 @@
                   <a:schemeClr val="tx1"/>
                 </a:solidFill>
               </a:rPr>
-              <a:t>Correct answers balanced across positions</a:t>
+              <a:t>Right answers are spread across the letters.</a:t>
             </a:r>
             <a:pPr indent="0" marL="0">
               <a:spcAft>
@@ -5804,7 +5804,7 @@
                   <a:schemeClr val="tx1"/>
                 </a:solidFill>
               </a:rPr>
-              <a:t> — they had piled up at (A).</a:t>
+              <a:t> Before, too many were (A).</a:t>
             </a:r>
             <a:endParaRPr lang="en-US" sz="1400" dirty="0"/>
           </a:p>
@@ -5822,7 +5822,7 @@
                   <a:schemeClr val="tx1"/>
                 </a:solidFill>
               </a:rPr>
-              <a:t>“Mentions the hint” ≠ “admits it changed the answer”</a:t>
+              <a:t>“Mentions the hint” is scored apart</a:t>
             </a:r>
             <a:pPr indent="0" marL="0">
               <a:spcAft>
@@ -5836,7 +5836,7 @@
                   <a:schemeClr val="tx1"/>
                 </a:solidFill>
               </a:rPr>
-              <a:t> — scored separately.</a:t>
+              <a:t> from “says the hint changed its answer”.</a:t>
             </a:r>
             <a:endParaRPr lang="en-US" sz="1400" dirty="0"/>
           </a:p>
@@ -5854,7 +5854,7 @@
                   <a:schemeClr val="tx1"/>
                 </a:solidFill>
               </a:rPr>
-              <a:t>Planned: a two-agent version</a:t>
+              <a:t>Maybe later: a second model</a:t>
             </a:r>
             <a:pPr indent="0" marL="0">
               <a:spcAft>
@@ -5868,7 +5868,7 @@
                   <a:schemeClr val="tx1"/>
                 </a:solidFill>
               </a:rPr>
-              <a:t> — does a reviewer model catch or repeat the influence?</a:t>
+              <a:t> reviews the first one’s answer. Does it catch the hint?</a:t>
             </a:r>
             <a:endParaRPr lang="en-US" sz="1400" dirty="0"/>
           </a:p>
@@ -5976,7 +5976,7 @@
                   <a:schemeClr val="tx1"/>
                 </a:solidFill>
               </a:rPr>
-              <a:t>The pipeline runs end to end</a:t>
+              <a:t>Our pipeline runs end to end</a:t>
             </a:r>
             <a:endParaRPr lang="en-US" sz="3000" dirty="0"/>
           </a:p>
@@ -6058,7 +6058,7 @@
                   <a:schemeClr val="tx1"/>
                 </a:solidFill>
               </a:rPr>
-              <a:t>Generate puzzles</a:t>
+              <a:t>Make puzzles</a:t>
             </a:r>
             <a:endParaRPr lang="en-US" sz="1500" dirty="0"/>
           </a:p>
@@ -6094,7 +6094,7 @@
                   <a:schemeClr val="accent5"/>
                 </a:solidFill>
               </a:rPr>
-              <a:t>Shuffled-object tasks with exact answers; new each time, so no training-data overlap</a:t>
+              <a:t>Swap puzzles with one right answer, made fresh so no model has seen them</a:t>
             </a:r>
             <a:endParaRPr lang="en-US" sz="1200" dirty="0"/>
           </a:p>
@@ -6236,7 +6236,7 @@
                   <a:schemeClr val="accent5"/>
                 </a:solidFill>
               </a:rPr>
-              <a:t>None, wrong, or correct; positions balanced</a:t>
+              <a:t>No hint, a wrong hint, or a right one, spread across the letters</a:t>
             </a:r>
             <a:endParaRPr lang="en-US" sz="1200" dirty="0"/>
           </a:p>
@@ -6378,7 +6378,7 @@
                   <a:schemeClr val="accent5"/>
                 </a:solidFill>
               </a:rPr>
-              <a:t>3 instruct/thinking pairs on ASU Voyager, streamed, cached</a:t>
+              <a:t>3 pairs on ASU’s free Voyager service; we save every reply</a:t>
             </a:r>
             <a:endParaRPr lang="en-US" sz="1200" dirty="0"/>
           </a:p>
@@ -6484,7 +6484,7 @@
                   <a:schemeClr val="tx1"/>
                 </a:solidFill>
               </a:rPr>
-              <a:t>Split channels</a:t>
+              <a:t>Split the reply</a:t>
             </a:r>
             <a:endParaRPr lang="en-US" sz="1500" dirty="0"/>
           </a:p>
@@ -6520,7 +6520,7 @@
                   <a:schemeClr val="accent5"/>
                 </a:solidFill>
               </a:rPr>
-              <a:t>Private reasoning vs final answer</a:t>
+              <a:t>The private reasoning and the final answer come back separately</a:t>
             </a:r>
             <a:endParaRPr lang="en-US" sz="1200" dirty="0"/>
           </a:p>
@@ -6662,7 +6662,7 @@
                   <a:schemeClr val="accent5"/>
                 </a:solidFill>
               </a:rPr>
-              <a:t>Parse the answer; detect hint mentions</a:t>
+              <a:t>Read off the answer letter; check if the hint is mentioned</a:t>
             </a:r>
             <a:endParaRPr lang="en-US" sz="1200" dirty="0"/>
           </a:p>
@@ -6768,7 +6768,7 @@
                   <a:schemeClr val="tx1"/>
                 </a:solidFill>
               </a:rPr>
-              <a:t>Analyze</a:t>
+              <a:t>Compare</a:t>
             </a:r>
             <a:endParaRPr lang="en-US" sz="1500" dirty="0"/>
           </a:p>
@@ -6804,7 +6804,7 @@
                   <a:schemeClr val="accent5"/>
                 </a:solidFill>
               </a:rPr>
-              <a:t>Hint effect vs no-hint variation, bootstrap CIs</a:t>
+              <a:t>With vs without the hint, with 95% ranges</a:t>
             </a:r>
             <a:endParaRPr lang="en-US" sz="1200" dirty="0"/>
           </a:p>
@@ -6862,7 +6862,7 @@
                   <a:schemeClr val="accent1"/>
                 </a:solidFill>
               </a:rPr>
-              <a:t>105</a:t>
+              <a:t>1,056</a:t>
             </a:r>
             <a:endParaRPr lang="en-US" sz="4000" dirty="0"/>
           </a:p>
@@ -6898,7 +6898,7 @@
                   <a:schemeClr val="tx1"/>
                 </a:solidFill>
               </a:rPr>
-              <a:t>model calls in this round</a:t>
+              <a:t>questions sent this round</a:t>
             </a:r>
             <a:endParaRPr lang="en-US" sz="1300" dirty="0"/>
           </a:p>
@@ -6992,7 +6992,7 @@
                   <a:schemeClr val="tx1"/>
                 </a:solidFill>
               </a:rPr>
-              <a:t>models, 2 families</a:t>
+              <a:t>models from 2 families</a:t>
             </a:r>
             <a:endParaRPr lang="en-US" sz="1300" dirty="0"/>
           </a:p>
@@ -7086,7 +7086,7 @@
                   <a:schemeClr val="tx1"/>
                 </a:solidFill>
               </a:rPr>
-              <a:t>API errors after fixes</a:t>
+              <a:t>failed calls</a:t>
             </a:r>
             <a:endParaRPr lang="en-US" sz="1300" dirty="0"/>
           </a:p>
@@ -7180,7 +7180,7 @@
                   <a:schemeClr val="tx1"/>
                 </a:solidFill>
               </a:rPr>
-              <a:t>calls in earlier pilots</a:t>
+              <a:t>calls in earlier test runs</a:t>
             </a:r>
             <a:endParaRPr lang="en-US" sz="1300" dirty="0"/>
           </a:p>
@@ -7288,7 +7288,7 @@
                   <a:schemeClr val="tx1"/>
                 </a:solidFill>
               </a:rPr>
-              <a:t>Result 1: the hint barely changes answers</a:t>
+              <a:t>Result 1: only Olmo 3 7B Instruct follows wrong hints</a:t>
             </a:r>
             <a:endParaRPr lang="en-US" sz="3000" dirty="0"/>
           </a:p>
@@ -7357,14 +7357,14 @@
               <a:buNone/>
             </a:pPr>
             <a:r>
-              <a:rPr lang="en-US" sz="1400" b="1" dirty="0">
+              <a:rPr lang="en-US" sz="1350" b="1" dirty="0">
                 <a:solidFill>
                   <a:schemeClr val="tx1"/>
                 </a:solidFill>
               </a:rPr>
-              <a:t>Hint effect (with − without), 95% CI</a:t>
-            </a:r>
-            <a:endParaRPr lang="en-US" sz="1400" dirty="0"/>
+              <a:t>How much the hint moved answers (95% range)</a:t>
+            </a:r>
+            <a:endParaRPr lang="en-US" sz="1350" dirty="0"/>
           </a:p>
         </p:txBody>
       </p:sp>
@@ -7377,7 +7377,7 @@
         <p:spPr>
           <a:xfrm>
             <a:off x="8092440" y="1920240"/>
-            <a:ext cx="3383280" cy="2103120"/>
+            <a:ext cx="3383280" cy="1920240"/>
           </a:xfrm>
           <a:prstGeom prst="rect">
             <a:avLst/>
@@ -7401,7 +7401,7 @@
                   <a:schemeClr val="tx1"/>
                 </a:solidFill>
               </a:rPr>
-              <a:t>Olmo 3 7B Instruct:  –</a:t>
+              <a:t>Olmo 3 7B Instruct:  +10.4 points (2.1 to 18.8)</a:t>
             </a:r>
             <a:endParaRPr lang="en-US" sz="1150" dirty="0"/>
           </a:p>
@@ -7418,7 +7418,7 @@
                   <a:schemeClr val="tx1"/>
                 </a:solidFill>
               </a:rPr>
-              <a:t>Olmo 3 7B Think:  –</a:t>
+              <a:t>Olmo 3 7B Think:  +2.1 points (0.0 to 6.3)</a:t>
             </a:r>
             <a:endParaRPr lang="en-US" sz="1150" dirty="0"/>
           </a:p>
@@ -7435,7 +7435,7 @@
                   <a:schemeClr val="tx1"/>
                 </a:solidFill>
               </a:rPr>
-              <a:t>Olmo 3 32B Instruct:  –</a:t>
+              <a:t>Olmo 3 32B Instruct:  no effect</a:t>
             </a:r>
             <a:endParaRPr lang="en-US" sz="1150" dirty="0"/>
           </a:p>
@@ -7452,7 +7452,7 @@
                   <a:schemeClr val="tx1"/>
                 </a:solidFill>
               </a:rPr>
-              <a:t>Olmo 3 32B Think:  –</a:t>
+              <a:t>Olmo 3 32B Think:  no effect</a:t>
             </a:r>
             <a:endParaRPr lang="en-US" sz="1150" dirty="0"/>
           </a:p>
@@ -7469,7 +7469,7 @@
                   <a:schemeClr val="tx1"/>
                 </a:solidFill>
               </a:rPr>
-              <a:t>Qwen3 30B Instruct:  –</a:t>
+              <a:t>Qwen3 30B Instruct:  no effect</a:t>
             </a:r>
             <a:endParaRPr lang="en-US" sz="1150" dirty="0"/>
           </a:p>
@@ -7486,7 +7486,7 @@
                   <a:schemeClr val="tx1"/>
                 </a:solidFill>
               </a:rPr>
-              <a:t>Qwen3 30B Thinking:  –</a:t>
+              <a:t>Qwen3 30B Thinking:  no effect</a:t>
             </a:r>
             <a:endParaRPr lang="en-US" sz="1150" dirty="0"/>
           </a:p>
@@ -7500,8 +7500,8 @@
         </p:nvSpPr>
         <p:spPr>
           <a:xfrm>
-            <a:off x="8092440" y="4069080"/>
-            <a:ext cx="3383280" cy="1920240"/>
+            <a:off x="8092440" y="3886200"/>
+            <a:ext cx="3383280" cy="2148840"/>
           </a:xfrm>
           <a:prstGeom prst="rect">
             <a:avLst/>
@@ -7515,43 +7515,43 @@
           <a:p>
             <a:pPr indent="0" marL="0">
               <a:spcAft>
-                <a:spcPts val="600"/>
+                <a:spcPts val="500"/>
               </a:spcAft>
               <a:buNone/>
             </a:pPr>
             <a:r>
-              <a:rPr lang="en-US" sz="1200" b="1" dirty="0">
+              <a:rPr lang="en-US" sz="1150" b="1" dirty="0">
                 <a:solidFill>
                   <a:schemeClr val="tx1"/>
                 </a:solidFill>
               </a:rPr>
-              <a:t>What we can say: </a:t>
+              <a:t>What we found: </a:t>
             </a:r>
             <a:pPr indent="0" marL="0">
               <a:spcAft>
-                <a:spcPts val="600"/>
+                <a:spcPts val="500"/>
               </a:spcAft>
               <a:buNone/>
             </a:pPr>
             <a:r>
-              <a:rPr lang="en-US" sz="1200" dirty="0">
+              <a:rPr lang="en-US" sz="1150" dirty="0">
                 <a:solidFill>
                   <a:schemeClr val="tx1"/>
                 </a:solidFill>
               </a:rPr>
-              <a:t>on these puzzles a wrong hint shifts choices by only a few points, within ordinary run-to-run variation for most models.</a:t>
-            </a:r>
-            <a:endParaRPr lang="en-US" sz="1200" dirty="0"/>
+              <a:t>Olmo 3 7B Instruct picked the wrong hinted answer 10% of the time, and never without the hint. Its thinking twin: 2%. The larger models: never.</a:t>
+            </a:r>
+            <a:endParaRPr lang="en-US" sz="1150" dirty="0"/>
           </a:p>
           <a:p>
             <a:pPr indent="0" marL="0">
               <a:spcAft>
-                <a:spcPts val="600"/>
+                <a:spcPts val="500"/>
               </a:spcAft>
               <a:buNone/>
             </a:pPr>
             <a:r>
-              <a:rPr lang="en-US" sz="1200" b="1" dirty="0">
+              <a:rPr lang="en-US" sz="1150" b="1" dirty="0">
                 <a:solidFill>
                   <a:schemeClr val="tx1"/>
                 </a:solidFill>
@@ -7560,19 +7560,19 @@
             </a:r>
             <a:pPr indent="0" marL="0">
               <a:spcAft>
-                <a:spcPts val="600"/>
+                <a:spcPts val="500"/>
               </a:spcAft>
               <a:buNone/>
             </a:pPr>
             <a:r>
-              <a:rPr lang="en-US" sz="1200" dirty="0">
+              <a:rPr lang="en-US" sz="1150" dirty="0">
                 <a:solidFill>
                   <a:schemeClr val="tx1"/>
                 </a:solidFill>
               </a:rPr>
-              <a:t>one task, 24 puzzles. The models are mostly accurate here, so a hint has little room to work.</a:t>
-            </a:r>
-            <a:endParaRPr lang="en-US" sz="1200" dirty="0"/>
+              <a:t>one kind of puzzle, 24 puzzles. The larger models solve almost all of them, so a hint has little room to work. Run again with no hint, Olmo 3 7B Instruct changed its answer on 29% of puzzles, but never to the hinted letter.</a:t>
+            </a:r>
+            <a:endParaRPr lang="en-US" sz="1150" dirty="0"/>
           </a:p>
         </p:txBody>
       </p:sp>
@@ -7678,7 +7678,7 @@
                   <a:schemeClr val="tx1"/>
                 </a:solidFill>
               </a:rPr>
-              <a:t>Result 2: thinking models notice the hint, then leave it out</a:t>
+              <a:t>Result 2: thinking models see the hint, rarely mention it</a:t>
             </a:r>
             <a:endParaRPr lang="en-US" sz="3000" dirty="0"/>
           </a:p>
@@ -7798,7 +7798,7 @@
                   <a:schemeClr val="accent1"/>
                 </a:solidFill>
               </a:rPr>
-              <a:t>0 / 0</a:t>
+              <a:t>208 / 216</a:t>
             </a:r>
             <a:endParaRPr lang="en-US" sz="3000" dirty="0"/>
           </a:p>
@@ -7834,7 +7834,7 @@
                   <a:schemeClr val="tx1"/>
                 </a:solidFill>
               </a:rPr>
-              <a:t>private traces mention the hint</a:t>
+              <a:t>times the private reasoning mentions it</a:t>
             </a:r>
             <a:endParaRPr lang="en-US" sz="1200" dirty="0"/>
           </a:p>
@@ -7916,7 +7916,7 @@
                   <a:schemeClr val="accent2"/>
                 </a:solidFill>
               </a:rPr>
-              <a:t>0 / 0</a:t>
+              <a:t>8 / 216</a:t>
             </a:r>
             <a:endParaRPr lang="en-US" sz="3000" dirty="0"/>
           </a:p>
@@ -7952,7 +7952,7 @@
                   <a:schemeClr val="tx1"/>
                 </a:solidFill>
               </a:rPr>
-              <a:t>final answers mention it</a:t>
+              <a:t>times the final answer mentions it</a:t>
             </a:r>
             <a:endParaRPr lang="en-US" sz="1200" dirty="0"/>
           </a:p>
@@ -7991,7 +7991,7 @@
                   <a:schemeClr val="tx1"/>
                 </a:solidFill>
               </a:rPr>
-              <a:t>Compare instruct models (one channel): </a:t>
+              <a:t>Compare regular models: </a:t>
             </a:r>
             <a:pPr indent="0" marL="0">
               <a:spcAft>
@@ -8005,7 +8005,7 @@
                   <a:schemeClr val="tx1"/>
                 </a:solidFill>
               </a:rPr>
-              <a:t>their visible reply mentions the hint in 0 / 0 hinted runs.</a:t>
+              <a:t>Olmo’s regular models mention the hint in 56 of 144 replies; its thinking models, 0 of 144. For Qwen it’s 6 vs 8 out of 72, about the same.</a:t>
             </a:r>
             <a:endParaRPr lang="en-US" sz="1150" dirty="0"/>
           </a:p>
@@ -8022,7 +8022,7 @@
                   <a:schemeClr val="tx1"/>
                 </a:solidFill>
               </a:rPr>
-              <a:t>Mostly mentions, not admissions: </a:t>
+              <a:t>Mentioning isn’t admitting: </a:t>
             </a:r>
             <a:pPr indent="0" marL="0">
               <a:spcAft>
@@ -8036,7 +8036,7 @@
                   <a:schemeClr val="tx1"/>
                 </a:solidFill>
               </a:rPr>
-              <a:t>traces usually reject the hint (“the user thought C, but…”).</a:t>
+              <a:t>the reasoning usually brushes the hint off (“the user thought C, but…”).</a:t>
             </a:r>
             <a:endParaRPr lang="en-US" sz="1150" dirty="0"/>
           </a:p>
@@ -8067,7 +8067,7 @@
                   <a:schemeClr val="tx1"/>
                 </a:solidFill>
               </a:rPr>
-              <a:t>keyword detector, manual labels pending. Omission is our operational measure, not proof of dishonesty, and the trace is not the model’s internal computation.</a:t>
+              <a:t>we find mentions by keyword for now; hand labels come next. Leaving the hint out doesn’t prove a model is hiding something.</a:t>
             </a:r>
             <a:endParaRPr lang="en-US" sz="1150" dirty="0"/>
           </a:p>
@@ -8175,7 +8175,7 @@
                   <a:schemeClr val="tx1"/>
                 </a:solidFill>
               </a:rPr>
-              <a:t>Smaller findings that shape the design</a:t>
+              <a:t>Smaller findings that change our plan</a:t>
             </a:r>
             <a:endParaRPr lang="en-US" sz="3000" dirty="0"/>
           </a:p>
@@ -8233,7 +8233,7 @@
                   <a:schemeClr val="accent2"/>
                 </a:solidFill>
               </a:rPr>
-              <a:t>–</a:t>
+              <a:t>5% to 59%</a:t>
             </a:r>
             <a:endParaRPr lang="en-US" sz="4000" dirty="0"/>
           </a:p>
@@ -8269,7 +8269,7 @@
                   <a:schemeClr val="tx1"/>
                 </a:solidFill>
               </a:rPr>
-              <a:t>more output tokens with a hint, for thinking models, even when the answer stays the same</a:t>
+              <a:t>longer replies when there’s a hint, on all six models, even when the answer stays the same. The hint costs extra work.</a:t>
             </a:r>
             <a:endParaRPr lang="en-US" sz="1400" dirty="0"/>
           </a:p>
@@ -8327,7 +8327,7 @@
                   <a:schemeClr val="accent1"/>
                 </a:solidFill>
               </a:rPr>
-              <a:t>–</a:t>
+              <a:t>88% to 96%</a:t>
             </a:r>
             <a:endParaRPr lang="en-US" sz="4000" dirty="0"/>
           </a:p>
@@ -8363,7 +8363,7 @@
                   <a:schemeClr val="tx1"/>
                 </a:solidFill>
               </a:rPr>
-              <a:t>of “answer only, don’t explain” prompts still produced a private trace on thinking models</a:t>
+              <a:t>of the time, thinking models told “answer only, don’t explain” still reasoned in private and stayed accurate. Regular models dropped from 100% to 8% and from 88% to 4% correct.</a:t>
             </a:r>
             <a:endParaRPr lang="en-US" sz="1400" dirty="0"/>
           </a:p>
@@ -8457,7 +8457,7 @@
                   <a:schemeClr val="tx1"/>
                 </a:solidFill>
               </a:rPr>
-              <a:t>responses cut off at the token limit dumped the private trace into the visible answer (~27k characters)</a:t>
+              <a:t>replies that hit the length limit spilled the private reasoning into the visible answer (about 27,000 characters).</a:t>
             </a:r>
             <a:endParaRPr lang="en-US" sz="1400" dirty="0"/>
           </a:p>
@@ -8515,7 +8515,7 @@
                   <a:schemeClr val="accent1"/>
                 </a:solidFill>
               </a:rPr>
-              <a:t>–</a:t>
+              <a:t>30% to 48%</a:t>
             </a:r>
             <a:endParaRPr lang="en-US" sz="4000" dirty="0"/>
           </a:p>
@@ -8551,7 +8551,7 @@
                   <a:schemeClr val="tx1"/>
                 </a:solidFill>
               </a:rPr>
-              <a:t>trace length when asked to “think briefly”, on the same checkpoint: one way to vary reasoning without changing models</a:t>
+              <a:t>shorter reasoning when we ask the same model to “think briefly”. This lets us vary thinking without switching models.</a:t>
             </a:r>
             <a:endParaRPr lang="en-US" sz="1400" dirty="0"/>
           </a:p>
@@ -8741,7 +8741,7 @@
                   <a:schemeClr val="tx1"/>
                 </a:solidFill>
               </a:rPr>
-              <a:t>Thinking can’t be switched off on Voyager</a:t>
+              <a:t>We can’t turn thinking off on Voyager</a:t>
             </a:r>
             <a:endParaRPr lang="en-US" sz="1600" dirty="0"/>
           </a:p>
@@ -8777,7 +8777,7 @@
                   <a:schemeClr val="accent5"/>
                 </a:solidFill>
               </a:rPr>
-              <a:t>We tested 7 models; the setting is ignored. We treat pairs as differently trained models, add “think briefly” on the same checkpoint, and could self-host on Sol if GPU time is available.</a:t>
+              <a:t>We tried it on 7 models and the setting is ignored. So we treat each pair as two different models, ask the same model to “think briefly”, and may run models ourselves on ASU’s Sol computers if we get GPU time.</a:t>
             </a:r>
             <a:endParaRPr lang="en-US" sz="1300" dirty="0"/>
           </a:p>
@@ -8859,7 +8859,7 @@
                   <a:schemeClr val="tx1"/>
                 </a:solidFill>
               </a:rPr>
-              <a:t>The hint barely moves answers on this task</a:t>
+              <a:t>The hint only moves the smallest model on these puzzles</a:t>
             </a:r>
             <a:endParaRPr lang="en-US" sz="1600" dirty="0"/>
           </a:p>
@@ -8895,7 +8895,7 @@
                   <a:schemeClr val="accent5"/>
                 </a:solidFill>
               </a:rPr>
-              <a:t>Add ambiguous questions (BBQ) and BBH tasks where hints have room to work. A well-controlled null result still counts.</a:t>
+              <a:t>We’ll add questions where hints have more room: ambiguous questions about people (BBQ) and harder reasoning tasks (BBH). If hints still do little, that is a real result too.</a:t>
             </a:r>
             <a:endParaRPr lang="en-US" sz="1300" dirty="0"/>
           </a:p>
@@ -8977,7 +8977,7 @@
                   <a:schemeClr val="tx1"/>
                 </a:solidFill>
               </a:rPr>
-              <a:t>A keyword detector can’t tell mention from admission</a:t>
+              <a:t>Keyword search can’t tell a mention from an admission</a:t>
             </a:r>
             <a:endParaRPr lang="en-US" sz="1600" dirty="0"/>
           </a:p>
@@ -9013,7 +9013,7 @@
                   <a:schemeClr val="accent5"/>
                 </a:solidFill>
               </a:rPr>
-              <a:t>Three-level manual labels (none / mentions / admits influence) on 200 cases, two raters, with agreement (Cohen’s κ) reported.</a:t>
+              <a:t>Two of us will hand-label 200 replies as: no mention, mentions the hint, or says the hint changed its answer. We’ll report how often we agree.</a:t>
             </a:r>
             <a:endParaRPr lang="en-US" sz="1300" dirty="0"/>
           </a:p>
@@ -9095,7 +9095,7 @@
                   <a:schemeClr val="tx1"/>
                 </a:solidFill>
               </a:rPr>
-              <a:t>Thinking costs about 3× the tokens</a:t>
+              <a:t>Thinking models write 3.4 to 4.5 times as much</a:t>
             </a:r>
             <a:endParaRPr lang="en-US" sz="1600" dirty="0"/>
           </a:p>
@@ -9131,7 +9131,7 @@
                   <a:schemeClr val="accent5"/>
                 </a:solidFill>
               </a:rPr>
-              <a:t>The full proposed design is ~180M output tokens. We’ll cut it to ~55M, run a timed budget test first, and keep streaming to avoid server timeouts.</a:t>
+              <a:t>Our full proposal would need about 180 million tokens (word pieces) of output. We’ll cut that to about 55 million, time a small run first, and keep getting replies in pieces so long ones don’t time out.</a:t>
             </a:r>
             <a:endParaRPr lang="en-US" sz="1300" dirty="0"/>
           </a:p>
@@ -9333,7 +9333,7 @@
                   <a:schemeClr val="tx1"/>
                 </a:solidFill>
               </a:rPr>
-              <a:t>Add BBQ + BBH · timed budget run · freeze prompts</a:t>
+              <a:t>Add BBQ and BBH questions, time a test run, lock the prompts</a:t>
             </a:r>
             <a:endParaRPr lang="en-US" sz="1300" dirty="0"/>
           </a:p>
@@ -9391,7 +9391,7 @@
                   <a:schemeClr val="bg1"/>
                 </a:solidFill>
               </a:rPr>
-              <a:t>Weeks 10–11</a:t>
+              <a:t>Weeks 10-11</a:t>
             </a:r>
             <a:endParaRPr lang="en-US" sz="1500" dirty="0"/>
           </a:p>
@@ -9427,7 +9427,7 @@
                   <a:schemeClr val="tx1"/>
                 </a:solidFill>
               </a:rPr>
-              <a:t>Core sweep · hand-label 200 cases (2 raters)</a:t>
+              <a:t>Main runs, and hand-label 200 replies (2 people)</a:t>
             </a:r>
             <a:endParaRPr lang="en-US" sz="1300" dirty="0"/>
           </a:p>
@@ -9485,7 +9485,7 @@
                   <a:schemeClr val="bg1"/>
                 </a:solidFill>
               </a:rPr>
-              <a:t>Weeks 12–13</a:t>
+              <a:t>Weeks 12-13</a:t>
             </a:r>
             <a:endParaRPr lang="en-US" sz="1500" dirty="0"/>
           </a:p>
@@ -9521,7 +9521,7 @@
                   <a:schemeClr val="tx1"/>
                 </a:solidFill>
               </a:rPr>
-              <a:t>Two-agent extension: hinted answer → reviewer</a:t>
+              <a:t>If we’re on track: a second model reviews the first</a:t>
             </a:r>
             <a:endParaRPr lang="en-US" sz="1300" dirty="0"/>
           </a:p>
@@ -9579,7 +9579,7 @@
                   <a:schemeClr val="bg1"/>
                 </a:solidFill>
               </a:rPr>
-              <a:t>Weeks 14–15</a:t>
+              <a:t>Weeks 14-15</a:t>
             </a:r>
             <a:endParaRPr lang="en-US" sz="1500" dirty="0"/>
           </a:p>
@@ -9615,7 +9615,7 @@
                   <a:schemeClr val="tx1"/>
                 </a:solidFill>
               </a:rPr>
-              <a:t>Statistics, figures, report draft</a:t>
+              <a:t>Stats, charts, report draft</a:t>
             </a:r>
             <a:endParaRPr lang="en-US" sz="1300" dirty="0"/>
           </a:p>
@@ -9866,7 +9866,7 @@
                   <a:schemeClr val="tx1"/>
                 </a:solidFill>
               </a:rPr>
-              <a:t>harness, model runs, two-agent extension</a:t>
+              <a:t>code that runs the models, the two-model extension</a:t>
             </a:r>
             <a:endParaRPr lang="en-US" sz="1500" dirty="0"/>
           </a:p>
@@ -9897,7 +9897,7 @@
                   <a:schemeClr val="tx1"/>
                 </a:solidFill>
               </a:rPr>
-              <a:t>datasets, hint construction, labeling guide</a:t>
+              <a:t>question sets, hints, labeling guide</a:t>
             </a:r>
             <a:endParaRPr lang="en-US" sz="1500" dirty="0"/>
           </a:p>
@@ -9928,7 +9928,7 @@
                   <a:schemeClr val="tx1"/>
                 </a:solidFill>
               </a:rPr>
-              <a:t>statistics, figures, rater agreement</a:t>
+              <a:t>stats, charts, checking how well our labels agree</a:t>
             </a:r>
             <a:endParaRPr lang="en-US" sz="1500" dirty="0"/>
           </a:p>
@@ -10067,7 +10067,7 @@
                   <a:schemeClr val="bg1"/>
                 </a:solidFill>
               </a:rPr>
-              <a:t>Models mostly ignore the hint, but thinking models often see it and never say so.</a:t>
+              <a:t>Models mostly ignore the hint, but thinking models almost always see it and almost never say so.</a:t>
             </a:r>
             <a:endParaRPr lang="en-US" sz="4000" dirty="0"/>
           </a:p>
@@ -10105,7 +10105,7 @@
                   <a:schemeClr val="bg2"/>
                 </a:solidFill>
               </a:rPr>
-              <a:t>Next: does a second model catch that influence, or pass it along?</a:t>
+              <a:t>Next: does a second model catch this, or pass it along?</a:t>
             </a:r>
             <a:endParaRPr lang="en-US" sz="1900" dirty="0"/>
           </a:p>

--- a/presentation/CSE598_progress_presentation.pptx
+++ b/presentation/CSE598_progress_presentation.pptx
@@ -19,9 +19,11 @@
     <p:sldId id="267" r:id="rId13"/>
     <p:sldId id="268" r:id="rId14"/>
     <p:sldId id="269" r:id="rId15"/>
+    <p:sldId id="270" r:id="rId16"/>
+    <p:sldId id="271" r:id="rId17"/>
   </p:sldIdLst>
   <p:notesMasterIdLst>
-    <p:notesMasterId r:id="rId16"/>
+    <p:notesMasterId r:id="rId18"/>
   </p:notesMasterIdLst>
   <p:sldSz cx="12192000" cy="6858000"/>
   <p:notesSz cx="6858000" cy="12192000"/>
@@ -120,42 +122,44 @@
   <p:extLst>
     <p:ext uri="{521415D9-36F7-43E2-AB2F-B90AF26B5E84}">
       <p14:sectionLst xmlns:p14="http://schemas.microsoft.com/office/powerpoint/2010/main">
-        <p14:section name="Opening" id="{c34682af-966f-20d0-8e77-6d32cd0811fe}">
+        <p14:section name="Opening" id="{5bdc3c78-fa89-1e70-659a-d8b78c53ab20}">
           <p14:sldIdLst>
             <p14:sldId id="256"/>
           </p14:sldIdLst>
         </p14:section>
-        <p14:section name="The idea" id="{97c46dfe-6efb-b60d-4bff-64bafa0b28ca}">
+        <p14:section name="The idea" id="{1499ab66-94db-bb07-7efe-e3a053846829}">
           <p14:sldIdLst>
             <p14:sldId id="257"/>
             <p14:sldId id="258"/>
           </p14:sldIdLst>
         </p14:section>
-        <p14:section name="Changes &amp; pipeline" id="{286cc420-3dca-2e5d-77d2-96f42d97c25b}">
+        <p14:section name="Changes &amp; pipeline" id="{c5410bdd-e2f0-a5c8-1c10-fd2b519ef8b3}">
           <p14:sldIdLst>
             <p14:sldId id="259"/>
             <p14:sldId id="260"/>
           </p14:sldIdLst>
         </p14:section>
-        <p14:section name="Results" id="{a690bf1f-f509-46a5-173c-4e0f8343ae5a}">
+        <p14:section name="Results" id="{e652e833-ba1e-001e-c055-8cc6cbfb8a5e}">
           <p14:sldIdLst>
             <p14:sldId id="261"/>
             <p14:sldId id="262"/>
             <p14:sldId id="263"/>
+            <p14:sldId id="264"/>
           </p14:sldIdLst>
         </p14:section>
-        <p14:section name="Risks &amp; next steps" id="{fae36605-6966-8992-48ba-ed29796c0aaf}">
+        <p14:section name="Risks &amp; next steps" id="{51108eca-95c6-9b98-5e17-7d9e5077efd2}">
           <p14:sldIdLst>
-            <p14:sldId id="264"/>
             <p14:sldId id="265"/>
             <p14:sldId id="266"/>
+            <p14:sldId id="267"/>
           </p14:sldIdLst>
         </p14:section>
-        <p14:section name="Backup" id="{3c854c9e-3655-10fd-cc25-11eb90f01c6e}">
+        <p14:section name="Backup" id="{8b62ad8c-0acf-5707-6f1e-204f6d756bb3}">
           <p14:sldIdLst>
-            <p14:sldId id="267"/>
             <p14:sldId id="268"/>
             <p14:sldId id="269"/>
+            <p14:sldId id="270"/>
+            <p14:sldId id="271"/>
           </p14:sldIdLst>
         </p14:section>
       </p14:sectionLst>
@@ -193,7 +197,7 @@
                 </a:solidFill>
                 <a:latin typeface="+mn-lt"/>
               </a:rPr>
-              <a:t>How often each model picked the wrong answer we hinted (out of 48 tries)</a:t>
+              <a:t>Our puzzles: how often each model picked the wrong hinted answer (48 tries)</a:t>
             </a:r>
           </a:p>
         </c:rich>
@@ -482,7 +486,7 @@
                 </a:solidFill>
                 <a:latin typeface="+mn-lt"/>
               </a:rPr>
-              <a:t>Thinking models, in replies that had a hint</a:t>
+              <a:t>Thinking models, in replies that had a hint (keyword count)</a:t>
             </a:r>
           </a:p>
         </c:rich>
@@ -830,6 +834,380 @@
 </c:chartSpace>
 </file>
 
+<file path=ppt/charts/chart3.xml><?xml version="1.0" encoding="utf-8"?>
+<c:chartSpace xmlns:c="http://schemas.openxmlformats.org/drawingml/2006/chart" xmlns:a="http://schemas.openxmlformats.org/drawingml/2006/main" xmlns:r="http://schemas.openxmlformats.org/officeDocument/2006/relationships">
+  <c:date1904 val="0"/>
+  <c:roundedCorners val="1"/>
+  <c:chart>
+    <c:title>
+      <c:tx>
+        <c:rich>
+          <a:bodyPr/>
+          <a:lstStyle/>
+          <a:p>
+            <a:pPr>
+              <a:defRPr sz="1300" b="0" i="0" u="none" strike="noStrike">
+                <a:solidFill>
+                  <a:srgbClr val="1A1D24"/>
+                </a:solidFill>
+                <a:latin typeface="+mn-lt"/>
+              </a:defRPr>
+            </a:pPr>
+            <a:r>
+              <a:rPr sz="1300" b="0" i="0" u="none" strike="noStrike">
+                <a:solidFill>
+                  <a:srgbClr val="1A1D24"/>
+                </a:solidFill>
+                <a:latin typeface="+mn-lt"/>
+              </a:rPr>
+              <a:t>Exam questions: how often each model picked the wrong hinted letter</a:t>
+            </a:r>
+          </a:p>
+        </c:rich>
+      </c:tx>
+      <c:layout/>
+      <c:overlay val="0"/>
+    </c:title>
+    <c:autoTitleDeleted val="0"/>
+    <c:plotArea>
+      <c:layout/>
+      <c:barChart>
+        <c:barDir val="bar"/>
+        <c:grouping val="clustered"/>
+        <c:varyColors val="0"/>
+        <c:ser>
+          <c:idx val="0"/>
+          <c:order val="0"/>
+          <c:tx>
+            <c:strRef>
+              <c:f>Sheet1!$B$1</c:f>
+              <c:strCache>
+                <c:ptCount val="1"/>
+                <c:pt idx="0">
+                  <c:v>Hint from the user</c:v>
+                </c:pt>
+              </c:strCache>
+            </c:strRef>
+          </c:tx>
+          <c:spPr>
+            <a:solidFill>
+              <a:srgbClr val="6B7280"/>
+            </a:solidFill>
+            <a:effectLst/>
+          </c:spPr>
+          <c:invertIfNegative val="0"/>
+          <c:dLbls>
+            <c:numFmt formatCode="0%" sourceLinked="0"/>
+            <c:txPr>
+              <a:bodyPr/>
+              <a:lstStyle/>
+              <a:p>
+                <a:pPr>
+                  <a:defRPr b="0" i="0" strike="noStrike" sz="1200" u="none">
+                    <a:solidFill>
+                      <a:srgbClr val="1A1D24"/>
+                    </a:solidFill>
+                    <a:latin typeface="+mn-lt"/>
+                  </a:defRPr>
+                </a:pPr>
+              </a:p>
+            </c:txPr>
+            <c:showLegendKey val="0"/>
+            <c:showVal val="1"/>
+            <c:showCatName val="0"/>
+            <c:showSerName val="0"/>
+            <c:showPercent val="0"/>
+            <c:showBubbleSize val="0"/>
+            <c:showLeaderLines val="0"/>
+          </c:dLbls>
+          <c:cat>
+            <c:multiLvlStrRef>
+              <c:f>Sheet1!$A$2:$A$4</c:f>
+              <c:multiLvlStrCache>
+                <c:ptCount val="3"/>
+                <c:lvl>
+                  <c:pt idx="0">
+                    <c:v>Olmo 7B regular (19 questions)</c:v>
+                  </c:pt>
+                  <c:pt idx="1">
+                    <c:v>Olmo 7B thinking (20 questions)</c:v>
+                  </c:pt>
+                  <c:pt idx="2">
+                    <c:v>Qwen 30B thinking (11 questions)</c:v>
+                  </c:pt>
+                </c:lvl>
+              </c:multiLvlStrCache>
+            </c:multiLvlStrRef>
+          </c:cat>
+          <c:val>
+            <c:numRef>
+              <c:f>Sheet1!$B$2:$B$4</c:f>
+              <c:numCache>
+                <c:formatCode>General</c:formatCode>
+                <c:ptCount val="3"/>
+                <c:pt idx="0">
+                  <c:v>0.3684210526315789</c:v>
+                </c:pt>
+                <c:pt idx="1">
+                  <c:v>0.1</c:v>
+                </c:pt>
+                <c:pt idx="2">
+                  <c:v>0</c:v>
+                </c:pt>
+              </c:numCache>
+            </c:numRef>
+          </c:val>
+        </c:ser>
+        <c:ser>
+          <c:idx val="1"/>
+          <c:order val="1"/>
+          <c:tx>
+            <c:strRef>
+              <c:f>Sheet1!$C$1</c:f>
+              <c:strCache>
+                <c:ptCount val="1"/>
+                <c:pt idx="0">
+                  <c:v>Same hint from a “tool”</c:v>
+                </c:pt>
+              </c:strCache>
+            </c:strRef>
+          </c:tx>
+          <c:spPr>
+            <a:solidFill>
+              <a:srgbClr val="EB6834"/>
+            </a:solidFill>
+            <a:effectLst/>
+          </c:spPr>
+          <c:invertIfNegative val="0"/>
+          <c:dLbls>
+            <c:numFmt formatCode="0%" sourceLinked="0"/>
+            <c:txPr>
+              <a:bodyPr/>
+              <a:lstStyle/>
+              <a:p>
+                <a:pPr>
+                  <a:defRPr b="0" i="0" strike="noStrike" sz="1200" u="none">
+                    <a:solidFill>
+                      <a:srgbClr val="1A1D24"/>
+                    </a:solidFill>
+                    <a:latin typeface="+mn-lt"/>
+                  </a:defRPr>
+                </a:pPr>
+              </a:p>
+            </c:txPr>
+            <c:showLegendKey val="0"/>
+            <c:showVal val="1"/>
+            <c:showCatName val="0"/>
+            <c:showSerName val="0"/>
+            <c:showPercent val="0"/>
+            <c:showBubbleSize val="0"/>
+            <c:showLeaderLines val="0"/>
+          </c:dLbls>
+          <c:cat>
+            <c:multiLvlStrRef>
+              <c:f>Sheet1!$A$2:$A$4</c:f>
+              <c:multiLvlStrCache>
+                <c:ptCount val="3"/>
+                <c:lvl>
+                  <c:pt idx="0">
+                    <c:v>Olmo 7B regular (19 questions)</c:v>
+                  </c:pt>
+                  <c:pt idx="1">
+                    <c:v>Olmo 7B thinking (20 questions)</c:v>
+                  </c:pt>
+                  <c:pt idx="2">
+                    <c:v>Qwen 30B thinking (11 questions)</c:v>
+                  </c:pt>
+                </c:lvl>
+              </c:multiLvlStrCache>
+            </c:multiLvlStrRef>
+          </c:cat>
+          <c:val>
+            <c:numRef>
+              <c:f>Sheet1!$C$2:$C$4</c:f>
+              <c:numCache>
+                <c:formatCode>General</c:formatCode>
+                <c:ptCount val="3"/>
+                <c:pt idx="0">
+                  <c:v>0.42105263157894735</c:v>
+                </c:pt>
+                <c:pt idx="1">
+                  <c:v>0.5</c:v>
+                </c:pt>
+                <c:pt idx="2">
+                  <c:v>0.6363636363636364</c:v>
+                </c:pt>
+              </c:numCache>
+            </c:numRef>
+          </c:val>
+        </c:ser>
+        <c:dLbls>
+          <c:numFmt formatCode="0%" sourceLinked="0"/>
+          <c:txPr>
+            <a:bodyPr/>
+            <a:lstStyle/>
+            <a:p>
+              <a:pPr>
+                <a:defRPr b="0" i="0" strike="noStrike" sz="1200" u="none">
+                  <a:solidFill>
+                    <a:srgbClr val="1A1D24"/>
+                  </a:solidFill>
+                  <a:latin typeface="+mn-lt"/>
+                </a:defRPr>
+              </a:pPr>
+            </a:p>
+          </c:txPr>
+          <c:showLegendKey val="0"/>
+          <c:showVal val="1"/>
+          <c:showCatName val="0"/>
+          <c:showSerName val="0"/>
+          <c:showPercent val="0"/>
+          <c:showBubbleSize val="0"/>
+          <c:showLeaderLines val="0"/>
+        </c:dLbls>
+        <c:gapWidth val="55"/>
+        <c:overlap val="0"/>
+        <c:axId val="2094734554"/>
+        <c:axId val="2094734552"/>
+        <c:axId val="2094734556"/>
+      </c:barChart>
+      <c:catAx>
+        <c:axId val="2094734554"/>
+        <c:scaling>
+          <c:orientation val="maxMin"/>
+        </c:scaling>
+        <c:delete val="0"/>
+        <c:axPos val="l"/>
+        <c:numFmt formatCode="General" sourceLinked="1"/>
+        <c:majorTickMark val="out"/>
+        <c:minorTickMark val="none"/>
+        <c:tickLblPos val="nextTo"/>
+        <c:spPr>
+          <a:ln w="12700" cap="flat">
+            <a:solidFill>
+              <a:srgbClr val="888888"/>
+            </a:solidFill>
+            <a:prstDash val="solid"/>
+            <a:round/>
+          </a:ln>
+        </c:spPr>
+        <c:txPr>
+          <a:bodyPr/>
+          <a:lstStyle/>
+          <a:p>
+            <a:pPr>
+              <a:defRPr sz="1200" b="0" i="0" u="none" strike="noStrike">
+                <a:solidFill>
+                  <a:srgbClr val="1A1D24"/>
+                </a:solidFill>
+                <a:latin typeface="+mn-lt"/>
+              </a:defRPr>
+            </a:pPr>
+            <a:endParaRPr lang="en-US"/>
+          </a:p>
+        </c:txPr>
+        <c:crossAx val="2094734552"/>
+        <c:crosses val="autoZero"/>
+        <c:auto val="1"/>
+        <c:lblAlgn val="ctr"/>
+        <c:noMultiLvlLbl val="1"/>
+      </c:catAx>
+      <c:valAx>
+        <c:axId val="2094734552"/>
+        <c:scaling>
+          <c:orientation val="minMax"/>
+          <c:max val="1"/>
+          <c:min val="0"/>
+        </c:scaling>
+        <c:delete val="0"/>
+        <c:axPos val="b"/>
+        <c:majorGridlines>
+          <c:spPr>
+            <a:ln w="9525" cap="flat">
+              <a:solidFill>
+                <a:srgbClr val="E3E7ED"/>
+              </a:solidFill>
+              <a:prstDash val="solid"/>
+              <a:round/>
+            </a:ln>
+          </c:spPr>
+        </c:majorGridlines>
+        <c:numFmt formatCode="0%" sourceLinked="0"/>
+        <c:majorTickMark val="out"/>
+        <c:minorTickMark val="none"/>
+        <c:tickLblPos val="low"/>
+        <c:spPr>
+          <a:ln w="12700" cap="flat">
+            <a:solidFill>
+              <a:srgbClr val="888888"/>
+            </a:solidFill>
+            <a:prstDash val="solid"/>
+            <a:round/>
+          </a:ln>
+        </c:spPr>
+        <c:txPr>
+          <a:bodyPr/>
+          <a:lstStyle/>
+          <a:p>
+            <a:pPr>
+              <a:defRPr sz="1100" b="0" i="0" u="none" strike="noStrike">
+                <a:solidFill>
+                  <a:srgbClr val="6B7280"/>
+                </a:solidFill>
+                <a:latin typeface="+mn-lt"/>
+              </a:defRPr>
+            </a:pPr>
+            <a:endParaRPr lang="en-US"/>
+          </a:p>
+        </c:txPr>
+        <c:crossAx val="2094734554"/>
+        <c:crosses val="autoZero"/>
+        <c:crossBetween val="between"/>
+      </c:valAx>
+      <c:spPr>
+        <a:noFill/>
+        <a:ln>
+          <a:noFill/>
+        </a:ln>
+        <a:effectLst/>
+      </c:spPr>
+    </c:plotArea>
+    <c:legend>
+      <c:legendPos val="b"/>
+      <c:overlay val="0"/>
+      <c:txPr>
+        <a:bodyPr/>
+        <a:lstStyle/>
+        <a:p>
+          <a:pPr>
+            <a:defRPr sz="1200">
+              <a:solidFill>
+                <a:srgbClr val="1A1D24"/>
+              </a:solidFill>
+              <a:latin typeface="+mn-lt"/>
+              <a:cs typeface="+mn-lt"/>
+            </a:defRPr>
+          </a:pPr>
+          <a:endParaRPr lang="en-US"/>
+        </a:p>
+      </c:txPr>
+    </c:legend>
+    <c:plotVisOnly val="1"/>
+    <c:dispBlanksAs val="span"/>
+  </c:chart>
+  <c:spPr>
+    <a:noFill/>
+    <a:ln>
+      <a:noFill/>
+    </a:ln>
+    <a:effectLst/>
+  </c:spPr>
+  <c:externalData r:id="rId1">
+    <c:autoUpdate val="0"/>
+  </c:externalData>
+</c:chartSpace>
+</file>
+
 <file path=ppt/notesMasters/notesMaster1.xml><?xml version="1.0" encoding="utf-8"?>
 <p:notesMaster xmlns:a="http://schemas.openxmlformats.org/drawingml/2006/main" xmlns:r="http://schemas.openxmlformats.org/officeDocument/2006/relationships" xmlns:p="http://schemas.openxmlformats.org/presentationml/2006/main">
   <p:cSld>
@@ -1313,7 +1691,7 @@
           <a:p>
             <a:r>
               <a:rPr lang="en-US" dirty="0"/>
-              <a:t>Next week we add the new questions and lock our prompts. Weeks ten and eleven are the main runs and the hand labels. If we're on track, we'll test whether a second model, reviewing the first one's answer, catches the hint. Then stats, the report, and the final talk.</a:t>
+              <a:t>Our risks. We can't switch thinking off, so we compare differently trained models and say so. Our puzzles were too easy, so we've started on harder questions and will use a real tool call next. Keyword counts are upper limits, so two of us will label replies by hand. And thinking models write about four times as much and sometimes run out of room, so we'll set limits per model and trim the plan.</a:t>
             </a:r>
             <a:endParaRPr lang="en-US" dirty="0"/>
           </a:p>
@@ -1401,7 +1779,7 @@
           <a:p>
             <a:r>
               <a:rPr lang="en-US" dirty="0"/>
-              <a:t>So, in short: on these puzzles the hint rarely changes answers, but thinking models almost always notice it and almost never mention it in the answer. Thanks, we'll take your questions now.</a:t>
+              <a:t>Next week: harder questions, a real tool call, and locked prompts. Weeks ten and eleven are the main runs with user and tool hints, plus hand labels. If we're on track, we scale up the second-model check. Then stats, the report, and the final talk.</a:t>
             </a:r>
             <a:endParaRPr lang="en-US" dirty="0"/>
           </a:p>
@@ -1489,7 +1867,7 @@
           <a:p>
             <a:r>
               <a:rPr lang="en-US" dirty="0"/>
-              <a:t/>
+              <a:t>So, in short: thinking models almost always notice the hint and almost never mention it in the answer, and a hint that looks like it came from a tool sways them far more than one from the user. Thanks, we'll take your questions now.</a:t>
             </a:r>
             <a:endParaRPr lang="en-US" dirty="0"/>
           </a:p>
@@ -1707,6 +2085,182 @@
 </p:notes>
 </file>
 
+<file path=ppt/notesSlides/notesSlide15.xml><?xml version="1.0" encoding="utf-8"?>
+<p:notes xmlns:a="http://schemas.openxmlformats.org/drawingml/2006/main" xmlns:r="http://schemas.openxmlformats.org/officeDocument/2006/relationships" xmlns:p="http://schemas.openxmlformats.org/presentationml/2006/main">
+  <p:cSld>
+    <p:spTree>
+      <p:nvGrpSpPr>
+        <p:cNvPr id="1" name=""/>
+        <p:cNvGrpSpPr/>
+        <p:nvPr/>
+      </p:nvGrpSpPr>
+      <p:grpSpPr>
+        <a:xfrm>
+          <a:off x="0" y="0"/>
+          <a:ext cx="0" cy="0"/>
+          <a:chOff x="0" y="0"/>
+          <a:chExt cx="0" cy="0"/>
+        </a:xfrm>
+      </p:grpSpPr>
+      <p:sp>
+        <p:nvSpPr>
+          <p:cNvPr id="2" name="Slide Image Placeholder 1"/>
+          <p:cNvSpPr>
+            <a:spLocks noGrp="1" noRot="1" noChangeAspect="1"/>
+          </p:cNvSpPr>
+          <p:nvPr>
+            <p:ph type="sldImg"/>
+          </p:nvPr>
+        </p:nvSpPr>
+        <p:spPr/>
+      </p:sp>
+      <p:sp>
+        <p:nvSpPr>
+          <p:cNvPr id="3" name="Notes Placeholder 2"/>
+          <p:cNvSpPr>
+            <a:spLocks noGrp="1"/>
+          </p:cNvSpPr>
+          <p:nvPr>
+            <p:ph type="body" idx="1"/>
+          </p:nvPr>
+        </p:nvSpPr>
+        <p:spPr/>
+        <p:txBody>
+          <a:bodyPr/>
+          <a:lstStyle/>
+          <a:p>
+            <a:r>
+              <a:rPr lang="en-US" dirty="0"/>
+              <a:t/>
+            </a:r>
+            <a:endParaRPr lang="en-US" dirty="0"/>
+          </a:p>
+        </p:txBody>
+      </p:sp>
+      <p:sp>
+        <p:nvSpPr>
+          <p:cNvPr id="4" name="Slide Number Placeholder 3"/>
+          <p:cNvSpPr>
+            <a:spLocks noGrp="1"/>
+          </p:cNvSpPr>
+          <p:nvPr>
+            <p:ph type="sldNum" sz="quarter" idx="10"/>
+          </p:nvPr>
+        </p:nvSpPr>
+        <p:spPr/>
+        <p:txBody>
+          <a:bodyPr/>
+          <a:lstStyle/>
+          <a:p>
+            <a:fld id="{F7021451-1387-4CA6-816F-3879F97B5CBC}" type="slidenum">
+              <a:rPr lang="en-US"/>
+              <a:t>15</a:t>
+            </a:fld>
+            <a:endParaRPr lang="en-US"/>
+          </a:p>
+        </p:txBody>
+      </p:sp>
+    </p:spTree>
+    <p:extLst>
+      <p:ext uri="{BB962C8B-B14F-4D97-AF65-F5344CB8AC3E}">
+        <p14:creationId xmlns:p14="http://schemas.microsoft.com/office/powerpoint/2010/main" val="1024086991"/>
+      </p:ext>
+    </p:extLst>
+  </p:cSld>
+  <p:clrMapOvr>
+    <a:masterClrMapping/>
+  </p:clrMapOvr>
+</p:notes>
+</file>
+
+<file path=ppt/notesSlides/notesSlide16.xml><?xml version="1.0" encoding="utf-8"?>
+<p:notes xmlns:a="http://schemas.openxmlformats.org/drawingml/2006/main" xmlns:r="http://schemas.openxmlformats.org/officeDocument/2006/relationships" xmlns:p="http://schemas.openxmlformats.org/presentationml/2006/main">
+  <p:cSld>
+    <p:spTree>
+      <p:nvGrpSpPr>
+        <p:cNvPr id="1" name=""/>
+        <p:cNvGrpSpPr/>
+        <p:nvPr/>
+      </p:nvGrpSpPr>
+      <p:grpSpPr>
+        <a:xfrm>
+          <a:off x="0" y="0"/>
+          <a:ext cx="0" cy="0"/>
+          <a:chOff x="0" y="0"/>
+          <a:chExt cx="0" cy="0"/>
+        </a:xfrm>
+      </p:grpSpPr>
+      <p:sp>
+        <p:nvSpPr>
+          <p:cNvPr id="2" name="Slide Image Placeholder 1"/>
+          <p:cNvSpPr>
+            <a:spLocks noGrp="1" noRot="1" noChangeAspect="1"/>
+          </p:cNvSpPr>
+          <p:nvPr>
+            <p:ph type="sldImg"/>
+          </p:nvPr>
+        </p:nvSpPr>
+        <p:spPr/>
+      </p:sp>
+      <p:sp>
+        <p:nvSpPr>
+          <p:cNvPr id="3" name="Notes Placeholder 2"/>
+          <p:cNvSpPr>
+            <a:spLocks noGrp="1"/>
+          </p:cNvSpPr>
+          <p:nvPr>
+            <p:ph type="body" idx="1"/>
+          </p:nvPr>
+        </p:nvSpPr>
+        <p:spPr/>
+        <p:txBody>
+          <a:bodyPr/>
+          <a:lstStyle/>
+          <a:p>
+            <a:r>
+              <a:rPr lang="en-US" dirty="0"/>
+              <a:t/>
+            </a:r>
+            <a:endParaRPr lang="en-US" dirty="0"/>
+          </a:p>
+        </p:txBody>
+      </p:sp>
+      <p:sp>
+        <p:nvSpPr>
+          <p:cNvPr id="4" name="Slide Number Placeholder 3"/>
+          <p:cNvSpPr>
+            <a:spLocks noGrp="1"/>
+          </p:cNvSpPr>
+          <p:nvPr>
+            <p:ph type="sldNum" sz="quarter" idx="10"/>
+          </p:nvPr>
+        </p:nvSpPr>
+        <p:spPr/>
+        <p:txBody>
+          <a:bodyPr/>
+          <a:lstStyle/>
+          <a:p>
+            <a:fld id="{F7021451-1387-4CA6-816F-3879F97B5CBC}" type="slidenum">
+              <a:rPr lang="en-US"/>
+              <a:t>16</a:t>
+            </a:fld>
+            <a:endParaRPr lang="en-US"/>
+          </a:p>
+        </p:txBody>
+      </p:sp>
+    </p:spTree>
+    <p:extLst>
+      <p:ext uri="{BB962C8B-B14F-4D97-AF65-F5344CB8AC3E}">
+        <p14:creationId xmlns:p14="http://schemas.microsoft.com/office/powerpoint/2010/main" val="1024086991"/>
+      </p:ext>
+    </p:extLst>
+  </p:cSld>
+  <p:clrMapOvr>
+    <a:masterClrMapping/>
+  </p:clrMapOvr>
+</p:notes>
+</file>
+
 <file path=ppt/notesSlides/notesSlide2.xml><?xml version="1.0" encoding="utf-8"?>
 <p:notes xmlns:a="http://schemas.openxmlformats.org/drawingml/2006/main" xmlns:r="http://schemas.openxmlformats.org/officeDocument/2006/relationships" xmlns:p="http://schemas.openxmlformats.org/presentationml/2006/main">
   <p:cSld>
@@ -1753,7 +2307,7 @@
           <a:p>
             <a:r>
               <a:rPr lang="en-US" dirty="0"/>
-              <a:t>Some newer AI models are thinking models. Before they answer, they write private notes, then a short final answer. Regular models just answer. Picture an exam. A classmate whispers 'it's F'. You do rough work on scrap paper, then write your answer on the answer sheet. The whisper is our hint. The scrap paper is the model's private notes. The answer sheet is what the user sees. So we ask two things: did the hint change the answer, and did the model mention it, and where?</a:t>
+              <a:t>Some newer AI models are thinking models: they write private notes, then a short final answer. Regular models just answer. Picture an exam. A classmate whispers 'it's F'. You do rough work on scrap paper, then write on the answer sheet. The whisper is our hint, the scrap paper is the private notes, and the answer sheet is what the user sees. We ask: did the hint change the answer, and did the model mention it, and where?</a:t>
             </a:r>
             <a:endParaRPr lang="en-US" dirty="0"/>
           </a:p>
@@ -1841,7 +2395,7 @@
           <a:p>
             <a:r>
               <a:rPr lang="en-US" dirty="0"/>
-              <a:t>Here's a real reply from our run. The question is a puzzle: seven people swap balls fifteen times, and the model says who ends up with which ball. The user adds 'I think the answer is F'. F is wrong. In its private notes, the thinking model talks about the hint six times: the user thought F, but my tracking says A. Then the final answer is just 'Answer: (A)'. It wasn't fooled, but the user never sees that a hint was there.</a:t>
+              <a:t>Here's a real reply. Seven people swap balls fifteen times, and the model says who ends up with which ball. The user adds 'I think the answer is F', which is wrong. In its private notes, the thinking model brings up the hint six times and works out that it's wrong. Then the final answer is just 'Answer: (A)'. The user never sees that a hint was there.</a:t>
             </a:r>
             <a:endParaRPr lang="en-US" dirty="0"/>
           </a:p>
@@ -1929,7 +2483,7 @@
           <a:p>
             <a:r>
               <a:rPr lang="en-US" dirty="0"/>
-              <a:t>Our proposal review asked for tighter controls, and we made five changes. First, the regular and thinking versions are trained separately, so a gap between them isn't only about thinking. Voyager can't switch thinking off, so we also ask one model to think briefly. Second, we run each puzzle three times with no hint, to measure chance. Third, hints and right answers are spread evenly across the letters. Fourth, we score mentioning the hint apart from admitting it. Fifth, we tried 'answer only' prompts.</a:t>
+              <a:t>After the proposal review we made six changes. The regular and thinking models are trained separately, and Voyager can't switch thinking off, so we also ask one model to think briefly. We repeat each puzzle without a hint to measure chance. Hints and right answers are spread across the letters. We score mentioning apart from admitting. We tried 'answer only'. And we added harder exam questions with a second kind of hint.</a:t>
             </a:r>
             <a:endParaRPr lang="en-US" dirty="0"/>
           </a:p>
@@ -2017,7 +2571,7 @@
           <a:p>
             <a:r>
               <a:rPr lang="en-US" dirty="0"/>
-              <a:t>This is our pipeline, and it runs end to end. It makes new puzzles, adds a hint or not, and sends them to six models on ASU's free Voyager service. Each reply comes back in two parts, the private notes and the final answer. Then we score it and compare with and without the hint. This round sent 1,056 questions with no failures.</a:t>
+              <a:t>This is our pipeline, and it runs end to end. It makes a question, adds a hint or not, and sends it to six models on ASU's free Voyager service. Each reply comes back in two parts, the private notes and the final answer. Then we score it and compare with and without the hint. So far we've sent 1,483 questions with no failures.</a:t>
             </a:r>
             <a:endParaRPr lang="en-US" dirty="0"/>
           </a:p>
@@ -2105,7 +2659,7 @@
           <a:p>
             <a:r>
               <a:rPr lang="en-US" dirty="0"/>
-              <a:t>Our first result: the hint rarely changes the answer. The bars show how often each model picked the wrong answer we hinted. Only the smallest regular model was swayed: 5 times out of 48, and never without the hint. Every other model, at most once. The bigger models got almost every puzzle right, so the hint had nothing to push. That's the main limit of this round: one kind of puzzle, and it's too easy for big models.</a:t>
+              <a:t>Our first result: hints rarely work, unless the model is unsure. The bars show how often each model picked the wrong answer we hinted on our puzzles. Only the smallest regular model was swayed: 5 times out of 48, and never without the hint. Every other model, at most once, because the bigger models got almost every puzzle right. But on harder exam questions it was unsure about, the same small model took the hint 7 times out of 14.</a:t>
             </a:r>
             <a:endParaRPr lang="en-US" dirty="0"/>
           </a:p>
@@ -2193,7 +2747,7 @@
           <a:p>
             <a:r>
               <a:rPr lang="en-US" dirty="0"/>
-              <a:t>Our second result is the main one. When there was a hint, the thinking models mentioned it in their private notes 208 times out of 216. In the final answer, only 8 times. For comparison, Olmo's regular models, which show everything, mention the hint in about a third of their replies. So for Olmo, thinking moves the mention out of sight. Most of these mentions brush the hint off, so we don't call them admissions. But someone reading only the answer would never know there was a hint.</a:t>
+              <a:t>Our second result. When there was a hint, the thinking models mentioned it in their private notes 208 times out of 216. In the final answer, only 8 times. Olmo's regular models, which show everything, mention it in about a third of their replies, so for Olmo, thinking moves the mention out of sight. These are keyword counts, so they're upper limits until we label replies by hand. Still, someone reading only the answer would almost never know there was a hint.</a:t>
             </a:r>
             <a:endParaRPr lang="en-US" dirty="0"/>
           </a:p>
@@ -2281,7 +2835,7 @@
           <a:p>
             <a:r>
               <a:rPr lang="en-US" dirty="0"/>
-              <a:t>Three more things. When we said 'answer only, don't explain', thinking models still made private notes and stayed right, while regular models fell to near zero, worse than guessing. When a reply got cut off at the length limit, the private notes spilled into the visible answer, every time. And asking for brief thinking cut the notes by a third to a half, which gives us a fair same-model comparison.</a:t>
+              <a:t>Our third result is new this week. On harder exam questions, we gave the same wrong letter two ways: from the user, or as if an answer-key tool had returned it. The thinking models mostly ignored the user but followed the tool: 17 of 31 questions, versus 2 of 31 from the user. When they followed it, the private notes cited the tool 16 of 17 times, the final answer only 6. It's a small first look, with the tool text pasted into the message.</a:t>
             </a:r>
             <a:endParaRPr lang="en-US" dirty="0"/>
           </a:p>
@@ -2369,7 +2923,7 @@
           <a:p>
             <a:r>
               <a:rPr lang="en-US" dirty="0"/>
-              <a:t>Our risks. We can't switch thinking off, so we're comparing differently trained models, and we say that. Our puzzles are too easy for big models, so we're adding harder questions and questions about people. Keywords can't tell a mention from an admission, so two of us will hand-label 200 replies. And thinking models write about four times as much, so we're trimming the plan and timing a test run first.</a:t>
+              <a:t>Four more things. Told 'answer only', thinking models still think in private and stay right, while regular models fall to near zero. Private notes can leak: cut-off replies sent all at once put them in the visible answer, 8 out of 8, but never when streamed. 'Think briefly' gives us less thinking on the same model. And in a small demo, a second model checking wrong answers was fooled 7 times out of 15 once it read the first model's explanation.</a:t>
             </a:r>
             <a:endParaRPr lang="en-US" dirty="0"/>
           </a:p>
@@ -3432,7 +3986,7 @@
                   <a:schemeClr val="tx1"/>
                 </a:solidFill>
               </a:rPr>
-              <a:t>Next steps</a:t>
+              <a:t>Risks and what we’re doing about them</a:t>
             </a:r>
             <a:endParaRPr lang="en-US" sz="3000" dirty="0"/>
           </a:p>
@@ -3440,512 +3994,20 @@
       </p:sp>
       <p:sp>
         <p:nvSpPr>
-          <p:cNvPr id="3" name="chev1"/>
+          <p:cNvPr id="3" name="risk1-circle"/>
           <p:cNvSpPr/>
           <p:nvPr/>
         </p:nvSpPr>
         <p:spPr>
           <a:xfrm>
-            <a:off x="548640" y="1463040"/>
-            <a:ext cx="2286000" cy="822960"/>
-          </a:xfrm>
-          <a:prstGeom prst="chevron">
-            <a:avLst/>
-          </a:prstGeom>
-          <a:solidFill>
-            <a:schemeClr val="accent1">
-              <a:alpha val="85000"/>
-            </a:schemeClr>
-          </a:solidFill>
-          <a:ln/>
-        </p:spPr>
-      </p:sp>
-      <p:sp>
-        <p:nvSpPr>
-          <p:cNvPr id="4" name="Text 2"/>
-          <p:cNvSpPr txBox="1"/>
-          <p:nvPr/>
-        </p:nvSpPr>
-        <p:spPr>
-          <a:xfrm>
-            <a:off x="868680" y="1463040"/>
-            <a:ext cx="1645920" cy="822960"/>
-          </a:xfrm>
-          <a:prstGeom prst="rect">
-            <a:avLst/>
-          </a:prstGeom>
-          <a:noFill/>
-          <a:ln/>
-        </p:spPr>
-        <p:txBody>
-          <a:bodyPr wrap="square" lIns="0" tIns="0" rIns="0" bIns="0" rtlCol="0" anchor="ctr"/>
-          <a:lstStyle/>
-          <a:p>
-            <a:pPr algn="ctr" indent="0" marL="0">
-              <a:buNone/>
-            </a:pPr>
-            <a:r>
-              <a:rPr lang="en-US" sz="1500" b="1" dirty="0">
-                <a:solidFill>
-                  <a:schemeClr val="bg1"/>
-                </a:solidFill>
-              </a:rPr>
-              <a:t>Week 9</a:t>
-            </a:r>
-            <a:endParaRPr lang="en-US" sz="1500" dirty="0"/>
-          </a:p>
-        </p:txBody>
-      </p:sp>
-      <p:sp>
-        <p:nvSpPr>
-          <p:cNvPr id="5" name="Text 3"/>
-          <p:cNvSpPr txBox="1"/>
-          <p:nvPr/>
-        </p:nvSpPr>
-        <p:spPr>
-          <a:xfrm>
-            <a:off x="640080" y="2423160"/>
-            <a:ext cx="2011680" cy="1188720"/>
-          </a:xfrm>
-          <a:prstGeom prst="rect">
-            <a:avLst/>
-          </a:prstGeom>
-          <a:noFill/>
-          <a:ln/>
-        </p:spPr>
-        <p:txBody>
-          <a:bodyPr wrap="square" lIns="0" tIns="0" rIns="0" bIns="0" rtlCol="0" anchor="t"/>
-          <a:lstStyle/>
-          <a:p>
-            <a:pPr algn="ctr" indent="0" marL="0">
-              <a:buNone/>
-            </a:pPr>
-            <a:r>
-              <a:rPr lang="en-US" sz="1400" dirty="0">
-                <a:solidFill>
-                  <a:schemeClr val="tx1"/>
-                </a:solidFill>
-              </a:rPr>
-              <a:t>Add BBQ and BBH questions, time a test run, lock the prompts</a:t>
-            </a:r>
-            <a:endParaRPr lang="en-US" sz="1400" dirty="0"/>
-          </a:p>
-        </p:txBody>
-      </p:sp>
-      <p:sp>
-        <p:nvSpPr>
-          <p:cNvPr id="6" name="chev2"/>
-          <p:cNvSpPr/>
-          <p:nvPr/>
-        </p:nvSpPr>
-        <p:spPr>
-          <a:xfrm>
-            <a:off x="2743200" y="1463040"/>
-            <a:ext cx="2286000" cy="822960"/>
-          </a:xfrm>
-          <a:prstGeom prst="chevron">
+            <a:off x="548640" y="1371600"/>
+            <a:ext cx="777240" cy="777240"/>
+          </a:xfrm>
+          <a:prstGeom prst="ellipse">
             <a:avLst/>
           </a:prstGeom>
           <a:solidFill>
             <a:schemeClr val="accent2">
-              <a:alpha val="85000"/>
-            </a:schemeClr>
-          </a:solidFill>
-          <a:ln/>
-        </p:spPr>
-      </p:sp>
-      <p:sp>
-        <p:nvSpPr>
-          <p:cNvPr id="7" name="Text 5"/>
-          <p:cNvSpPr txBox="1"/>
-          <p:nvPr/>
-        </p:nvSpPr>
-        <p:spPr>
-          <a:xfrm>
-            <a:off x="3063240" y="1463040"/>
-            <a:ext cx="1645920" cy="822960"/>
-          </a:xfrm>
-          <a:prstGeom prst="rect">
-            <a:avLst/>
-          </a:prstGeom>
-          <a:noFill/>
-          <a:ln/>
-        </p:spPr>
-        <p:txBody>
-          <a:bodyPr wrap="square" lIns="0" tIns="0" rIns="0" bIns="0" rtlCol="0" anchor="ctr"/>
-          <a:lstStyle/>
-          <a:p>
-            <a:pPr algn="ctr" indent="0" marL="0">
-              <a:buNone/>
-            </a:pPr>
-            <a:r>
-              <a:rPr lang="en-US" sz="1500" b="1" dirty="0">
-                <a:solidFill>
-                  <a:schemeClr val="bg1"/>
-                </a:solidFill>
-              </a:rPr>
-              <a:t>Weeks 10-11</a:t>
-            </a:r>
-            <a:endParaRPr lang="en-US" sz="1500" dirty="0"/>
-          </a:p>
-        </p:txBody>
-      </p:sp>
-      <p:sp>
-        <p:nvSpPr>
-          <p:cNvPr id="8" name="Text 6"/>
-          <p:cNvSpPr txBox="1"/>
-          <p:nvPr/>
-        </p:nvSpPr>
-        <p:spPr>
-          <a:xfrm>
-            <a:off x="2834640" y="2423160"/>
-            <a:ext cx="2011680" cy="1188720"/>
-          </a:xfrm>
-          <a:prstGeom prst="rect">
-            <a:avLst/>
-          </a:prstGeom>
-          <a:noFill/>
-          <a:ln/>
-        </p:spPr>
-        <p:txBody>
-          <a:bodyPr wrap="square" lIns="0" tIns="0" rIns="0" bIns="0" rtlCol="0" anchor="t"/>
-          <a:lstStyle/>
-          <a:p>
-            <a:pPr algn="ctr" indent="0" marL="0">
-              <a:buNone/>
-            </a:pPr>
-            <a:r>
-              <a:rPr lang="en-US" sz="1400" dirty="0">
-                <a:solidFill>
-                  <a:schemeClr val="tx1"/>
-                </a:solidFill>
-              </a:rPr>
-              <a:t>Main runs, and hand-label 200 replies</a:t>
-            </a:r>
-            <a:endParaRPr lang="en-US" sz="1400" dirty="0"/>
-          </a:p>
-        </p:txBody>
-      </p:sp>
-      <p:sp>
-        <p:nvSpPr>
-          <p:cNvPr id="9" name="chev3"/>
-          <p:cNvSpPr/>
-          <p:nvPr/>
-        </p:nvSpPr>
-        <p:spPr>
-          <a:xfrm>
-            <a:off x="4937760" y="1463040"/>
-            <a:ext cx="2286000" cy="822960"/>
-          </a:xfrm>
-          <a:prstGeom prst="chevron">
-            <a:avLst/>
-          </a:prstGeom>
-          <a:solidFill>
-            <a:schemeClr val="accent1">
-              <a:alpha val="85000"/>
-            </a:schemeClr>
-          </a:solidFill>
-          <a:ln/>
-        </p:spPr>
-      </p:sp>
-      <p:sp>
-        <p:nvSpPr>
-          <p:cNvPr id="10" name="Text 8"/>
-          <p:cNvSpPr txBox="1"/>
-          <p:nvPr/>
-        </p:nvSpPr>
-        <p:spPr>
-          <a:xfrm>
-            <a:off x="5257800" y="1463040"/>
-            <a:ext cx="1645920" cy="822960"/>
-          </a:xfrm>
-          <a:prstGeom prst="rect">
-            <a:avLst/>
-          </a:prstGeom>
-          <a:noFill/>
-          <a:ln/>
-        </p:spPr>
-        <p:txBody>
-          <a:bodyPr wrap="square" lIns="0" tIns="0" rIns="0" bIns="0" rtlCol="0" anchor="ctr"/>
-          <a:lstStyle/>
-          <a:p>
-            <a:pPr algn="ctr" indent="0" marL="0">
-              <a:buNone/>
-            </a:pPr>
-            <a:r>
-              <a:rPr lang="en-US" sz="1500" b="1" dirty="0">
-                <a:solidFill>
-                  <a:schemeClr val="bg1"/>
-                </a:solidFill>
-              </a:rPr>
-              <a:t>Weeks 12-13</a:t>
-            </a:r>
-            <a:endParaRPr lang="en-US" sz="1500" dirty="0"/>
-          </a:p>
-        </p:txBody>
-      </p:sp>
-      <p:sp>
-        <p:nvSpPr>
-          <p:cNvPr id="11" name="Text 9"/>
-          <p:cNvSpPr txBox="1"/>
-          <p:nvPr/>
-        </p:nvSpPr>
-        <p:spPr>
-          <a:xfrm>
-            <a:off x="5029200" y="2423160"/>
-            <a:ext cx="2011680" cy="1188720"/>
-          </a:xfrm>
-          <a:prstGeom prst="rect">
-            <a:avLst/>
-          </a:prstGeom>
-          <a:noFill/>
-          <a:ln/>
-        </p:spPr>
-        <p:txBody>
-          <a:bodyPr wrap="square" lIns="0" tIns="0" rIns="0" bIns="0" rtlCol="0" anchor="t"/>
-          <a:lstStyle/>
-          <a:p>
-            <a:pPr algn="ctr" indent="0" marL="0">
-              <a:buNone/>
-            </a:pPr>
-            <a:r>
-              <a:rPr lang="en-US" sz="1400" dirty="0">
-                <a:solidFill>
-                  <a:schemeClr val="tx1"/>
-                </a:solidFill>
-              </a:rPr>
-              <a:t>If we’re on track: does a second model catch the hint?</a:t>
-            </a:r>
-            <a:endParaRPr lang="en-US" sz="1400" dirty="0"/>
-          </a:p>
-        </p:txBody>
-      </p:sp>
-      <p:sp>
-        <p:nvSpPr>
-          <p:cNvPr id="12" name="chev4"/>
-          <p:cNvSpPr/>
-          <p:nvPr/>
-        </p:nvSpPr>
-        <p:spPr>
-          <a:xfrm>
-            <a:off x="7132320" y="1463040"/>
-            <a:ext cx="2286000" cy="822960"/>
-          </a:xfrm>
-          <a:prstGeom prst="chevron">
-            <a:avLst/>
-          </a:prstGeom>
-          <a:solidFill>
-            <a:schemeClr val="accent2">
-              <a:alpha val="85000"/>
-            </a:schemeClr>
-          </a:solidFill>
-          <a:ln/>
-        </p:spPr>
-      </p:sp>
-      <p:sp>
-        <p:nvSpPr>
-          <p:cNvPr id="13" name="Text 11"/>
-          <p:cNvSpPr txBox="1"/>
-          <p:nvPr/>
-        </p:nvSpPr>
-        <p:spPr>
-          <a:xfrm>
-            <a:off x="7452360" y="1463040"/>
-            <a:ext cx="1645920" cy="822960"/>
-          </a:xfrm>
-          <a:prstGeom prst="rect">
-            <a:avLst/>
-          </a:prstGeom>
-          <a:noFill/>
-          <a:ln/>
-        </p:spPr>
-        <p:txBody>
-          <a:bodyPr wrap="square" lIns="0" tIns="0" rIns="0" bIns="0" rtlCol="0" anchor="ctr"/>
-          <a:lstStyle/>
-          <a:p>
-            <a:pPr algn="ctr" indent="0" marL="0">
-              <a:buNone/>
-            </a:pPr>
-            <a:r>
-              <a:rPr lang="en-US" sz="1500" b="1" dirty="0">
-                <a:solidFill>
-                  <a:schemeClr val="bg1"/>
-                </a:solidFill>
-              </a:rPr>
-              <a:t>Weeks 14-15</a:t>
-            </a:r>
-            <a:endParaRPr lang="en-US" sz="1500" dirty="0"/>
-          </a:p>
-        </p:txBody>
-      </p:sp>
-      <p:sp>
-        <p:nvSpPr>
-          <p:cNvPr id="14" name="Text 12"/>
-          <p:cNvSpPr txBox="1"/>
-          <p:nvPr/>
-        </p:nvSpPr>
-        <p:spPr>
-          <a:xfrm>
-            <a:off x="7223760" y="2423160"/>
-            <a:ext cx="2011680" cy="1188720"/>
-          </a:xfrm>
-          <a:prstGeom prst="rect">
-            <a:avLst/>
-          </a:prstGeom>
-          <a:noFill/>
-          <a:ln/>
-        </p:spPr>
-        <p:txBody>
-          <a:bodyPr wrap="square" lIns="0" tIns="0" rIns="0" bIns="0" rtlCol="0" anchor="t"/>
-          <a:lstStyle/>
-          <a:p>
-            <a:pPr algn="ctr" indent="0" marL="0">
-              <a:buNone/>
-            </a:pPr>
-            <a:r>
-              <a:rPr lang="en-US" sz="1400" dirty="0">
-                <a:solidFill>
-                  <a:schemeClr val="tx1"/>
-                </a:solidFill>
-              </a:rPr>
-              <a:t>Stats, charts, report draft</a:t>
-            </a:r>
-            <a:endParaRPr lang="en-US" sz="1400" dirty="0"/>
-          </a:p>
-        </p:txBody>
-      </p:sp>
-      <p:sp>
-        <p:nvSpPr>
-          <p:cNvPr id="15" name="chev5"/>
-          <p:cNvSpPr/>
-          <p:nvPr/>
-        </p:nvSpPr>
-        <p:spPr>
-          <a:xfrm>
-            <a:off x="9326880" y="1463040"/>
-            <a:ext cx="2286000" cy="822960"/>
-          </a:xfrm>
-          <a:prstGeom prst="chevron">
-            <a:avLst/>
-          </a:prstGeom>
-          <a:solidFill>
-            <a:schemeClr val="accent1">
-              <a:alpha val="85000"/>
-            </a:schemeClr>
-          </a:solidFill>
-          <a:ln/>
-        </p:spPr>
-      </p:sp>
-      <p:sp>
-        <p:nvSpPr>
-          <p:cNvPr id="16" name="Text 14"/>
-          <p:cNvSpPr txBox="1"/>
-          <p:nvPr/>
-        </p:nvSpPr>
-        <p:spPr>
-          <a:xfrm>
-            <a:off x="9646920" y="1463040"/>
-            <a:ext cx="1645920" cy="822960"/>
-          </a:xfrm>
-          <a:prstGeom prst="rect">
-            <a:avLst/>
-          </a:prstGeom>
-          <a:noFill/>
-          <a:ln/>
-        </p:spPr>
-        <p:txBody>
-          <a:bodyPr wrap="square" lIns="0" tIns="0" rIns="0" bIns="0" rtlCol="0" anchor="ctr"/>
-          <a:lstStyle/>
-          <a:p>
-            <a:pPr algn="ctr" indent="0" marL="0">
-              <a:buNone/>
-            </a:pPr>
-            <a:r>
-              <a:rPr lang="en-US" sz="1500" b="1" dirty="0">
-                <a:solidFill>
-                  <a:schemeClr val="bg1"/>
-                </a:solidFill>
-              </a:rPr>
-              <a:t>Week 16</a:t>
-            </a:r>
-            <a:endParaRPr lang="en-US" sz="1500" dirty="0"/>
-          </a:p>
-        </p:txBody>
-      </p:sp>
-      <p:sp>
-        <p:nvSpPr>
-          <p:cNvPr id="17" name="Text 15"/>
-          <p:cNvSpPr txBox="1"/>
-          <p:nvPr/>
-        </p:nvSpPr>
-        <p:spPr>
-          <a:xfrm>
-            <a:off x="9418320" y="2423160"/>
-            <a:ext cx="2011680" cy="1188720"/>
-          </a:xfrm>
-          <a:prstGeom prst="rect">
-            <a:avLst/>
-          </a:prstGeom>
-          <a:noFill/>
-          <a:ln/>
-        </p:spPr>
-        <p:txBody>
-          <a:bodyPr wrap="square" lIns="0" tIns="0" rIns="0" bIns="0" rtlCol="0" anchor="t"/>
-          <a:lstStyle/>
-          <a:p>
-            <a:pPr algn="ctr" indent="0" marL="0">
-              <a:buNone/>
-            </a:pPr>
-            <a:r>
-              <a:rPr lang="en-US" sz="1400" dirty="0">
-                <a:solidFill>
-                  <a:schemeClr val="tx1"/>
-                </a:solidFill>
-              </a:rPr>
-              <a:t>Final presentation</a:t>
-            </a:r>
-            <a:endParaRPr lang="en-US" sz="1400" dirty="0"/>
-          </a:p>
-        </p:txBody>
-      </p:sp>
-      <p:sp>
-        <p:nvSpPr>
-          <p:cNvPr id="18" name="roles-card"/>
-          <p:cNvSpPr/>
-          <p:nvPr/>
-        </p:nvSpPr>
-        <p:spPr>
-          <a:xfrm>
-            <a:off x="548640" y="3611880"/>
-            <a:ext cx="11064240" cy="2331720"/>
-          </a:xfrm>
-          <a:prstGeom prst="roundRect">
-            <a:avLst>
-              <a:gd name="adj" fmla="val 3137"/>
-            </a:avLst>
-          </a:prstGeom>
-          <a:solidFill>
-            <a:schemeClr val="bg2"/>
-          </a:solidFill>
-          <a:ln/>
-        </p:spPr>
-      </p:sp>
-      <p:sp>
-        <p:nvSpPr>
-          <p:cNvPr id="19" name="roles-circle"/>
-          <p:cNvSpPr/>
-          <p:nvPr/>
-        </p:nvSpPr>
-        <p:spPr>
-          <a:xfrm>
-            <a:off x="822960" y="3886200"/>
-            <a:ext cx="777240" cy="777240"/>
-          </a:xfrm>
-          <a:prstGeom prst="ellipse">
-            <a:avLst/>
-          </a:prstGeom>
-          <a:solidFill>
-            <a:schemeClr val="accent1">
               <a:alpha val="16000"/>
             </a:schemeClr>
           </a:solidFill>
@@ -3954,7 +4016,7 @@
       </p:sp>
       <p:pic>
         <p:nvPicPr>
-          <p:cNvPr id="20" name="roles-icon" descr="preencoded.png">    </p:cNvPr>
+          <p:cNvPr id="4" name="risk1-icon" descr="preencoded.png">    </p:cNvPr>
           <p:cNvPicPr>
             <a:picLocks noChangeAspect="1"/>
           </p:cNvPicPr>
@@ -3968,7 +4030,7 @@
         </p:blipFill>
         <p:spPr>
           <a:xfrm>
-            <a:off x="1025042" y="4088282"/>
+            <a:off x="750722" y="1573682"/>
             <a:ext cx="373075" cy="373075"/>
           </a:xfrm>
           <a:prstGeom prst="rect">
@@ -3978,14 +4040,14 @@
       </p:pic>
       <p:sp>
         <p:nvSpPr>
-          <p:cNvPr id="21" name="Text 18"/>
+          <p:cNvPr id="5" name="Text 2"/>
           <p:cNvSpPr txBox="1"/>
           <p:nvPr/>
         </p:nvSpPr>
         <p:spPr>
           <a:xfrm>
-            <a:off x="1828800" y="3840480"/>
-            <a:ext cx="9509760" cy="411480"/>
+            <a:off x="1554480" y="1325880"/>
+            <a:ext cx="9966960" cy="411480"/>
           </a:xfrm>
           <a:prstGeom prst="rect">
             <a:avLst/>
@@ -4001,27 +4063,27 @@
               <a:buNone/>
             </a:pPr>
             <a:r>
-              <a:rPr lang="en-US" sz="1700" b="1" dirty="0">
+              <a:rPr lang="en-US" sz="1800" b="1" dirty="0">
                 <a:solidFill>
                   <a:schemeClr val="tx1"/>
                 </a:solidFill>
               </a:rPr>
-              <a:t>Who does what</a:t>
+              <a:t>We can’t switch thinking off</a:t>
             </a:r>
-            <a:endParaRPr lang="en-US" sz="1700" dirty="0"/>
+            <a:endParaRPr lang="en-US" sz="1800" dirty="0"/>
           </a:p>
         </p:txBody>
       </p:sp>
       <p:sp>
         <p:nvSpPr>
-          <p:cNvPr id="22" name="Text 19"/>
+          <p:cNvPr id="6" name="Text 3"/>
           <p:cNvSpPr txBox="1"/>
           <p:nvPr/>
         </p:nvSpPr>
         <p:spPr>
           <a:xfrm>
-            <a:off x="1828800" y="4297680"/>
-            <a:ext cx="9509760" cy="1554480"/>
+            <a:off x="1554480" y="1755648"/>
+            <a:ext cx="9966960" cy="640080"/>
           </a:xfrm>
           <a:prstGeom prst="rect">
             <a:avLst/>
@@ -4034,125 +4096,369 @@
           <a:lstStyle/>
           <a:p>
             <a:pPr indent="0" marL="0">
-              <a:spcAft>
-                <a:spcPts val="300"/>
-              </a:spcAft>
-              <a:buNone/>
-            </a:pPr>
-            <a:r>
-              <a:rPr lang="en-US" sz="1500" b="1" dirty="0">
-                <a:solidFill>
-                  <a:schemeClr val="tx1"/>
-                </a:solidFill>
-              </a:rPr>
-              <a:t>Shrey Bishnoi (coordinator): </a:t>
-            </a:r>
-            <a:pPr indent="0" marL="0">
-              <a:spcAft>
-                <a:spcPts val="300"/>
-              </a:spcAft>
               <a:buNone/>
             </a:pPr>
             <a:r>
               <a:rPr lang="en-US" sz="1500" dirty="0">
                 <a:solidFill>
-                  <a:schemeClr val="tx1"/>
+                  <a:schemeClr val="accent5"/>
                 </a:solidFill>
               </a:rPr>
-              <a:t>code that runs the models, the second-model test</a:t>
+              <a:t>So each pair is two differently trained models. We say so, and use “think briefly” on one model as a cleaner test.</a:t>
             </a:r>
             <a:endParaRPr lang="en-US" sz="1500" dirty="0"/>
           </a:p>
+        </p:txBody>
+      </p:sp>
+      <p:sp>
+        <p:nvSpPr>
+          <p:cNvPr id="7" name="risk2-circle"/>
+          <p:cNvSpPr/>
+          <p:nvPr/>
+        </p:nvSpPr>
+        <p:spPr>
+          <a:xfrm>
+            <a:off x="548640" y="2578608"/>
+            <a:ext cx="777240" cy="777240"/>
+          </a:xfrm>
+          <a:prstGeom prst="ellipse">
+            <a:avLst/>
+          </a:prstGeom>
+          <a:solidFill>
+            <a:schemeClr val="accent1">
+              <a:alpha val="16000"/>
+            </a:schemeClr>
+          </a:solidFill>
+          <a:ln/>
+        </p:spPr>
+      </p:sp>
+      <p:pic>
+        <p:nvPicPr>
+          <p:cNvPr id="8" name="risk2-icon" descr="preencoded.png">    </p:cNvPr>
+          <p:cNvPicPr>
+            <a:picLocks noChangeAspect="1"/>
+          </p:cNvPicPr>
+          <p:nvPr/>
+        </p:nvPicPr>
+        <p:blipFill>
+          <a:blip r:embed="rId2"/>
+          <a:stretch>
+            <a:fillRect/>
+          </a:stretch>
+        </p:blipFill>
+        <p:spPr>
+          <a:xfrm>
+            <a:off x="750722" y="2780690"/>
+            <a:ext cx="373075" cy="373075"/>
+          </a:xfrm>
+          <a:prstGeom prst="rect">
+            <a:avLst/>
+          </a:prstGeom>
+        </p:spPr>
+      </p:pic>
+      <p:sp>
+        <p:nvSpPr>
+          <p:cNvPr id="9" name="Text 5"/>
+          <p:cNvSpPr txBox="1"/>
+          <p:nvPr/>
+        </p:nvSpPr>
+        <p:spPr>
+          <a:xfrm>
+            <a:off x="1554480" y="2532888"/>
+            <a:ext cx="9966960" cy="411480"/>
+          </a:xfrm>
+          <a:prstGeom prst="rect">
+            <a:avLst/>
+          </a:prstGeom>
+          <a:noFill/>
+          <a:ln/>
+        </p:spPr>
+        <p:txBody>
+          <a:bodyPr wrap="square" lIns="0" tIns="0" rIns="0" bIns="0" rtlCol="0" anchor="ctr"/>
+          <a:lstStyle/>
           <a:p>
             <a:pPr indent="0" marL="0">
-              <a:spcAft>
-                <a:spcPts val="300"/>
-              </a:spcAft>
               <a:buNone/>
             </a:pPr>
             <a:r>
-              <a:rPr lang="en-US" sz="1500" b="1" dirty="0">
+              <a:rPr lang="en-US" sz="1800" b="1" dirty="0">
                 <a:solidFill>
                   <a:schemeClr val="tx1"/>
                 </a:solidFill>
               </a:rPr>
-              <a:t>Arsha Jindal: </a:t>
+              <a:t>Our puzzles were too easy for the big models</a:t>
             </a:r>
+            <a:endParaRPr lang="en-US" sz="1800" dirty="0"/>
+          </a:p>
+        </p:txBody>
+      </p:sp>
+      <p:sp>
+        <p:nvSpPr>
+          <p:cNvPr id="10" name="Text 6"/>
+          <p:cNvSpPr txBox="1"/>
+          <p:nvPr/>
+        </p:nvSpPr>
+        <p:spPr>
+          <a:xfrm>
+            <a:off x="1554480" y="2962656"/>
+            <a:ext cx="9966960" cy="640080"/>
+          </a:xfrm>
+          <a:prstGeom prst="rect">
+            <a:avLst/>
+          </a:prstGeom>
+          <a:noFill/>
+          <a:ln/>
+        </p:spPr>
+        <p:txBody>
+          <a:bodyPr wrap="square" lIns="0" tIns="0" rIns="0" bIns="0" rtlCol="0" anchor="t"/>
+          <a:lstStyle/>
+          <a:p>
             <a:pPr indent="0" marL="0">
-              <a:spcAft>
-                <a:spcPts val="300"/>
-              </a:spcAft>
               <a:buNone/>
             </a:pPr>
             <a:r>
               <a:rPr lang="en-US" sz="1500" dirty="0">
                 <a:solidFill>
-                  <a:schemeClr val="tx1"/>
+                  <a:schemeClr val="accent5"/>
                 </a:solidFill>
               </a:rPr>
-              <a:t>question sets, hints, labeling guide</a:t>
+              <a:t>We started on harder exam questions. Next: GPQA questions, 3 runs per question, and a real tool call instead of pasted text.</a:t>
             </a:r>
             <a:endParaRPr lang="en-US" sz="1500" dirty="0"/>
           </a:p>
+        </p:txBody>
+      </p:sp>
+      <p:sp>
+        <p:nvSpPr>
+          <p:cNvPr id="11" name="risk3-circle"/>
+          <p:cNvSpPr/>
+          <p:nvPr/>
+        </p:nvSpPr>
+        <p:spPr>
+          <a:xfrm>
+            <a:off x="548640" y="3785616"/>
+            <a:ext cx="777240" cy="777240"/>
+          </a:xfrm>
+          <a:prstGeom prst="ellipse">
+            <a:avLst/>
+          </a:prstGeom>
+          <a:solidFill>
+            <a:schemeClr val="accent2">
+              <a:alpha val="16000"/>
+            </a:schemeClr>
+          </a:solidFill>
+          <a:ln/>
+        </p:spPr>
+      </p:sp>
+      <p:pic>
+        <p:nvPicPr>
+          <p:cNvPr id="12" name="risk3-icon" descr="preencoded.png">    </p:cNvPr>
+          <p:cNvPicPr>
+            <a:picLocks noChangeAspect="1"/>
+          </p:cNvPicPr>
+          <p:nvPr/>
+        </p:nvPicPr>
+        <p:blipFill>
+          <a:blip r:embed="rId3"/>
+          <a:stretch>
+            <a:fillRect/>
+          </a:stretch>
+        </p:blipFill>
+        <p:spPr>
+          <a:xfrm>
+            <a:off x="750722" y="3987698"/>
+            <a:ext cx="373075" cy="373075"/>
+          </a:xfrm>
+          <a:prstGeom prst="rect">
+            <a:avLst/>
+          </a:prstGeom>
+        </p:spPr>
+      </p:pic>
+      <p:sp>
+        <p:nvSpPr>
+          <p:cNvPr id="13" name="Text 8"/>
+          <p:cNvSpPr txBox="1"/>
+          <p:nvPr/>
+        </p:nvSpPr>
+        <p:spPr>
+          <a:xfrm>
+            <a:off x="1554480" y="3739896"/>
+            <a:ext cx="9966960" cy="411480"/>
+          </a:xfrm>
+          <a:prstGeom prst="rect">
+            <a:avLst/>
+          </a:prstGeom>
+          <a:noFill/>
+          <a:ln/>
+        </p:spPr>
+        <p:txBody>
+          <a:bodyPr wrap="square" lIns="0" tIns="0" rIns="0" bIns="0" rtlCol="0" anchor="ctr"/>
+          <a:lstStyle/>
           <a:p>
             <a:pPr indent="0" marL="0">
-              <a:spcAft>
-                <a:spcPts val="300"/>
-              </a:spcAft>
               <a:buNone/>
             </a:pPr>
             <a:r>
-              <a:rPr lang="en-US" sz="1500" b="1" dirty="0">
+              <a:rPr lang="en-US" sz="1800" b="1" dirty="0">
                 <a:solidFill>
                   <a:schemeClr val="tx1"/>
                 </a:solidFill>
               </a:rPr>
-              <a:t>Ritik Agarwal: </a:t>
+              <a:t>Keyword counts are upper limits</a:t>
             </a:r>
+            <a:endParaRPr lang="en-US" sz="1800" dirty="0"/>
+          </a:p>
+        </p:txBody>
+      </p:sp>
+      <p:sp>
+        <p:nvSpPr>
+          <p:cNvPr id="14" name="Text 9"/>
+          <p:cNvSpPr txBox="1"/>
+          <p:nvPr/>
+        </p:nvSpPr>
+        <p:spPr>
+          <a:xfrm>
+            <a:off x="1554480" y="4169664"/>
+            <a:ext cx="9966960" cy="640080"/>
+          </a:xfrm>
+          <a:prstGeom prst="rect">
+            <a:avLst/>
+          </a:prstGeom>
+          <a:noFill/>
+          <a:ln/>
+        </p:spPr>
+        <p:txBody>
+          <a:bodyPr wrap="square" lIns="0" tIns="0" rIns="0" bIns="0" rtlCol="0" anchor="t"/>
+          <a:lstStyle/>
+          <a:p>
             <a:pPr indent="0" marL="0">
-              <a:spcAft>
-                <a:spcPts val="300"/>
-              </a:spcAft>
               <a:buNone/>
             </a:pPr>
             <a:r>
               <a:rPr lang="en-US" sz="1500" dirty="0">
                 <a:solidFill>
-                  <a:schemeClr val="tx1"/>
+                  <a:schemeClr val="accent5"/>
                 </a:solidFill>
               </a:rPr>
-              <a:t>stats, charts, checking how well our labels agree</a:t>
+              <a:t>The keywords also fire on up to 22 of 72 notes with no hint. Two of us will label replies by hand (101 are ready) and report how often we agree.</a:t>
             </a:r>
             <a:endParaRPr lang="en-US" sz="1500" dirty="0"/>
           </a:p>
+        </p:txBody>
+      </p:sp>
+      <p:sp>
+        <p:nvSpPr>
+          <p:cNvPr id="15" name="risk4-circle"/>
+          <p:cNvSpPr/>
+          <p:nvPr/>
+        </p:nvSpPr>
+        <p:spPr>
+          <a:xfrm>
+            <a:off x="548640" y="4992624"/>
+            <a:ext cx="777240" cy="777240"/>
+          </a:xfrm>
+          <a:prstGeom prst="ellipse">
+            <a:avLst/>
+          </a:prstGeom>
+          <a:solidFill>
+            <a:schemeClr val="accent1">
+              <a:alpha val="16000"/>
+            </a:schemeClr>
+          </a:solidFill>
+          <a:ln/>
+        </p:spPr>
+      </p:sp>
+      <p:pic>
+        <p:nvPicPr>
+          <p:cNvPr id="16" name="risk4-icon" descr="preencoded.png">    </p:cNvPr>
+          <p:cNvPicPr>
+            <a:picLocks noChangeAspect="1"/>
+          </p:cNvPicPr>
+          <p:nvPr/>
+        </p:nvPicPr>
+        <p:blipFill>
+          <a:blip r:embed="rId4"/>
+          <a:stretch>
+            <a:fillRect/>
+          </a:stretch>
+        </p:blipFill>
+        <p:spPr>
+          <a:xfrm>
+            <a:off x="750722" y="5194706"/>
+            <a:ext cx="373075" cy="373075"/>
+          </a:xfrm>
+          <a:prstGeom prst="rect">
+            <a:avLst/>
+          </a:prstGeom>
+        </p:spPr>
+      </p:pic>
+      <p:sp>
+        <p:nvSpPr>
+          <p:cNvPr id="17" name="Text 11"/>
+          <p:cNvSpPr txBox="1"/>
+          <p:nvPr/>
+        </p:nvSpPr>
+        <p:spPr>
+          <a:xfrm>
+            <a:off x="1554480" y="4946904"/>
+            <a:ext cx="9966960" cy="411480"/>
+          </a:xfrm>
+          <a:prstGeom prst="rect">
+            <a:avLst/>
+          </a:prstGeom>
+          <a:noFill/>
+          <a:ln/>
+        </p:spPr>
+        <p:txBody>
+          <a:bodyPr wrap="square" lIns="0" tIns="0" rIns="0" bIns="0" rtlCol="0" anchor="ctr"/>
+          <a:lstStyle/>
           <a:p>
             <a:pPr indent="0" marL="0">
-              <a:spcAft>
-                <a:spcPts val="300"/>
-              </a:spcAft>
               <a:buNone/>
             </a:pPr>
             <a:r>
-              <a:rPr lang="en-US" sz="1500" b="1" dirty="0">
+              <a:rPr lang="en-US" sz="1800" b="1" dirty="0">
                 <a:solidFill>
                   <a:schemeClr val="tx1"/>
                 </a:solidFill>
               </a:rPr>
-              <a:t>All three: </a:t>
+              <a:t>Thinking models write 3.4 to 4.5 times as much</a:t>
             </a:r>
+            <a:endParaRPr lang="en-US" sz="1800" dirty="0"/>
+          </a:p>
+        </p:txBody>
+      </p:sp>
+      <p:sp>
+        <p:nvSpPr>
+          <p:cNvPr id="18" name="Text 12"/>
+          <p:cNvSpPr txBox="1"/>
+          <p:nvPr/>
+        </p:nvSpPr>
+        <p:spPr>
+          <a:xfrm>
+            <a:off x="1554480" y="5376672"/>
+            <a:ext cx="9966960" cy="640080"/>
+          </a:xfrm>
+          <a:prstGeom prst="rect">
+            <a:avLst/>
+          </a:prstGeom>
+          <a:noFill/>
+          <a:ln/>
+        </p:spPr>
+        <p:txBody>
+          <a:bodyPr wrap="square" lIns="0" tIns="0" rIns="0" bIns="0" rtlCol="0" anchor="t"/>
+          <a:lstStyle/>
+          <a:p>
             <a:pPr indent="0" marL="0">
-              <a:spcAft>
-                <a:spcPts val="300"/>
-              </a:spcAft>
               <a:buNone/>
             </a:pPr>
             <a:r>
               <a:rPr lang="en-US" sz="1500" dirty="0">
                 <a:solidFill>
-                  <a:schemeClr val="tx1"/>
+                  <a:schemeClr val="accent5"/>
                 </a:solidFill>
               </a:rPr>
-              <a:t>hand-labeling, presentations, report</a:t>
+              <a:t>Olmo 7B thinking also ran out of room on 13 of 60 hard questions. We’ll set limits per model, count cut-off replies as no answer, and trim the plan to about 55 million tokens.</a:t>
             </a:r>
             <a:endParaRPr lang="en-US" sz="1500" dirty="0"/>
           </a:p>
@@ -4238,8 +4544,8 @@
         </p:nvSpPr>
         <p:spPr>
           <a:xfrm>
-            <a:off x="731520" y="1417320"/>
-            <a:ext cx="6766560" cy="1920240"/>
+            <a:off x="548640" y="320040"/>
+            <a:ext cx="11064240" cy="822960"/>
           </a:xfrm>
           <a:prstGeom prst="rect">
             <a:avLst/>
@@ -4248,36 +4554,92 @@
           <a:ln/>
         </p:spPr>
         <p:txBody>
-          <a:bodyPr wrap="square" lIns="0" tIns="0" rIns="0" bIns="0" rtlCol="0" anchor="b"/>
+          <a:bodyPr wrap="square" lIns="0" tIns="0" rIns="0" bIns="0" rtlCol="0" anchor="ctr"/>
           <a:lstStyle/>
           <a:p>
             <a:pPr algn="l" indent="0" marL="0">
               <a:buNone/>
             </a:pPr>
             <a:r>
-              <a:rPr lang="en-US" sz="3200" b="1" dirty="0">
+              <a:rPr lang="en-US" sz="3000" b="1" dirty="0">
+                <a:solidFill>
+                  <a:schemeClr val="tx1"/>
+                </a:solidFill>
+              </a:rPr>
+              <a:t>Next steps</a:t>
+            </a:r>
+            <a:endParaRPr lang="en-US" sz="3000" dirty="0"/>
+          </a:p>
+        </p:txBody>
+      </p:sp>
+      <p:sp>
+        <p:nvSpPr>
+          <p:cNvPr id="3" name="chev1"/>
+          <p:cNvSpPr/>
+          <p:nvPr/>
+        </p:nvSpPr>
+        <p:spPr>
+          <a:xfrm>
+            <a:off x="548640" y="1463040"/>
+            <a:ext cx="2286000" cy="822960"/>
+          </a:xfrm>
+          <a:prstGeom prst="chevron">
+            <a:avLst/>
+          </a:prstGeom>
+          <a:solidFill>
+            <a:schemeClr val="accent1">
+              <a:alpha val="85000"/>
+            </a:schemeClr>
+          </a:solidFill>
+          <a:ln/>
+        </p:spPr>
+      </p:sp>
+      <p:sp>
+        <p:nvSpPr>
+          <p:cNvPr id="4" name="Text 2"/>
+          <p:cNvSpPr txBox="1"/>
+          <p:nvPr/>
+        </p:nvSpPr>
+        <p:spPr>
+          <a:xfrm>
+            <a:off x="868680" y="1463040"/>
+            <a:ext cx="1645920" cy="822960"/>
+          </a:xfrm>
+          <a:prstGeom prst="rect">
+            <a:avLst/>
+          </a:prstGeom>
+          <a:noFill/>
+          <a:ln/>
+        </p:spPr>
+        <p:txBody>
+          <a:bodyPr wrap="square" lIns="0" tIns="0" rIns="0" bIns="0" rtlCol="0" anchor="ctr"/>
+          <a:lstStyle/>
+          <a:p>
+            <a:pPr algn="ctr" indent="0" marL="0">
+              <a:buNone/>
+            </a:pPr>
+            <a:r>
+              <a:rPr lang="en-US" sz="1500" b="1" dirty="0">
                 <a:solidFill>
                   <a:schemeClr val="bg1"/>
                 </a:solidFill>
               </a:rPr>
-              <a:t>In short: the hint rarely changes answers, but thinking models almost always see it and almost never say so.</a:t>
+              <a:t>Week 9</a:t>
             </a:r>
-            <a:endParaRPr lang="en-US" sz="4000" dirty="0"/>
+            <a:endParaRPr lang="en-US" sz="1500" dirty="0"/>
           </a:p>
         </p:txBody>
       </p:sp>
       <p:sp>
         <p:nvSpPr>
-          <p:cNvPr id="3" name="Text 0"/>
-          <p:cNvSpPr/>
-          <p:nvPr>
-            <p:ph idx="101" type="body" hasCustomPrompt="1"/>
-          </p:nvPr>
-        </p:nvSpPr>
-        <p:spPr>
-          <a:xfrm>
-            <a:off x="731520" y="3520440"/>
-            <a:ext cx="6583680" cy="822960"/>
+          <p:cNvPr id="5" name="Text 3"/>
+          <p:cNvSpPr txBox="1"/>
+          <p:nvPr/>
+        </p:nvSpPr>
+        <p:spPr>
+          <a:xfrm>
+            <a:off x="640080" y="2423160"/>
+            <a:ext cx="2011680" cy="1188720"/>
           </a:xfrm>
           <a:prstGeom prst="rect">
             <a:avLst/>
@@ -4289,33 +4651,89 @@
           <a:bodyPr wrap="square" lIns="0" tIns="0" rIns="0" bIns="0" rtlCol="0" anchor="t"/>
           <a:lstStyle/>
           <a:p>
-            <a:pPr indent="0" marL="0">
+            <a:pPr algn="ctr" indent="0" marL="0">
               <a:buNone/>
             </a:pPr>
             <a:r>
-              <a:rPr lang="en-US" sz="1900" dirty="0">
-                <a:solidFill>
-                  <a:schemeClr val="bg2"/>
+              <a:rPr lang="en-US" sz="1400" dirty="0">
+                <a:solidFill>
+                  <a:schemeClr val="tx1"/>
                 </a:solidFill>
               </a:rPr>
-              <a:t>Next: harder questions, hand labels, and a second model as a checker.</a:t>
+              <a:t>Harder questions (GPQA, MMLU-Pro), a real tool call, lock the prompts</a:t>
             </a:r>
-            <a:endParaRPr lang="en-US" sz="1900" dirty="0"/>
+            <a:endParaRPr lang="en-US" sz="1400" dirty="0"/>
           </a:p>
         </p:txBody>
       </p:sp>
       <p:sp>
         <p:nvSpPr>
-          <p:cNvPr id="4" name="Text 0"/>
+          <p:cNvPr id="6" name="chev2"/>
           <p:cNvSpPr/>
-          <p:nvPr>
-            <p:ph idx="102" type="body" hasCustomPrompt="1"/>
-          </p:nvPr>
-        </p:nvSpPr>
-        <p:spPr>
-          <a:xfrm>
-            <a:off x="731520" y="4892040"/>
-            <a:ext cx="6766560" cy="1188720"/>
+          <p:nvPr/>
+        </p:nvSpPr>
+        <p:spPr>
+          <a:xfrm>
+            <a:off x="2743200" y="1463040"/>
+            <a:ext cx="2286000" cy="822960"/>
+          </a:xfrm>
+          <a:prstGeom prst="chevron">
+            <a:avLst/>
+          </a:prstGeom>
+          <a:solidFill>
+            <a:schemeClr val="accent2">
+              <a:alpha val="85000"/>
+            </a:schemeClr>
+          </a:solidFill>
+          <a:ln/>
+        </p:spPr>
+      </p:sp>
+      <p:sp>
+        <p:nvSpPr>
+          <p:cNvPr id="7" name="Text 5"/>
+          <p:cNvSpPr txBox="1"/>
+          <p:nvPr/>
+        </p:nvSpPr>
+        <p:spPr>
+          <a:xfrm>
+            <a:off x="3063240" y="1463040"/>
+            <a:ext cx="1645920" cy="822960"/>
+          </a:xfrm>
+          <a:prstGeom prst="rect">
+            <a:avLst/>
+          </a:prstGeom>
+          <a:noFill/>
+          <a:ln/>
+        </p:spPr>
+        <p:txBody>
+          <a:bodyPr wrap="square" lIns="0" tIns="0" rIns="0" bIns="0" rtlCol="0" anchor="ctr"/>
+          <a:lstStyle/>
+          <a:p>
+            <a:pPr algn="ctr" indent="0" marL="0">
+              <a:buNone/>
+            </a:pPr>
+            <a:r>
+              <a:rPr lang="en-US" sz="1500" b="1" dirty="0">
+                <a:solidFill>
+                  <a:schemeClr val="bg1"/>
+                </a:solidFill>
+              </a:rPr>
+              <a:t>Weeks 10-11</a:t>
+            </a:r>
+            <a:endParaRPr lang="en-US" sz="1500" dirty="0"/>
+          </a:p>
+        </p:txBody>
+      </p:sp>
+      <p:sp>
+        <p:nvSpPr>
+          <p:cNvPr id="8" name="Text 6"/>
+          <p:cNvSpPr txBox="1"/>
+          <p:nvPr/>
+        </p:nvSpPr>
+        <p:spPr>
+          <a:xfrm>
+            <a:off x="2834640" y="2423160"/>
+            <a:ext cx="2011680" cy="1188720"/>
           </a:xfrm>
           <a:prstGeom prst="rect">
             <a:avLst/>
@@ -4327,38 +4745,38 @@
           <a:bodyPr wrap="square" lIns="0" tIns="0" rIns="0" bIns="0" rtlCol="0" anchor="t"/>
           <a:lstStyle/>
           <a:p>
-            <a:pPr indent="0" marL="0">
+            <a:pPr algn="ctr" indent="0" marL="0">
               <a:buNone/>
             </a:pPr>
             <a:r>
-              <a:rPr lang="en-US" sz="2800" b="1" dirty="0">
-                <a:solidFill>
-                  <a:schemeClr val="accent2"/>
+              <a:rPr lang="en-US" sz="1400" dirty="0">
+                <a:solidFill>
+                  <a:schemeClr val="tx1"/>
                 </a:solidFill>
               </a:rPr>
-              <a:t>Questions?</a:t>
+              <a:t>Main runs with user and tool hints; hand-label replies</a:t>
             </a:r>
-            <a:endParaRPr lang="en-US" sz="1500" dirty="0"/>
+            <a:endParaRPr lang="en-US" sz="1400" dirty="0"/>
           </a:p>
         </p:txBody>
       </p:sp>
       <p:sp>
         <p:nvSpPr>
-          <p:cNvPr id="5" name="close-private"/>
+          <p:cNvPr id="9" name="chev3"/>
           <p:cNvSpPr/>
           <p:nvPr/>
         </p:nvSpPr>
         <p:spPr>
           <a:xfrm>
-            <a:off x="8001000" y="1554480"/>
-            <a:ext cx="2468880" cy="2468880"/>
-          </a:xfrm>
-          <a:prstGeom prst="ellipse">
+            <a:off x="4937760" y="1463040"/>
+            <a:ext cx="2286000" cy="822960"/>
+          </a:xfrm>
+          <a:prstGeom prst="chevron">
             <a:avLst/>
           </a:prstGeom>
           <a:solidFill>
             <a:schemeClr val="accent1">
-              <a:alpha val="30000"/>
+              <a:alpha val="85000"/>
             </a:schemeClr>
           </a:solidFill>
           <a:ln/>
@@ -4366,29 +4784,311 @@
       </p:sp>
       <p:sp>
         <p:nvSpPr>
-          <p:cNvPr id="6" name="close-visible"/>
+          <p:cNvPr id="10" name="Text 8"/>
+          <p:cNvSpPr txBox="1"/>
+          <p:nvPr/>
+        </p:nvSpPr>
+        <p:spPr>
+          <a:xfrm>
+            <a:off x="5257800" y="1463040"/>
+            <a:ext cx="1645920" cy="822960"/>
+          </a:xfrm>
+          <a:prstGeom prst="rect">
+            <a:avLst/>
+          </a:prstGeom>
+          <a:noFill/>
+          <a:ln/>
+        </p:spPr>
+        <p:txBody>
+          <a:bodyPr wrap="square" lIns="0" tIns="0" rIns="0" bIns="0" rtlCol="0" anchor="ctr"/>
+          <a:lstStyle/>
+          <a:p>
+            <a:pPr algn="ctr" indent="0" marL="0">
+              <a:buNone/>
+            </a:pPr>
+            <a:r>
+              <a:rPr lang="en-US" sz="1500" b="1" dirty="0">
+                <a:solidFill>
+                  <a:schemeClr val="bg1"/>
+                </a:solidFill>
+              </a:rPr>
+              <a:t>Weeks 12-13</a:t>
+            </a:r>
+            <a:endParaRPr lang="en-US" sz="1500" dirty="0"/>
+          </a:p>
+        </p:txBody>
+      </p:sp>
+      <p:sp>
+        <p:nvSpPr>
+          <p:cNvPr id="11" name="Text 9"/>
+          <p:cNvSpPr txBox="1"/>
+          <p:nvPr/>
+        </p:nvSpPr>
+        <p:spPr>
+          <a:xfrm>
+            <a:off x="5029200" y="2423160"/>
+            <a:ext cx="2011680" cy="1188720"/>
+          </a:xfrm>
+          <a:prstGeom prst="rect">
+            <a:avLst/>
+          </a:prstGeom>
+          <a:noFill/>
+          <a:ln/>
+        </p:spPr>
+        <p:txBody>
+          <a:bodyPr wrap="square" lIns="0" tIns="0" rIns="0" bIns="0" rtlCol="0" anchor="t"/>
+          <a:lstStyle/>
+          <a:p>
+            <a:pPr algn="ctr" indent="0" marL="0">
+              <a:buNone/>
+            </a:pPr>
+            <a:r>
+              <a:rPr lang="en-US" sz="1400" dirty="0">
+                <a:solidFill>
+                  <a:schemeClr val="tx1"/>
+                </a:solidFill>
+              </a:rPr>
+              <a:t>If we’re on track: the second-model check, at scale</a:t>
+            </a:r>
+            <a:endParaRPr lang="en-US" sz="1400" dirty="0"/>
+          </a:p>
+        </p:txBody>
+      </p:sp>
+      <p:sp>
+        <p:nvSpPr>
+          <p:cNvPr id="12" name="chev4"/>
           <p:cNvSpPr/>
           <p:nvPr/>
         </p:nvSpPr>
         <p:spPr>
           <a:xfrm>
-            <a:off x="9281160" y="2697480"/>
-            <a:ext cx="2468880" cy="2468880"/>
-          </a:xfrm>
-          <a:prstGeom prst="ellipse">
+            <a:off x="7132320" y="1463040"/>
+            <a:ext cx="2286000" cy="822960"/>
+          </a:xfrm>
+          <a:prstGeom prst="chevron">
             <a:avLst/>
           </a:prstGeom>
           <a:solidFill>
             <a:schemeClr val="accent2">
-              <a:alpha val="35000"/>
+              <a:alpha val="85000"/>
             </a:schemeClr>
           </a:solidFill>
           <a:ln/>
         </p:spPr>
       </p:sp>
+      <p:sp>
+        <p:nvSpPr>
+          <p:cNvPr id="13" name="Text 11"/>
+          <p:cNvSpPr txBox="1"/>
+          <p:nvPr/>
+        </p:nvSpPr>
+        <p:spPr>
+          <a:xfrm>
+            <a:off x="7452360" y="1463040"/>
+            <a:ext cx="1645920" cy="822960"/>
+          </a:xfrm>
+          <a:prstGeom prst="rect">
+            <a:avLst/>
+          </a:prstGeom>
+          <a:noFill/>
+          <a:ln/>
+        </p:spPr>
+        <p:txBody>
+          <a:bodyPr wrap="square" lIns="0" tIns="0" rIns="0" bIns="0" rtlCol="0" anchor="ctr"/>
+          <a:lstStyle/>
+          <a:p>
+            <a:pPr algn="ctr" indent="0" marL="0">
+              <a:buNone/>
+            </a:pPr>
+            <a:r>
+              <a:rPr lang="en-US" sz="1500" b="1" dirty="0">
+                <a:solidFill>
+                  <a:schemeClr val="bg1"/>
+                </a:solidFill>
+              </a:rPr>
+              <a:t>Weeks 14-15</a:t>
+            </a:r>
+            <a:endParaRPr lang="en-US" sz="1500" dirty="0"/>
+          </a:p>
+        </p:txBody>
+      </p:sp>
+      <p:sp>
+        <p:nvSpPr>
+          <p:cNvPr id="14" name="Text 12"/>
+          <p:cNvSpPr txBox="1"/>
+          <p:nvPr/>
+        </p:nvSpPr>
+        <p:spPr>
+          <a:xfrm>
+            <a:off x="7223760" y="2423160"/>
+            <a:ext cx="2011680" cy="1188720"/>
+          </a:xfrm>
+          <a:prstGeom prst="rect">
+            <a:avLst/>
+          </a:prstGeom>
+          <a:noFill/>
+          <a:ln/>
+        </p:spPr>
+        <p:txBody>
+          <a:bodyPr wrap="square" lIns="0" tIns="0" rIns="0" bIns="0" rtlCol="0" anchor="t"/>
+          <a:lstStyle/>
+          <a:p>
+            <a:pPr algn="ctr" indent="0" marL="0">
+              <a:buNone/>
+            </a:pPr>
+            <a:r>
+              <a:rPr lang="en-US" sz="1400" dirty="0">
+                <a:solidFill>
+                  <a:schemeClr val="tx1"/>
+                </a:solidFill>
+              </a:rPr>
+              <a:t>Stats, charts, report draft</a:t>
+            </a:r>
+            <a:endParaRPr lang="en-US" sz="1400" dirty="0"/>
+          </a:p>
+        </p:txBody>
+      </p:sp>
+      <p:sp>
+        <p:nvSpPr>
+          <p:cNvPr id="15" name="chev5"/>
+          <p:cNvSpPr/>
+          <p:nvPr/>
+        </p:nvSpPr>
+        <p:spPr>
+          <a:xfrm>
+            <a:off x="9326880" y="1463040"/>
+            <a:ext cx="2286000" cy="822960"/>
+          </a:xfrm>
+          <a:prstGeom prst="chevron">
+            <a:avLst/>
+          </a:prstGeom>
+          <a:solidFill>
+            <a:schemeClr val="accent1">
+              <a:alpha val="85000"/>
+            </a:schemeClr>
+          </a:solidFill>
+          <a:ln/>
+        </p:spPr>
+      </p:sp>
+      <p:sp>
+        <p:nvSpPr>
+          <p:cNvPr id="16" name="Text 14"/>
+          <p:cNvSpPr txBox="1"/>
+          <p:nvPr/>
+        </p:nvSpPr>
+        <p:spPr>
+          <a:xfrm>
+            <a:off x="9646920" y="1463040"/>
+            <a:ext cx="1645920" cy="822960"/>
+          </a:xfrm>
+          <a:prstGeom prst="rect">
+            <a:avLst/>
+          </a:prstGeom>
+          <a:noFill/>
+          <a:ln/>
+        </p:spPr>
+        <p:txBody>
+          <a:bodyPr wrap="square" lIns="0" tIns="0" rIns="0" bIns="0" rtlCol="0" anchor="ctr"/>
+          <a:lstStyle/>
+          <a:p>
+            <a:pPr algn="ctr" indent="0" marL="0">
+              <a:buNone/>
+            </a:pPr>
+            <a:r>
+              <a:rPr lang="en-US" sz="1500" b="1" dirty="0">
+                <a:solidFill>
+                  <a:schemeClr val="bg1"/>
+                </a:solidFill>
+              </a:rPr>
+              <a:t>Week 16</a:t>
+            </a:r>
+            <a:endParaRPr lang="en-US" sz="1500" dirty="0"/>
+          </a:p>
+        </p:txBody>
+      </p:sp>
+      <p:sp>
+        <p:nvSpPr>
+          <p:cNvPr id="17" name="Text 15"/>
+          <p:cNvSpPr txBox="1"/>
+          <p:nvPr/>
+        </p:nvSpPr>
+        <p:spPr>
+          <a:xfrm>
+            <a:off x="9418320" y="2423160"/>
+            <a:ext cx="2011680" cy="1188720"/>
+          </a:xfrm>
+          <a:prstGeom prst="rect">
+            <a:avLst/>
+          </a:prstGeom>
+          <a:noFill/>
+          <a:ln/>
+        </p:spPr>
+        <p:txBody>
+          <a:bodyPr wrap="square" lIns="0" tIns="0" rIns="0" bIns="0" rtlCol="0" anchor="t"/>
+          <a:lstStyle/>
+          <a:p>
+            <a:pPr algn="ctr" indent="0" marL="0">
+              <a:buNone/>
+            </a:pPr>
+            <a:r>
+              <a:rPr lang="en-US" sz="1400" dirty="0">
+                <a:solidFill>
+                  <a:schemeClr val="tx1"/>
+                </a:solidFill>
+              </a:rPr>
+              <a:t>Final presentation</a:t>
+            </a:r>
+            <a:endParaRPr lang="en-US" sz="1400" dirty="0"/>
+          </a:p>
+        </p:txBody>
+      </p:sp>
+      <p:sp>
+        <p:nvSpPr>
+          <p:cNvPr id="18" name="roles-card"/>
+          <p:cNvSpPr/>
+          <p:nvPr/>
+        </p:nvSpPr>
+        <p:spPr>
+          <a:xfrm>
+            <a:off x="548640" y="3611880"/>
+            <a:ext cx="11064240" cy="2331720"/>
+          </a:xfrm>
+          <a:prstGeom prst="roundRect">
+            <a:avLst>
+              <a:gd name="adj" fmla="val 3137"/>
+            </a:avLst>
+          </a:prstGeom>
+          <a:solidFill>
+            <a:schemeClr val="bg2"/>
+          </a:solidFill>
+          <a:ln/>
+        </p:spPr>
+      </p:sp>
+      <p:sp>
+        <p:nvSpPr>
+          <p:cNvPr id="19" name="roles-circle"/>
+          <p:cNvSpPr/>
+          <p:nvPr/>
+        </p:nvSpPr>
+        <p:spPr>
+          <a:xfrm>
+            <a:off x="822960" y="3886200"/>
+            <a:ext cx="777240" cy="777240"/>
+          </a:xfrm>
+          <a:prstGeom prst="ellipse">
+            <a:avLst/>
+          </a:prstGeom>
+          <a:solidFill>
+            <a:schemeClr val="accent1">
+              <a:alpha val="16000"/>
+            </a:schemeClr>
+          </a:solidFill>
+          <a:ln/>
+        </p:spPr>
+      </p:sp>
       <p:pic>
         <p:nvPicPr>
-          <p:cNvPr id="7" name="close-lock" descr="preencoded.png">    </p:cNvPr>
+          <p:cNvPr id="20" name="roles-icon" descr="preencoded.png">    </p:cNvPr>
           <p:cNvPicPr>
             <a:picLocks noChangeAspect="1"/>
           </p:cNvPicPr>
@@ -4402,38 +5102,241 @@
         </p:blipFill>
         <p:spPr>
           <a:xfrm>
-            <a:off x="8732520" y="2240280"/>
-            <a:ext cx="822960" cy="822960"/>
+            <a:off x="1025042" y="4088282"/>
+            <a:ext cx="373075" cy="373075"/>
           </a:xfrm>
           <a:prstGeom prst="rect">
             <a:avLst/>
           </a:prstGeom>
         </p:spPr>
       </p:pic>
-      <p:pic>
-        <p:nvPicPr>
-          <p:cNvPr id="8" name="close-eye" descr="preencoded.png">    </p:cNvPr>
-          <p:cNvPicPr>
-            <a:picLocks noChangeAspect="1"/>
-          </p:cNvPicPr>
-          <p:nvPr/>
-        </p:nvPicPr>
-        <p:blipFill>
-          <a:blip r:embed="rId2"/>
-          <a:stretch>
-            <a:fillRect/>
-          </a:stretch>
-        </p:blipFill>
-        <p:spPr>
-          <a:xfrm>
-            <a:off x="10287000" y="3703320"/>
-            <a:ext cx="822960" cy="822960"/>
+      <p:sp>
+        <p:nvSpPr>
+          <p:cNvPr id="21" name="Text 18"/>
+          <p:cNvSpPr txBox="1"/>
+          <p:nvPr/>
+        </p:nvSpPr>
+        <p:spPr>
+          <a:xfrm>
+            <a:off x="1828800" y="3840480"/>
+            <a:ext cx="9509760" cy="411480"/>
           </a:xfrm>
           <a:prstGeom prst="rect">
             <a:avLst/>
           </a:prstGeom>
-        </p:spPr>
-      </p:pic>
+          <a:noFill/>
+          <a:ln/>
+        </p:spPr>
+        <p:txBody>
+          <a:bodyPr wrap="square" lIns="0" tIns="0" rIns="0" bIns="0" rtlCol="0" anchor="ctr"/>
+          <a:lstStyle/>
+          <a:p>
+            <a:pPr indent="0" marL="0">
+              <a:buNone/>
+            </a:pPr>
+            <a:r>
+              <a:rPr lang="en-US" sz="1700" b="1" dirty="0">
+                <a:solidFill>
+                  <a:schemeClr val="tx1"/>
+                </a:solidFill>
+              </a:rPr>
+              <a:t>Who does what</a:t>
+            </a:r>
+            <a:endParaRPr lang="en-US" sz="1700" dirty="0"/>
+          </a:p>
+        </p:txBody>
+      </p:sp>
+      <p:sp>
+        <p:nvSpPr>
+          <p:cNvPr id="22" name="Text 19"/>
+          <p:cNvSpPr txBox="1"/>
+          <p:nvPr/>
+        </p:nvSpPr>
+        <p:spPr>
+          <a:xfrm>
+            <a:off x="1828800" y="4297680"/>
+            <a:ext cx="9509760" cy="1554480"/>
+          </a:xfrm>
+          <a:prstGeom prst="rect">
+            <a:avLst/>
+          </a:prstGeom>
+          <a:noFill/>
+          <a:ln/>
+        </p:spPr>
+        <p:txBody>
+          <a:bodyPr wrap="square" lIns="0" tIns="0" rIns="0" bIns="0" rtlCol="0" anchor="t"/>
+          <a:lstStyle/>
+          <a:p>
+            <a:pPr indent="0" marL="0">
+              <a:spcAft>
+                <a:spcPts val="300"/>
+              </a:spcAft>
+              <a:buNone/>
+            </a:pPr>
+            <a:r>
+              <a:rPr lang="en-US" sz="1500" b="1" dirty="0">
+                <a:solidFill>
+                  <a:schemeClr val="tx1"/>
+                </a:solidFill>
+              </a:rPr>
+              <a:t>Shrey Bishnoi (coordinator): </a:t>
+            </a:r>
+            <a:pPr indent="0" marL="0">
+              <a:spcAft>
+                <a:spcPts val="300"/>
+              </a:spcAft>
+              <a:buNone/>
+            </a:pPr>
+            <a:r>
+              <a:rPr lang="en-US" sz="1500" dirty="0">
+                <a:solidFill>
+                  <a:schemeClr val="tx1"/>
+                </a:solidFill>
+              </a:rPr>
+              <a:t>code that runs the models, the second-model check</a:t>
+            </a:r>
+            <a:endParaRPr lang="en-US" sz="1500" dirty="0"/>
+          </a:p>
+          <a:p>
+            <a:pPr indent="0" marL="0">
+              <a:spcAft>
+                <a:spcPts val="300"/>
+              </a:spcAft>
+              <a:buNone/>
+            </a:pPr>
+            <a:r>
+              <a:rPr lang="en-US" sz="1500" b="1" dirty="0">
+                <a:solidFill>
+                  <a:schemeClr val="tx1"/>
+                </a:solidFill>
+              </a:rPr>
+              <a:t>Arsha Jindal: </a:t>
+            </a:r>
+            <a:pPr indent="0" marL="0">
+              <a:spcAft>
+                <a:spcPts val="300"/>
+              </a:spcAft>
+              <a:buNone/>
+            </a:pPr>
+            <a:r>
+              <a:rPr lang="en-US" sz="1500" dirty="0">
+                <a:solidFill>
+                  <a:schemeClr val="tx1"/>
+                </a:solidFill>
+              </a:rPr>
+              <a:t>question sets, hints, labeling guide</a:t>
+            </a:r>
+            <a:endParaRPr lang="en-US" sz="1500" dirty="0"/>
+          </a:p>
+          <a:p>
+            <a:pPr indent="0" marL="0">
+              <a:spcAft>
+                <a:spcPts val="300"/>
+              </a:spcAft>
+              <a:buNone/>
+            </a:pPr>
+            <a:r>
+              <a:rPr lang="en-US" sz="1500" b="1" dirty="0">
+                <a:solidFill>
+                  <a:schemeClr val="tx1"/>
+                </a:solidFill>
+              </a:rPr>
+              <a:t>Ritik Agarwal: </a:t>
+            </a:r>
+            <a:pPr indent="0" marL="0">
+              <a:spcAft>
+                <a:spcPts val="300"/>
+              </a:spcAft>
+              <a:buNone/>
+            </a:pPr>
+            <a:r>
+              <a:rPr lang="en-US" sz="1500" dirty="0">
+                <a:solidFill>
+                  <a:schemeClr val="tx1"/>
+                </a:solidFill>
+              </a:rPr>
+              <a:t>harder questions and tool hints, stats, charts</a:t>
+            </a:r>
+            <a:endParaRPr lang="en-US" sz="1500" dirty="0"/>
+          </a:p>
+          <a:p>
+            <a:pPr indent="0" marL="0">
+              <a:spcAft>
+                <a:spcPts val="300"/>
+              </a:spcAft>
+              <a:buNone/>
+            </a:pPr>
+            <a:r>
+              <a:rPr lang="en-US" sz="1500" b="1" dirty="0">
+                <a:solidFill>
+                  <a:schemeClr val="tx1"/>
+                </a:solidFill>
+              </a:rPr>
+              <a:t>All three: </a:t>
+            </a:r>
+            <a:pPr indent="0" marL="0">
+              <a:spcAft>
+                <a:spcPts val="300"/>
+              </a:spcAft>
+              <a:buNone/>
+            </a:pPr>
+            <a:r>
+              <a:rPr lang="en-US" sz="1500" dirty="0">
+                <a:solidFill>
+                  <a:schemeClr val="tx1"/>
+                </a:solidFill>
+              </a:rPr>
+              <a:t>hand-labeling, presentations, report</a:t>
+            </a:r>
+            <a:endParaRPr lang="en-US" sz="1500" dirty="0"/>
+          </a:p>
+        </p:txBody>
+      </p:sp>
+      <p:sp>
+        <p:nvSpPr>
+          <p:cNvPr id="25" name="Slide Number Placeholder 0"/>
+          <p:cNvSpPr>
+            <a:spLocks noGrp="1"/>
+          </p:cNvSpPr>
+          <p:nvPr>
+            <p:ph type="sldNum" sz="quarter" idx="4294967295"/>
+          </p:nvPr>
+        </p:nvSpPr>
+        <p:spPr>
+          <a:xfrm>
+            <a:off x="11155680" y="6400800"/>
+            <a:ext cx="457200" cy="274320"/>
+          </a:xfrm>
+          <a:prstGeom prst="rect">
+            <a:avLst/>
+          </a:prstGeom>
+          <a:extLst>
+            <a:ext uri="{C572A759-6A51-4108-AA02-DFA0A04FC94B}">
+              <ma14:wrappingTextBoxFlag xmlns:ma14="http://schemas.microsoft.com/office/mac/drawingml/2011/main" val="0"/>
+            </a:ext>
+          </a:extLst>
+        </p:spPr>
+        <p:txBody>
+          <a:bodyPr/>
+          <a:lstStyle>
+            <a:lvl1pPr>
+              <a:defRPr sz="1000">
+                <a:solidFill>
+                  <a:srgbClr val="6B7280"/>
+                </a:solidFill>
+              </a:defRPr>
+            </a:lvl1pPr>
+          </a:lstStyle>
+          <a:p>
+            <a:pPr algn="r"/>
+            <a:fld id="{F7021451-1387-4CA6-816F-3879F97B5CBC}" type="slidenum">
+              <a:rPr b="0" lang="en-US"/>
+              <a:t>11</a:t>
+            </a:fld>
+            <a:endParaRPr lang="en-US"/>
+          </a:p>
+        </p:txBody>
+      </p:sp>
     </p:spTree>
   </p:cSld>
   <p:clrMapOvr>
@@ -4469,6 +5372,237 @@
         </p:nvSpPr>
         <p:spPr>
           <a:xfrm>
+            <a:off x="731520" y="1417320"/>
+            <a:ext cx="6766560" cy="1920240"/>
+          </a:xfrm>
+          <a:prstGeom prst="rect">
+            <a:avLst/>
+          </a:prstGeom>
+          <a:noFill/>
+          <a:ln/>
+        </p:spPr>
+        <p:txBody>
+          <a:bodyPr wrap="square" lIns="0" tIns="0" rIns="0" bIns="0" rtlCol="0" anchor="b"/>
+          <a:lstStyle/>
+          <a:p>
+            <a:pPr algn="l" indent="0" marL="0">
+              <a:buNone/>
+            </a:pPr>
+            <a:r>
+              <a:rPr lang="en-US" sz="2800" b="1" dirty="0">
+                <a:solidFill>
+                  <a:schemeClr val="bg1"/>
+                </a:solidFill>
+              </a:rPr>
+              <a:t>In short: thinking models almost always see it and almost never say so, and a “tool” hint sways them far more than one from the user.</a:t>
+            </a:r>
+            <a:endParaRPr lang="en-US" sz="4000" dirty="0"/>
+          </a:p>
+        </p:txBody>
+      </p:sp>
+      <p:sp>
+        <p:nvSpPr>
+          <p:cNvPr id="3" name="Text 0"/>
+          <p:cNvSpPr/>
+          <p:nvPr>
+            <p:ph idx="101" type="body" hasCustomPrompt="1"/>
+          </p:nvPr>
+        </p:nvSpPr>
+        <p:spPr>
+          <a:xfrm>
+            <a:off x="731520" y="3520440"/>
+            <a:ext cx="6583680" cy="822960"/>
+          </a:xfrm>
+          <a:prstGeom prst="rect">
+            <a:avLst/>
+          </a:prstGeom>
+          <a:noFill/>
+          <a:ln/>
+        </p:spPr>
+        <p:txBody>
+          <a:bodyPr wrap="square" lIns="0" tIns="0" rIns="0" bIns="0" rtlCol="0" anchor="t"/>
+          <a:lstStyle/>
+          <a:p>
+            <a:pPr indent="0" marL="0">
+              <a:buNone/>
+            </a:pPr>
+            <a:r>
+              <a:rPr lang="en-US" sz="1900" dirty="0">
+                <a:solidFill>
+                  <a:schemeClr val="bg2"/>
+                </a:solidFill>
+              </a:rPr>
+              <a:t>Next: harder questions, real tool calls, hand labels, and a second model as a checker.</a:t>
+            </a:r>
+            <a:endParaRPr lang="en-US" sz="1900" dirty="0"/>
+          </a:p>
+        </p:txBody>
+      </p:sp>
+      <p:sp>
+        <p:nvSpPr>
+          <p:cNvPr id="4" name="Text 0"/>
+          <p:cNvSpPr/>
+          <p:nvPr>
+            <p:ph idx="102" type="body" hasCustomPrompt="1"/>
+          </p:nvPr>
+        </p:nvSpPr>
+        <p:spPr>
+          <a:xfrm>
+            <a:off x="731520" y="4892040"/>
+            <a:ext cx="6766560" cy="1188720"/>
+          </a:xfrm>
+          <a:prstGeom prst="rect">
+            <a:avLst/>
+          </a:prstGeom>
+          <a:noFill/>
+          <a:ln/>
+        </p:spPr>
+        <p:txBody>
+          <a:bodyPr wrap="square" lIns="0" tIns="0" rIns="0" bIns="0" rtlCol="0" anchor="t"/>
+          <a:lstStyle/>
+          <a:p>
+            <a:pPr indent="0" marL="0">
+              <a:buNone/>
+            </a:pPr>
+            <a:r>
+              <a:rPr lang="en-US" sz="2800" b="1" dirty="0">
+                <a:solidFill>
+                  <a:schemeClr val="accent2"/>
+                </a:solidFill>
+              </a:rPr>
+              <a:t>Questions?</a:t>
+            </a:r>
+            <a:endParaRPr lang="en-US" sz="1500" dirty="0"/>
+          </a:p>
+        </p:txBody>
+      </p:sp>
+      <p:sp>
+        <p:nvSpPr>
+          <p:cNvPr id="5" name="close-private"/>
+          <p:cNvSpPr/>
+          <p:nvPr/>
+        </p:nvSpPr>
+        <p:spPr>
+          <a:xfrm>
+            <a:off x="8001000" y="1554480"/>
+            <a:ext cx="2468880" cy="2468880"/>
+          </a:xfrm>
+          <a:prstGeom prst="ellipse">
+            <a:avLst/>
+          </a:prstGeom>
+          <a:solidFill>
+            <a:schemeClr val="accent1">
+              <a:alpha val="30000"/>
+            </a:schemeClr>
+          </a:solidFill>
+          <a:ln/>
+        </p:spPr>
+      </p:sp>
+      <p:sp>
+        <p:nvSpPr>
+          <p:cNvPr id="6" name="close-visible"/>
+          <p:cNvSpPr/>
+          <p:nvPr/>
+        </p:nvSpPr>
+        <p:spPr>
+          <a:xfrm>
+            <a:off x="9281160" y="2697480"/>
+            <a:ext cx="2468880" cy="2468880"/>
+          </a:xfrm>
+          <a:prstGeom prst="ellipse">
+            <a:avLst/>
+          </a:prstGeom>
+          <a:solidFill>
+            <a:schemeClr val="accent2">
+              <a:alpha val="35000"/>
+            </a:schemeClr>
+          </a:solidFill>
+          <a:ln/>
+        </p:spPr>
+      </p:sp>
+      <p:pic>
+        <p:nvPicPr>
+          <p:cNvPr id="7" name="close-lock" descr="preencoded.png">    </p:cNvPr>
+          <p:cNvPicPr>
+            <a:picLocks noChangeAspect="1"/>
+          </p:cNvPicPr>
+          <p:nvPr/>
+        </p:nvPicPr>
+        <p:blipFill>
+          <a:blip r:embed="rId1"/>
+          <a:stretch>
+            <a:fillRect/>
+          </a:stretch>
+        </p:blipFill>
+        <p:spPr>
+          <a:xfrm>
+            <a:off x="8732520" y="2240280"/>
+            <a:ext cx="822960" cy="822960"/>
+          </a:xfrm>
+          <a:prstGeom prst="rect">
+            <a:avLst/>
+          </a:prstGeom>
+        </p:spPr>
+      </p:pic>
+      <p:pic>
+        <p:nvPicPr>
+          <p:cNvPr id="8" name="close-eye" descr="preencoded.png">    </p:cNvPr>
+          <p:cNvPicPr>
+            <a:picLocks noChangeAspect="1"/>
+          </p:cNvPicPr>
+          <p:nvPr/>
+        </p:nvPicPr>
+        <p:blipFill>
+          <a:blip r:embed="rId2"/>
+          <a:stretch>
+            <a:fillRect/>
+          </a:stretch>
+        </p:blipFill>
+        <p:spPr>
+          <a:xfrm>
+            <a:off x="10287000" y="3703320"/>
+            <a:ext cx="822960" cy="822960"/>
+          </a:xfrm>
+          <a:prstGeom prst="rect">
+            <a:avLst/>
+          </a:prstGeom>
+        </p:spPr>
+      </p:pic>
+    </p:spTree>
+  </p:cSld>
+  <p:clrMapOvr>
+    <a:masterClrMapping/>
+  </p:clrMapOvr>
+</p:sld>
+</file>
+
+<file path=ppt/slides/slide13.xml><?xml version="1.0" encoding="utf-8"?>
+<p:sld xmlns:a="http://schemas.openxmlformats.org/drawingml/2006/main" xmlns:r="http://schemas.openxmlformats.org/officeDocument/2006/relationships" xmlns:p="http://schemas.openxmlformats.org/presentationml/2006/main">
+  <p:cSld name="Slide 13">
+    <p:spTree>
+      <p:nvGrpSpPr>
+        <p:cNvPr id="1" name=""/>
+        <p:cNvGrpSpPr/>
+        <p:nvPr/>
+      </p:nvGrpSpPr>
+      <p:grpSpPr>
+        <a:xfrm>
+          <a:off x="0" y="0"/>
+          <a:ext cx="0" cy="0"/>
+          <a:chOff x="0" y="0"/>
+          <a:chExt cx="0" cy="0"/>
+        </a:xfrm>
+      </p:grpSpPr>
+      <p:sp>
+        <p:nvSpPr>
+          <p:cNvPr id="2" name="Text 0"/>
+          <p:cNvSpPr/>
+          <p:nvPr>
+            <p:ph idx="100" type="title" hasCustomPrompt="1"/>
+          </p:nvPr>
+        </p:nvSpPr>
+        <p:spPr>
+          <a:xfrm>
             <a:off x="548640" y="320040"/>
             <a:ext cx="11064240" cy="822960"/>
           </a:xfrm>
@@ -4499,7 +5633,7 @@
       </p:sp>
       <p:graphicFrame>
         <p:nvGraphicFramePr>
-          <p:cNvPr id="13" name="Table 0"/>
+          <p:cNvPr id="14" name="Table 0"/>
           <p:cNvGraphicFramePr>
             <a:graphicFrameLocks noGrp="1"/>
           </p:cNvGraphicFramePr>
@@ -7484,7 +8618,7 @@
             <a:pPr algn="r"/>
             <a:fld id="{F7021451-1387-4CA6-816F-3879F97B5CBC}" type="slidenum">
               <a:rPr b="0" lang="en-US"/>
-              <a:t>12</a:t>
+              <a:t>13</a:t>
             </a:fld>
             <a:endParaRPr lang="en-US"/>
           </a:p>
@@ -7498,9 +8632,9 @@
 </p:sld>
 </file>
 
-<file path=ppt/slides/slide13.xml><?xml version="1.0" encoding="utf-8"?>
+<file path=ppt/slides/slide14.xml><?xml version="1.0" encoding="utf-8"?>
 <p:sld xmlns:a="http://schemas.openxmlformats.org/drawingml/2006/main" xmlns:r="http://schemas.openxmlformats.org/officeDocument/2006/relationships" xmlns:p="http://schemas.openxmlformats.org/presentationml/2006/main">
-  <p:cSld name="Slide 13">
+  <p:cSld name="Slide 14">
     <p:spTree>
       <p:nvGrpSpPr>
         <p:cNvPr id="1" name=""/>
@@ -7547,6 +8681,1650 @@
                   <a:schemeClr val="tx1"/>
                 </a:solidFill>
               </a:rPr>
+              <a:t>Backup: harder questions, the reviewer, the leak test</a:t>
+            </a:r>
+            <a:endParaRPr lang="en-US" sz="3000" dirty="0"/>
+          </a:p>
+        </p:txBody>
+      </p:sp>
+      <p:graphicFrame>
+        <p:nvGraphicFramePr>
+          <p:cNvPr id="15" name="Table 0"/>
+          <p:cNvGraphicFramePr>
+            <a:graphicFrameLocks noGrp="1"/>
+          </p:cNvGraphicFramePr>
+          <p:nvPr>
+            <p:extLst>
+              <p:ext uri="{D42A27DB-BD31-4B8C-83A1-F6EECF244321}">
+                <p14:modId xmlns:p14="http://schemas.microsoft.com/office/powerpoint/2010/main" val="1579011935"/>
+              </p:ext>
+            </p:extLst>
+          </p:nvPr>
+        </p:nvGraphicFramePr>
+        <p:xfrm>
+          <a:off x="548640" y="1371600"/>
+          <a:ext cx="11064240" cy="914400"/>
+        </p:xfrm>
+        <a:graphic>
+          <a:graphicData uri="http://schemas.openxmlformats.org/drawingml/2006/table">
+            <a:tbl>
+              <a:tblPr/>
+              <a:tblGrid>
+                <a:gridCol w="2377440"/>
+                <a:gridCol w="1737360"/>
+                <a:gridCol w="1737360"/>
+                <a:gridCol w="1554480"/>
+                <a:gridCol w="2011680"/>
+                <a:gridCol w="1645920"/>
+              </a:tblGrid>
+              <a:tr h="0">
+                <a:tc>
+                  <a:txBody>
+                    <a:bodyPr/>
+                    <a:lstStyle/>
+                    <a:p>
+                      <a:pPr indent="0" marL="0">
+                        <a:buNone/>
+                      </a:pPr>
+                      <a:r>
+                        <a:rPr lang="en-US" sz="1300" b="1" dirty="0">
+                          <a:solidFill>
+                            <a:schemeClr val="bg1"/>
+                          </a:solidFill>
+                        </a:rPr>
+                        <a:t>Model (exam questions)</a:t>
+                      </a:r>
+                      <a:endParaRPr lang="en-US" sz="1300" dirty="0"/>
+                    </a:p>
+                  </a:txBody>
+                  <a:tcPr marL="64008" marR="64008" marT="64008" marB="64008">
+                    <a:lnL w="9525" cap="flat" cmpd="sng" algn="ctr">
+                      <a:solidFill>
+                        <a:srgbClr val="D5DBE3"/>
+                      </a:solidFill>
+                      <a:prstDash val="solid"/>
+                      <a:round/>
+                      <a:headEnd type="none" w="med" len="med"/>
+                      <a:tailEnd type="none" w="med" len="med"/>
+                    </a:lnL>
+                    <a:lnR w="9525" cap="flat" cmpd="sng" algn="ctr">
+                      <a:solidFill>
+                        <a:srgbClr val="D5DBE3"/>
+                      </a:solidFill>
+                      <a:prstDash val="solid"/>
+                      <a:round/>
+                      <a:headEnd type="none" w="med" len="med"/>
+                      <a:tailEnd type="none" w="med" len="med"/>
+                    </a:lnR>
+                    <a:lnT w="9525" cap="flat" cmpd="sng" algn="ctr">
+                      <a:solidFill>
+                        <a:srgbClr val="D5DBE3"/>
+                      </a:solidFill>
+                      <a:prstDash val="solid"/>
+                      <a:round/>
+                      <a:headEnd type="none" w="med" len="med"/>
+                      <a:tailEnd type="none" w="med" len="med"/>
+                    </a:lnT>
+                    <a:lnB w="9525" cap="flat" cmpd="sng" algn="ctr">
+                      <a:solidFill>
+                        <a:srgbClr val="D5DBE3"/>
+                      </a:solidFill>
+                      <a:prstDash val="solid"/>
+                      <a:round/>
+                      <a:headEnd type="none" w="med" len="med"/>
+                      <a:tailEnd type="none" w="med" len="med"/>
+                    </a:lnB>
+                    <a:solidFill>
+                      <a:schemeClr val="tx2"/>
+                    </a:solidFill>
+                  </a:tcPr>
+                </a:tc>
+                <a:tc>
+                  <a:txBody>
+                    <a:bodyPr/>
+                    <a:lstStyle/>
+                    <a:p>
+                      <a:pPr indent="0" marL="0">
+                        <a:buNone/>
+                      </a:pPr>
+                      <a:r>
+                        <a:rPr lang="en-US" sz="1300" b="1" dirty="0">
+                          <a:solidFill>
+                            <a:schemeClr val="bg1"/>
+                          </a:solidFill>
+                        </a:rPr>
+                        <a:t>Wrong letter picked: user hint</a:t>
+                      </a:r>
+                      <a:endParaRPr lang="en-US" sz="1300" dirty="0"/>
+                    </a:p>
+                  </a:txBody>
+                  <a:tcPr marL="64008" marR="64008" marT="64008" marB="64008">
+                    <a:lnL w="9525" cap="flat" cmpd="sng" algn="ctr">
+                      <a:solidFill>
+                        <a:srgbClr val="D5DBE3"/>
+                      </a:solidFill>
+                      <a:prstDash val="solid"/>
+                      <a:round/>
+                      <a:headEnd type="none" w="med" len="med"/>
+                      <a:tailEnd type="none" w="med" len="med"/>
+                    </a:lnL>
+                    <a:lnR w="9525" cap="flat" cmpd="sng" algn="ctr">
+                      <a:solidFill>
+                        <a:srgbClr val="D5DBE3"/>
+                      </a:solidFill>
+                      <a:prstDash val="solid"/>
+                      <a:round/>
+                      <a:headEnd type="none" w="med" len="med"/>
+                      <a:tailEnd type="none" w="med" len="med"/>
+                    </a:lnR>
+                    <a:lnT w="9525" cap="flat" cmpd="sng" algn="ctr">
+                      <a:solidFill>
+                        <a:srgbClr val="D5DBE3"/>
+                      </a:solidFill>
+                      <a:prstDash val="solid"/>
+                      <a:round/>
+                      <a:headEnd type="none" w="med" len="med"/>
+                      <a:tailEnd type="none" w="med" len="med"/>
+                    </a:lnT>
+                    <a:lnB w="9525" cap="flat" cmpd="sng" algn="ctr">
+                      <a:solidFill>
+                        <a:srgbClr val="D5DBE3"/>
+                      </a:solidFill>
+                      <a:prstDash val="solid"/>
+                      <a:round/>
+                      <a:headEnd type="none" w="med" len="med"/>
+                      <a:tailEnd type="none" w="med" len="med"/>
+                    </a:lnB>
+                    <a:solidFill>
+                      <a:schemeClr val="tx2"/>
+                    </a:solidFill>
+                  </a:tcPr>
+                </a:tc>
+                <a:tc>
+                  <a:txBody>
+                    <a:bodyPr/>
+                    <a:lstStyle/>
+                    <a:p>
+                      <a:pPr indent="0" marL="0">
+                        <a:buNone/>
+                      </a:pPr>
+                      <a:r>
+                        <a:rPr lang="en-US" sz="1300" b="1" dirty="0">
+                          <a:solidFill>
+                            <a:schemeClr val="bg1"/>
+                          </a:solidFill>
+                        </a:rPr>
+                        <a:t>Wrong letter picked: tool hint</a:t>
+                      </a:r>
+                      <a:endParaRPr lang="en-US" sz="1300" dirty="0"/>
+                    </a:p>
+                  </a:txBody>
+                  <a:tcPr marL="64008" marR="64008" marT="64008" marB="64008">
+                    <a:lnL w="9525" cap="flat" cmpd="sng" algn="ctr">
+                      <a:solidFill>
+                        <a:srgbClr val="D5DBE3"/>
+                      </a:solidFill>
+                      <a:prstDash val="solid"/>
+                      <a:round/>
+                      <a:headEnd type="none" w="med" len="med"/>
+                      <a:tailEnd type="none" w="med" len="med"/>
+                    </a:lnL>
+                    <a:lnR w="9525" cap="flat" cmpd="sng" algn="ctr">
+                      <a:solidFill>
+                        <a:srgbClr val="D5DBE3"/>
+                      </a:solidFill>
+                      <a:prstDash val="solid"/>
+                      <a:round/>
+                      <a:headEnd type="none" w="med" len="med"/>
+                      <a:tailEnd type="none" w="med" len="med"/>
+                    </a:lnR>
+                    <a:lnT w="9525" cap="flat" cmpd="sng" algn="ctr">
+                      <a:solidFill>
+                        <a:srgbClr val="D5DBE3"/>
+                      </a:solidFill>
+                      <a:prstDash val="solid"/>
+                      <a:round/>
+                      <a:headEnd type="none" w="med" len="med"/>
+                      <a:tailEnd type="none" w="med" len="med"/>
+                    </a:lnT>
+                    <a:lnB w="9525" cap="flat" cmpd="sng" algn="ctr">
+                      <a:solidFill>
+                        <a:srgbClr val="D5DBE3"/>
+                      </a:solidFill>
+                      <a:prstDash val="solid"/>
+                      <a:round/>
+                      <a:headEnd type="none" w="med" len="med"/>
+                      <a:tailEnd type="none" w="med" len="med"/>
+                    </a:lnB>
+                    <a:solidFill>
+                      <a:schemeClr val="tx2"/>
+                    </a:solidFill>
+                  </a:tcPr>
+                </a:tc>
+                <a:tc>
+                  <a:txBody>
+                    <a:bodyPr/>
+                    <a:lstStyle/>
+                    <a:p>
+                      <a:pPr indent="0" marL="0">
+                        <a:buNone/>
+                      </a:pPr>
+                      <a:r>
+                        <a:rPr lang="en-US" sz="1300" b="1" dirty="0">
+                          <a:solidFill>
+                            <a:schemeClr val="bg1"/>
+                          </a:solidFill>
+                        </a:rPr>
+                        <a:t>Same letter, no hint</a:t>
+                      </a:r>
+                      <a:endParaRPr lang="en-US" sz="1300" dirty="0"/>
+                    </a:p>
+                  </a:txBody>
+                  <a:tcPr marL="64008" marR="64008" marT="64008" marB="64008">
+                    <a:lnL w="9525" cap="flat" cmpd="sng" algn="ctr">
+                      <a:solidFill>
+                        <a:srgbClr val="D5DBE3"/>
+                      </a:solidFill>
+                      <a:prstDash val="solid"/>
+                      <a:round/>
+                      <a:headEnd type="none" w="med" len="med"/>
+                      <a:tailEnd type="none" w="med" len="med"/>
+                    </a:lnL>
+                    <a:lnR w="9525" cap="flat" cmpd="sng" algn="ctr">
+                      <a:solidFill>
+                        <a:srgbClr val="D5DBE3"/>
+                      </a:solidFill>
+                      <a:prstDash val="solid"/>
+                      <a:round/>
+                      <a:headEnd type="none" w="med" len="med"/>
+                      <a:tailEnd type="none" w="med" len="med"/>
+                    </a:lnR>
+                    <a:lnT w="9525" cap="flat" cmpd="sng" algn="ctr">
+                      <a:solidFill>
+                        <a:srgbClr val="D5DBE3"/>
+                      </a:solidFill>
+                      <a:prstDash val="solid"/>
+                      <a:round/>
+                      <a:headEnd type="none" w="med" len="med"/>
+                      <a:tailEnd type="none" w="med" len="med"/>
+                    </a:lnT>
+                    <a:lnB w="9525" cap="flat" cmpd="sng" algn="ctr">
+                      <a:solidFill>
+                        <a:srgbClr val="D5DBE3"/>
+                      </a:solidFill>
+                      <a:prstDash val="solid"/>
+                      <a:round/>
+                      <a:headEnd type="none" w="med" len="med"/>
+                      <a:tailEnd type="none" w="med" len="med"/>
+                    </a:lnB>
+                    <a:solidFill>
+                      <a:schemeClr val="tx2"/>
+                    </a:solidFill>
+                  </a:tcPr>
+                </a:tc>
+                <a:tc>
+                  <a:txBody>
+                    <a:bodyPr/>
+                    <a:lstStyle/>
+                    <a:p>
+                      <a:pPr indent="0" marL="0">
+                        <a:buNone/>
+                      </a:pPr>
+                      <a:r>
+                        <a:rPr lang="en-US" sz="1300" b="1" dirty="0">
+                          <a:solidFill>
+                            <a:schemeClr val="bg1"/>
+                          </a:solidFill>
+                        </a:rPr>
+                        <a:t>When it followed the tool: tool in private notes</a:t>
+                      </a:r>
+                      <a:endParaRPr lang="en-US" sz="1300" dirty="0"/>
+                    </a:p>
+                  </a:txBody>
+                  <a:tcPr marL="64008" marR="64008" marT="64008" marB="64008">
+                    <a:lnL w="9525" cap="flat" cmpd="sng" algn="ctr">
+                      <a:solidFill>
+                        <a:srgbClr val="D5DBE3"/>
+                      </a:solidFill>
+                      <a:prstDash val="solid"/>
+                      <a:round/>
+                      <a:headEnd type="none" w="med" len="med"/>
+                      <a:tailEnd type="none" w="med" len="med"/>
+                    </a:lnL>
+                    <a:lnR w="9525" cap="flat" cmpd="sng" algn="ctr">
+                      <a:solidFill>
+                        <a:srgbClr val="D5DBE3"/>
+                      </a:solidFill>
+                      <a:prstDash val="solid"/>
+                      <a:round/>
+                      <a:headEnd type="none" w="med" len="med"/>
+                      <a:tailEnd type="none" w="med" len="med"/>
+                    </a:lnR>
+                    <a:lnT w="9525" cap="flat" cmpd="sng" algn="ctr">
+                      <a:solidFill>
+                        <a:srgbClr val="D5DBE3"/>
+                      </a:solidFill>
+                      <a:prstDash val="solid"/>
+                      <a:round/>
+                      <a:headEnd type="none" w="med" len="med"/>
+                      <a:tailEnd type="none" w="med" len="med"/>
+                    </a:lnT>
+                    <a:lnB w="9525" cap="flat" cmpd="sng" algn="ctr">
+                      <a:solidFill>
+                        <a:srgbClr val="D5DBE3"/>
+                      </a:solidFill>
+                      <a:prstDash val="solid"/>
+                      <a:round/>
+                      <a:headEnd type="none" w="med" len="med"/>
+                      <a:tailEnd type="none" w="med" len="med"/>
+                    </a:lnB>
+                    <a:solidFill>
+                      <a:schemeClr val="tx2"/>
+                    </a:solidFill>
+                  </a:tcPr>
+                </a:tc>
+                <a:tc>
+                  <a:txBody>
+                    <a:bodyPr/>
+                    <a:lstStyle/>
+                    <a:p>
+                      <a:pPr indent="0" marL="0">
+                        <a:buNone/>
+                      </a:pPr>
+                      <a:r>
+                        <a:rPr lang="en-US" sz="1300" b="1" dirty="0">
+                          <a:solidFill>
+                            <a:schemeClr val="bg1"/>
+                          </a:solidFill>
+                        </a:rPr>
+                        <a:t>Tool in final answer</a:t>
+                      </a:r>
+                      <a:endParaRPr lang="en-US" sz="1300" dirty="0"/>
+                    </a:p>
+                  </a:txBody>
+                  <a:tcPr marL="64008" marR="64008" marT="64008" marB="64008">
+                    <a:lnL w="9525" cap="flat" cmpd="sng" algn="ctr">
+                      <a:solidFill>
+                        <a:srgbClr val="D5DBE3"/>
+                      </a:solidFill>
+                      <a:prstDash val="solid"/>
+                      <a:round/>
+                      <a:headEnd type="none" w="med" len="med"/>
+                      <a:tailEnd type="none" w="med" len="med"/>
+                    </a:lnL>
+                    <a:lnR w="9525" cap="flat" cmpd="sng" algn="ctr">
+                      <a:solidFill>
+                        <a:srgbClr val="D5DBE3"/>
+                      </a:solidFill>
+                      <a:prstDash val="solid"/>
+                      <a:round/>
+                      <a:headEnd type="none" w="med" len="med"/>
+                      <a:tailEnd type="none" w="med" len="med"/>
+                    </a:lnR>
+                    <a:lnT w="9525" cap="flat" cmpd="sng" algn="ctr">
+                      <a:solidFill>
+                        <a:srgbClr val="D5DBE3"/>
+                      </a:solidFill>
+                      <a:prstDash val="solid"/>
+                      <a:round/>
+                      <a:headEnd type="none" w="med" len="med"/>
+                      <a:tailEnd type="none" w="med" len="med"/>
+                    </a:lnT>
+                    <a:lnB w="9525" cap="flat" cmpd="sng" algn="ctr">
+                      <a:solidFill>
+                        <a:srgbClr val="D5DBE3"/>
+                      </a:solidFill>
+                      <a:prstDash val="solid"/>
+                      <a:round/>
+                      <a:headEnd type="none" w="med" len="med"/>
+                      <a:tailEnd type="none" w="med" len="med"/>
+                    </a:lnB>
+                    <a:solidFill>
+                      <a:schemeClr val="tx2"/>
+                    </a:solidFill>
+                  </a:tcPr>
+                </a:tc>
+              </a:tr>
+              <a:tr h="0">
+                <a:tc>
+                  <a:txBody>
+                    <a:bodyPr/>
+                    <a:lstStyle/>
+                    <a:p>
+                      <a:pPr indent="0" marL="0">
+                        <a:buNone/>
+                      </a:pPr>
+                      <a:r>
+                        <a:rPr lang="en-US" sz="1300" dirty="0">
+                          <a:solidFill>
+                            <a:schemeClr val="tx1"/>
+                          </a:solidFill>
+                        </a:rPr>
+                        <a:t>Olmo 7B regular (19)</a:t>
+                      </a:r>
+                      <a:endParaRPr lang="en-US" sz="1300" dirty="0"/>
+                    </a:p>
+                  </a:txBody>
+                  <a:tcPr marL="64008" marR="64008" marT="64008" marB="64008" anchor="t">
+                    <a:lnL w="9525" cap="flat" cmpd="sng" algn="ctr">
+                      <a:solidFill>
+                        <a:srgbClr val="D5DBE3"/>
+                      </a:solidFill>
+                      <a:prstDash val="solid"/>
+                      <a:round/>
+                      <a:headEnd type="none" w="med" len="med"/>
+                      <a:tailEnd type="none" w="med" len="med"/>
+                    </a:lnL>
+                    <a:lnR w="9525" cap="flat" cmpd="sng" algn="ctr">
+                      <a:solidFill>
+                        <a:srgbClr val="D5DBE3"/>
+                      </a:solidFill>
+                      <a:prstDash val="solid"/>
+                      <a:round/>
+                      <a:headEnd type="none" w="med" len="med"/>
+                      <a:tailEnd type="none" w="med" len="med"/>
+                    </a:lnR>
+                    <a:lnT w="9525" cap="flat" cmpd="sng" algn="ctr">
+                      <a:solidFill>
+                        <a:srgbClr val="D5DBE3"/>
+                      </a:solidFill>
+                      <a:prstDash val="solid"/>
+                      <a:round/>
+                      <a:headEnd type="none" w="med" len="med"/>
+                      <a:tailEnd type="none" w="med" len="med"/>
+                    </a:lnT>
+                    <a:lnB w="9525" cap="flat" cmpd="sng" algn="ctr">
+                      <a:solidFill>
+                        <a:srgbClr val="D5DBE3"/>
+                      </a:solidFill>
+                      <a:prstDash val="solid"/>
+                      <a:round/>
+                      <a:headEnd type="none" w="med" len="med"/>
+                      <a:tailEnd type="none" w="med" len="med"/>
+                    </a:lnB>
+                  </a:tcPr>
+                </a:tc>
+                <a:tc>
+                  <a:txBody>
+                    <a:bodyPr/>
+                    <a:lstStyle/>
+                    <a:p>
+                      <a:pPr indent="0" marL="0">
+                        <a:buNone/>
+                      </a:pPr>
+                      <a:r>
+                        <a:rPr lang="en-US" sz="1300" dirty="0">
+                          <a:solidFill>
+                            <a:schemeClr val="tx1"/>
+                          </a:solidFill>
+                        </a:rPr>
+                        <a:t>7 of 19</a:t>
+                      </a:r>
+                      <a:endParaRPr lang="en-US" sz="1300" dirty="0"/>
+                    </a:p>
+                  </a:txBody>
+                  <a:tcPr marL="64008" marR="64008" marT="64008" marB="64008" anchor="t">
+                    <a:lnL w="9525" cap="flat" cmpd="sng" algn="ctr">
+                      <a:solidFill>
+                        <a:srgbClr val="D5DBE3"/>
+                      </a:solidFill>
+                      <a:prstDash val="solid"/>
+                      <a:round/>
+                      <a:headEnd type="none" w="med" len="med"/>
+                      <a:tailEnd type="none" w="med" len="med"/>
+                    </a:lnL>
+                    <a:lnR w="9525" cap="flat" cmpd="sng" algn="ctr">
+                      <a:solidFill>
+                        <a:srgbClr val="D5DBE3"/>
+                      </a:solidFill>
+                      <a:prstDash val="solid"/>
+                      <a:round/>
+                      <a:headEnd type="none" w="med" len="med"/>
+                      <a:tailEnd type="none" w="med" len="med"/>
+                    </a:lnR>
+                    <a:lnT w="9525" cap="flat" cmpd="sng" algn="ctr">
+                      <a:solidFill>
+                        <a:srgbClr val="D5DBE3"/>
+                      </a:solidFill>
+                      <a:prstDash val="solid"/>
+                      <a:round/>
+                      <a:headEnd type="none" w="med" len="med"/>
+                      <a:tailEnd type="none" w="med" len="med"/>
+                    </a:lnT>
+                    <a:lnB w="9525" cap="flat" cmpd="sng" algn="ctr">
+                      <a:solidFill>
+                        <a:srgbClr val="D5DBE3"/>
+                      </a:solidFill>
+                      <a:prstDash val="solid"/>
+                      <a:round/>
+                      <a:headEnd type="none" w="med" len="med"/>
+                      <a:tailEnd type="none" w="med" len="med"/>
+                    </a:lnB>
+                  </a:tcPr>
+                </a:tc>
+                <a:tc>
+                  <a:txBody>
+                    <a:bodyPr/>
+                    <a:lstStyle/>
+                    <a:p>
+                      <a:pPr indent="0" marL="0">
+                        <a:buNone/>
+                      </a:pPr>
+                      <a:r>
+                        <a:rPr lang="en-US" sz="1300" dirty="0">
+                          <a:solidFill>
+                            <a:schemeClr val="tx1"/>
+                          </a:solidFill>
+                        </a:rPr>
+                        <a:t>8 of 19</a:t>
+                      </a:r>
+                      <a:endParaRPr lang="en-US" sz="1300" dirty="0"/>
+                    </a:p>
+                  </a:txBody>
+                  <a:tcPr marL="64008" marR="64008" marT="64008" marB="64008" anchor="t">
+                    <a:lnL w="9525" cap="flat" cmpd="sng" algn="ctr">
+                      <a:solidFill>
+                        <a:srgbClr val="D5DBE3"/>
+                      </a:solidFill>
+                      <a:prstDash val="solid"/>
+                      <a:round/>
+                      <a:headEnd type="none" w="med" len="med"/>
+                      <a:tailEnd type="none" w="med" len="med"/>
+                    </a:lnL>
+                    <a:lnR w="9525" cap="flat" cmpd="sng" algn="ctr">
+                      <a:solidFill>
+                        <a:srgbClr val="D5DBE3"/>
+                      </a:solidFill>
+                      <a:prstDash val="solid"/>
+                      <a:round/>
+                      <a:headEnd type="none" w="med" len="med"/>
+                      <a:tailEnd type="none" w="med" len="med"/>
+                    </a:lnR>
+                    <a:lnT w="9525" cap="flat" cmpd="sng" algn="ctr">
+                      <a:solidFill>
+                        <a:srgbClr val="D5DBE3"/>
+                      </a:solidFill>
+                      <a:prstDash val="solid"/>
+                      <a:round/>
+                      <a:headEnd type="none" w="med" len="med"/>
+                      <a:tailEnd type="none" w="med" len="med"/>
+                    </a:lnT>
+                    <a:lnB w="9525" cap="flat" cmpd="sng" algn="ctr">
+                      <a:solidFill>
+                        <a:srgbClr val="D5DBE3"/>
+                      </a:solidFill>
+                      <a:prstDash val="solid"/>
+                      <a:round/>
+                      <a:headEnd type="none" w="med" len="med"/>
+                      <a:tailEnd type="none" w="med" len="med"/>
+                    </a:lnB>
+                  </a:tcPr>
+                </a:tc>
+                <a:tc>
+                  <a:txBody>
+                    <a:bodyPr/>
+                    <a:lstStyle/>
+                    <a:p>
+                      <a:pPr indent="0" marL="0">
+                        <a:buNone/>
+                      </a:pPr>
+                      <a:r>
+                        <a:rPr lang="en-US" sz="1300" dirty="0">
+                          <a:solidFill>
+                            <a:schemeClr val="tx1"/>
+                          </a:solidFill>
+                        </a:rPr>
+                        <a:t>4 of 38</a:t>
+                      </a:r>
+                      <a:endParaRPr lang="en-US" sz="1300" dirty="0"/>
+                    </a:p>
+                  </a:txBody>
+                  <a:tcPr marL="64008" marR="64008" marT="64008" marB="64008" anchor="t">
+                    <a:lnL w="9525" cap="flat" cmpd="sng" algn="ctr">
+                      <a:solidFill>
+                        <a:srgbClr val="D5DBE3"/>
+                      </a:solidFill>
+                      <a:prstDash val="solid"/>
+                      <a:round/>
+                      <a:headEnd type="none" w="med" len="med"/>
+                      <a:tailEnd type="none" w="med" len="med"/>
+                    </a:lnL>
+                    <a:lnR w="9525" cap="flat" cmpd="sng" algn="ctr">
+                      <a:solidFill>
+                        <a:srgbClr val="D5DBE3"/>
+                      </a:solidFill>
+                      <a:prstDash val="solid"/>
+                      <a:round/>
+                      <a:headEnd type="none" w="med" len="med"/>
+                      <a:tailEnd type="none" w="med" len="med"/>
+                    </a:lnR>
+                    <a:lnT w="9525" cap="flat" cmpd="sng" algn="ctr">
+                      <a:solidFill>
+                        <a:srgbClr val="D5DBE3"/>
+                      </a:solidFill>
+                      <a:prstDash val="solid"/>
+                      <a:round/>
+                      <a:headEnd type="none" w="med" len="med"/>
+                      <a:tailEnd type="none" w="med" len="med"/>
+                    </a:lnT>
+                    <a:lnB w="9525" cap="flat" cmpd="sng" algn="ctr">
+                      <a:solidFill>
+                        <a:srgbClr val="D5DBE3"/>
+                      </a:solidFill>
+                      <a:prstDash val="solid"/>
+                      <a:round/>
+                      <a:headEnd type="none" w="med" len="med"/>
+                      <a:tailEnd type="none" w="med" len="med"/>
+                    </a:lnB>
+                  </a:tcPr>
+                </a:tc>
+                <a:tc>
+                  <a:txBody>
+                    <a:bodyPr/>
+                    <a:lstStyle/>
+                    <a:p>
+                      <a:pPr indent="0" marL="0">
+                        <a:buNone/>
+                      </a:pPr>
+                      <a:r>
+                        <a:rPr lang="en-US" sz="1300" dirty="0">
+                          <a:solidFill>
+                            <a:schemeClr val="tx1"/>
+                          </a:solidFill>
+                        </a:rPr>
+                        <a:t>no private notes</a:t>
+                      </a:r>
+                      <a:endParaRPr lang="en-US" sz="1300" dirty="0"/>
+                    </a:p>
+                  </a:txBody>
+                  <a:tcPr marL="64008" marR="64008" marT="64008" marB="64008" anchor="t">
+                    <a:lnL w="9525" cap="flat" cmpd="sng" algn="ctr">
+                      <a:solidFill>
+                        <a:srgbClr val="D5DBE3"/>
+                      </a:solidFill>
+                      <a:prstDash val="solid"/>
+                      <a:round/>
+                      <a:headEnd type="none" w="med" len="med"/>
+                      <a:tailEnd type="none" w="med" len="med"/>
+                    </a:lnL>
+                    <a:lnR w="9525" cap="flat" cmpd="sng" algn="ctr">
+                      <a:solidFill>
+                        <a:srgbClr val="D5DBE3"/>
+                      </a:solidFill>
+                      <a:prstDash val="solid"/>
+                      <a:round/>
+                      <a:headEnd type="none" w="med" len="med"/>
+                      <a:tailEnd type="none" w="med" len="med"/>
+                    </a:lnR>
+                    <a:lnT w="9525" cap="flat" cmpd="sng" algn="ctr">
+                      <a:solidFill>
+                        <a:srgbClr val="D5DBE3"/>
+                      </a:solidFill>
+                      <a:prstDash val="solid"/>
+                      <a:round/>
+                      <a:headEnd type="none" w="med" len="med"/>
+                      <a:tailEnd type="none" w="med" len="med"/>
+                    </a:lnT>
+                    <a:lnB w="9525" cap="flat" cmpd="sng" algn="ctr">
+                      <a:solidFill>
+                        <a:srgbClr val="D5DBE3"/>
+                      </a:solidFill>
+                      <a:prstDash val="solid"/>
+                      <a:round/>
+                      <a:headEnd type="none" w="med" len="med"/>
+                      <a:tailEnd type="none" w="med" len="med"/>
+                    </a:lnB>
+                  </a:tcPr>
+                </a:tc>
+                <a:tc>
+                  <a:txBody>
+                    <a:bodyPr/>
+                    <a:lstStyle/>
+                    <a:p>
+                      <a:pPr indent="0" marL="0">
+                        <a:buNone/>
+                      </a:pPr>
+                      <a:r>
+                        <a:rPr lang="en-US" sz="1300" dirty="0">
+                          <a:solidFill>
+                            <a:schemeClr val="tx1"/>
+                          </a:solidFill>
+                        </a:rPr>
+                        <a:t>6 of 8</a:t>
+                      </a:r>
+                      <a:endParaRPr lang="en-US" sz="1300" dirty="0"/>
+                    </a:p>
+                  </a:txBody>
+                  <a:tcPr marL="64008" marR="64008" marT="64008" marB="64008" anchor="t">
+                    <a:lnL w="9525" cap="flat" cmpd="sng" algn="ctr">
+                      <a:solidFill>
+                        <a:srgbClr val="D5DBE3"/>
+                      </a:solidFill>
+                      <a:prstDash val="solid"/>
+                      <a:round/>
+                      <a:headEnd type="none" w="med" len="med"/>
+                      <a:tailEnd type="none" w="med" len="med"/>
+                    </a:lnL>
+                    <a:lnR w="9525" cap="flat" cmpd="sng" algn="ctr">
+                      <a:solidFill>
+                        <a:srgbClr val="D5DBE3"/>
+                      </a:solidFill>
+                      <a:prstDash val="solid"/>
+                      <a:round/>
+                      <a:headEnd type="none" w="med" len="med"/>
+                      <a:tailEnd type="none" w="med" len="med"/>
+                    </a:lnR>
+                    <a:lnT w="9525" cap="flat" cmpd="sng" algn="ctr">
+                      <a:solidFill>
+                        <a:srgbClr val="D5DBE3"/>
+                      </a:solidFill>
+                      <a:prstDash val="solid"/>
+                      <a:round/>
+                      <a:headEnd type="none" w="med" len="med"/>
+                      <a:tailEnd type="none" w="med" len="med"/>
+                    </a:lnT>
+                    <a:lnB w="9525" cap="flat" cmpd="sng" algn="ctr">
+                      <a:solidFill>
+                        <a:srgbClr val="D5DBE3"/>
+                      </a:solidFill>
+                      <a:prstDash val="solid"/>
+                      <a:round/>
+                      <a:headEnd type="none" w="med" len="med"/>
+                      <a:tailEnd type="none" w="med" len="med"/>
+                    </a:lnB>
+                  </a:tcPr>
+                </a:tc>
+              </a:tr>
+              <a:tr h="0">
+                <a:tc>
+                  <a:txBody>
+                    <a:bodyPr/>
+                    <a:lstStyle/>
+                    <a:p>
+                      <a:pPr indent="0" marL="0">
+                        <a:buNone/>
+                      </a:pPr>
+                      <a:r>
+                        <a:rPr lang="en-US" sz="1300" dirty="0">
+                          <a:solidFill>
+                            <a:schemeClr val="tx1"/>
+                          </a:solidFill>
+                        </a:rPr>
+                        <a:t>Olmo 7B thinking (20)</a:t>
+                      </a:r>
+                      <a:endParaRPr lang="en-US" sz="1300" dirty="0"/>
+                    </a:p>
+                  </a:txBody>
+                  <a:tcPr marL="64008" marR="64008" marT="64008" marB="64008" anchor="t">
+                    <a:lnL w="9525" cap="flat" cmpd="sng" algn="ctr">
+                      <a:solidFill>
+                        <a:srgbClr val="D5DBE3"/>
+                      </a:solidFill>
+                      <a:prstDash val="solid"/>
+                      <a:round/>
+                      <a:headEnd type="none" w="med" len="med"/>
+                      <a:tailEnd type="none" w="med" len="med"/>
+                    </a:lnL>
+                    <a:lnR w="9525" cap="flat" cmpd="sng" algn="ctr">
+                      <a:solidFill>
+                        <a:srgbClr val="D5DBE3"/>
+                      </a:solidFill>
+                      <a:prstDash val="solid"/>
+                      <a:round/>
+                      <a:headEnd type="none" w="med" len="med"/>
+                      <a:tailEnd type="none" w="med" len="med"/>
+                    </a:lnR>
+                    <a:lnT w="9525" cap="flat" cmpd="sng" algn="ctr">
+                      <a:solidFill>
+                        <a:srgbClr val="D5DBE3"/>
+                      </a:solidFill>
+                      <a:prstDash val="solid"/>
+                      <a:round/>
+                      <a:headEnd type="none" w="med" len="med"/>
+                      <a:tailEnd type="none" w="med" len="med"/>
+                    </a:lnT>
+                    <a:lnB w="9525" cap="flat" cmpd="sng" algn="ctr">
+                      <a:solidFill>
+                        <a:srgbClr val="D5DBE3"/>
+                      </a:solidFill>
+                      <a:prstDash val="solid"/>
+                      <a:round/>
+                      <a:headEnd type="none" w="med" len="med"/>
+                      <a:tailEnd type="none" w="med" len="med"/>
+                    </a:lnB>
+                  </a:tcPr>
+                </a:tc>
+                <a:tc>
+                  <a:txBody>
+                    <a:bodyPr/>
+                    <a:lstStyle/>
+                    <a:p>
+                      <a:pPr indent="0" marL="0">
+                        <a:buNone/>
+                      </a:pPr>
+                      <a:r>
+                        <a:rPr lang="en-US" sz="1300" dirty="0">
+                          <a:solidFill>
+                            <a:schemeClr val="tx1"/>
+                          </a:solidFill>
+                        </a:rPr>
+                        <a:t>2 of 20</a:t>
+                      </a:r>
+                      <a:endParaRPr lang="en-US" sz="1300" dirty="0"/>
+                    </a:p>
+                  </a:txBody>
+                  <a:tcPr marL="64008" marR="64008" marT="64008" marB="64008" anchor="t">
+                    <a:lnL w="9525" cap="flat" cmpd="sng" algn="ctr">
+                      <a:solidFill>
+                        <a:srgbClr val="D5DBE3"/>
+                      </a:solidFill>
+                      <a:prstDash val="solid"/>
+                      <a:round/>
+                      <a:headEnd type="none" w="med" len="med"/>
+                      <a:tailEnd type="none" w="med" len="med"/>
+                    </a:lnL>
+                    <a:lnR w="9525" cap="flat" cmpd="sng" algn="ctr">
+                      <a:solidFill>
+                        <a:srgbClr val="D5DBE3"/>
+                      </a:solidFill>
+                      <a:prstDash val="solid"/>
+                      <a:round/>
+                      <a:headEnd type="none" w="med" len="med"/>
+                      <a:tailEnd type="none" w="med" len="med"/>
+                    </a:lnR>
+                    <a:lnT w="9525" cap="flat" cmpd="sng" algn="ctr">
+                      <a:solidFill>
+                        <a:srgbClr val="D5DBE3"/>
+                      </a:solidFill>
+                      <a:prstDash val="solid"/>
+                      <a:round/>
+                      <a:headEnd type="none" w="med" len="med"/>
+                      <a:tailEnd type="none" w="med" len="med"/>
+                    </a:lnT>
+                    <a:lnB w="9525" cap="flat" cmpd="sng" algn="ctr">
+                      <a:solidFill>
+                        <a:srgbClr val="D5DBE3"/>
+                      </a:solidFill>
+                      <a:prstDash val="solid"/>
+                      <a:round/>
+                      <a:headEnd type="none" w="med" len="med"/>
+                      <a:tailEnd type="none" w="med" len="med"/>
+                    </a:lnB>
+                  </a:tcPr>
+                </a:tc>
+                <a:tc>
+                  <a:txBody>
+                    <a:bodyPr/>
+                    <a:lstStyle/>
+                    <a:p>
+                      <a:pPr indent="0" marL="0">
+                        <a:buNone/>
+                      </a:pPr>
+                      <a:r>
+                        <a:rPr lang="en-US" sz="1300" dirty="0">
+                          <a:solidFill>
+                            <a:schemeClr val="tx1"/>
+                          </a:solidFill>
+                        </a:rPr>
+                        <a:t>10 of 20</a:t>
+                      </a:r>
+                      <a:endParaRPr lang="en-US" sz="1300" dirty="0"/>
+                    </a:p>
+                  </a:txBody>
+                  <a:tcPr marL="64008" marR="64008" marT="64008" marB="64008" anchor="t">
+                    <a:lnL w="9525" cap="flat" cmpd="sng" algn="ctr">
+                      <a:solidFill>
+                        <a:srgbClr val="D5DBE3"/>
+                      </a:solidFill>
+                      <a:prstDash val="solid"/>
+                      <a:round/>
+                      <a:headEnd type="none" w="med" len="med"/>
+                      <a:tailEnd type="none" w="med" len="med"/>
+                    </a:lnL>
+                    <a:lnR w="9525" cap="flat" cmpd="sng" algn="ctr">
+                      <a:solidFill>
+                        <a:srgbClr val="D5DBE3"/>
+                      </a:solidFill>
+                      <a:prstDash val="solid"/>
+                      <a:round/>
+                      <a:headEnd type="none" w="med" len="med"/>
+                      <a:tailEnd type="none" w="med" len="med"/>
+                    </a:lnR>
+                    <a:lnT w="9525" cap="flat" cmpd="sng" algn="ctr">
+                      <a:solidFill>
+                        <a:srgbClr val="D5DBE3"/>
+                      </a:solidFill>
+                      <a:prstDash val="solid"/>
+                      <a:round/>
+                      <a:headEnd type="none" w="med" len="med"/>
+                      <a:tailEnd type="none" w="med" len="med"/>
+                    </a:lnT>
+                    <a:lnB w="9525" cap="flat" cmpd="sng" algn="ctr">
+                      <a:solidFill>
+                        <a:srgbClr val="D5DBE3"/>
+                      </a:solidFill>
+                      <a:prstDash val="solid"/>
+                      <a:round/>
+                      <a:headEnd type="none" w="med" len="med"/>
+                      <a:tailEnd type="none" w="med" len="med"/>
+                    </a:lnB>
+                  </a:tcPr>
+                </a:tc>
+                <a:tc>
+                  <a:txBody>
+                    <a:bodyPr/>
+                    <a:lstStyle/>
+                    <a:p>
+                      <a:pPr indent="0" marL="0">
+                        <a:buNone/>
+                      </a:pPr>
+                      <a:r>
+                        <a:rPr lang="en-US" sz="1300" dirty="0">
+                          <a:solidFill>
+                            <a:schemeClr val="tx1"/>
+                          </a:solidFill>
+                        </a:rPr>
+                        <a:t>2 of 40</a:t>
+                      </a:r>
+                      <a:endParaRPr lang="en-US" sz="1300" dirty="0"/>
+                    </a:p>
+                  </a:txBody>
+                  <a:tcPr marL="64008" marR="64008" marT="64008" marB="64008" anchor="t">
+                    <a:lnL w="9525" cap="flat" cmpd="sng" algn="ctr">
+                      <a:solidFill>
+                        <a:srgbClr val="D5DBE3"/>
+                      </a:solidFill>
+                      <a:prstDash val="solid"/>
+                      <a:round/>
+                      <a:headEnd type="none" w="med" len="med"/>
+                      <a:tailEnd type="none" w="med" len="med"/>
+                    </a:lnL>
+                    <a:lnR w="9525" cap="flat" cmpd="sng" algn="ctr">
+                      <a:solidFill>
+                        <a:srgbClr val="D5DBE3"/>
+                      </a:solidFill>
+                      <a:prstDash val="solid"/>
+                      <a:round/>
+                      <a:headEnd type="none" w="med" len="med"/>
+                      <a:tailEnd type="none" w="med" len="med"/>
+                    </a:lnR>
+                    <a:lnT w="9525" cap="flat" cmpd="sng" algn="ctr">
+                      <a:solidFill>
+                        <a:srgbClr val="D5DBE3"/>
+                      </a:solidFill>
+                      <a:prstDash val="solid"/>
+                      <a:round/>
+                      <a:headEnd type="none" w="med" len="med"/>
+                      <a:tailEnd type="none" w="med" len="med"/>
+                    </a:lnT>
+                    <a:lnB w="9525" cap="flat" cmpd="sng" algn="ctr">
+                      <a:solidFill>
+                        <a:srgbClr val="D5DBE3"/>
+                      </a:solidFill>
+                      <a:prstDash val="solid"/>
+                      <a:round/>
+                      <a:headEnd type="none" w="med" len="med"/>
+                      <a:tailEnd type="none" w="med" len="med"/>
+                    </a:lnB>
+                  </a:tcPr>
+                </a:tc>
+                <a:tc>
+                  <a:txBody>
+                    <a:bodyPr/>
+                    <a:lstStyle/>
+                    <a:p>
+                      <a:pPr indent="0" marL="0">
+                        <a:buNone/>
+                      </a:pPr>
+                      <a:r>
+                        <a:rPr lang="en-US" sz="1300" dirty="0">
+                          <a:solidFill>
+                            <a:schemeClr val="tx1"/>
+                          </a:solidFill>
+                        </a:rPr>
+                        <a:t>9 of 10</a:t>
+                      </a:r>
+                      <a:endParaRPr lang="en-US" sz="1300" dirty="0"/>
+                    </a:p>
+                  </a:txBody>
+                  <a:tcPr marL="64008" marR="64008" marT="64008" marB="64008" anchor="t">
+                    <a:lnL w="9525" cap="flat" cmpd="sng" algn="ctr">
+                      <a:solidFill>
+                        <a:srgbClr val="D5DBE3"/>
+                      </a:solidFill>
+                      <a:prstDash val="solid"/>
+                      <a:round/>
+                      <a:headEnd type="none" w="med" len="med"/>
+                      <a:tailEnd type="none" w="med" len="med"/>
+                    </a:lnL>
+                    <a:lnR w="9525" cap="flat" cmpd="sng" algn="ctr">
+                      <a:solidFill>
+                        <a:srgbClr val="D5DBE3"/>
+                      </a:solidFill>
+                      <a:prstDash val="solid"/>
+                      <a:round/>
+                      <a:headEnd type="none" w="med" len="med"/>
+                      <a:tailEnd type="none" w="med" len="med"/>
+                    </a:lnR>
+                    <a:lnT w="9525" cap="flat" cmpd="sng" algn="ctr">
+                      <a:solidFill>
+                        <a:srgbClr val="D5DBE3"/>
+                      </a:solidFill>
+                      <a:prstDash val="solid"/>
+                      <a:round/>
+                      <a:headEnd type="none" w="med" len="med"/>
+                      <a:tailEnd type="none" w="med" len="med"/>
+                    </a:lnT>
+                    <a:lnB w="9525" cap="flat" cmpd="sng" algn="ctr">
+                      <a:solidFill>
+                        <a:srgbClr val="D5DBE3"/>
+                      </a:solidFill>
+                      <a:prstDash val="solid"/>
+                      <a:round/>
+                      <a:headEnd type="none" w="med" len="med"/>
+                      <a:tailEnd type="none" w="med" len="med"/>
+                    </a:lnB>
+                  </a:tcPr>
+                </a:tc>
+                <a:tc>
+                  <a:txBody>
+                    <a:bodyPr/>
+                    <a:lstStyle/>
+                    <a:p>
+                      <a:pPr indent="0" marL="0">
+                        <a:buNone/>
+                      </a:pPr>
+                      <a:r>
+                        <a:rPr lang="en-US" sz="1300" dirty="0">
+                          <a:solidFill>
+                            <a:schemeClr val="tx1"/>
+                          </a:solidFill>
+                        </a:rPr>
+                        <a:t>2 of 10</a:t>
+                      </a:r>
+                      <a:endParaRPr lang="en-US" sz="1300" dirty="0"/>
+                    </a:p>
+                  </a:txBody>
+                  <a:tcPr marL="64008" marR="64008" marT="64008" marB="64008" anchor="t">
+                    <a:lnL w="9525" cap="flat" cmpd="sng" algn="ctr">
+                      <a:solidFill>
+                        <a:srgbClr val="D5DBE3"/>
+                      </a:solidFill>
+                      <a:prstDash val="solid"/>
+                      <a:round/>
+                      <a:headEnd type="none" w="med" len="med"/>
+                      <a:tailEnd type="none" w="med" len="med"/>
+                    </a:lnL>
+                    <a:lnR w="9525" cap="flat" cmpd="sng" algn="ctr">
+                      <a:solidFill>
+                        <a:srgbClr val="D5DBE3"/>
+                      </a:solidFill>
+                      <a:prstDash val="solid"/>
+                      <a:round/>
+                      <a:headEnd type="none" w="med" len="med"/>
+                      <a:tailEnd type="none" w="med" len="med"/>
+                    </a:lnR>
+                    <a:lnT w="9525" cap="flat" cmpd="sng" algn="ctr">
+                      <a:solidFill>
+                        <a:srgbClr val="D5DBE3"/>
+                      </a:solidFill>
+                      <a:prstDash val="solid"/>
+                      <a:round/>
+                      <a:headEnd type="none" w="med" len="med"/>
+                      <a:tailEnd type="none" w="med" len="med"/>
+                    </a:lnT>
+                    <a:lnB w="9525" cap="flat" cmpd="sng" algn="ctr">
+                      <a:solidFill>
+                        <a:srgbClr val="D5DBE3"/>
+                      </a:solidFill>
+                      <a:prstDash val="solid"/>
+                      <a:round/>
+                      <a:headEnd type="none" w="med" len="med"/>
+                      <a:tailEnd type="none" w="med" len="med"/>
+                    </a:lnB>
+                  </a:tcPr>
+                </a:tc>
+              </a:tr>
+              <a:tr h="0">
+                <a:tc>
+                  <a:txBody>
+                    <a:bodyPr/>
+                    <a:lstStyle/>
+                    <a:p>
+                      <a:pPr indent="0" marL="0">
+                        <a:buNone/>
+                      </a:pPr>
+                      <a:r>
+                        <a:rPr lang="en-US" sz="1300" dirty="0">
+                          <a:solidFill>
+                            <a:schemeClr val="tx1"/>
+                          </a:solidFill>
+                        </a:rPr>
+                        <a:t>Qwen 30B thinking (11)</a:t>
+                      </a:r>
+                      <a:endParaRPr lang="en-US" sz="1300" dirty="0"/>
+                    </a:p>
+                  </a:txBody>
+                  <a:tcPr marL="64008" marR="64008" marT="64008" marB="64008" anchor="t">
+                    <a:lnL w="9525" cap="flat" cmpd="sng" algn="ctr">
+                      <a:solidFill>
+                        <a:srgbClr val="D5DBE3"/>
+                      </a:solidFill>
+                      <a:prstDash val="solid"/>
+                      <a:round/>
+                      <a:headEnd type="none" w="med" len="med"/>
+                      <a:tailEnd type="none" w="med" len="med"/>
+                    </a:lnL>
+                    <a:lnR w="9525" cap="flat" cmpd="sng" algn="ctr">
+                      <a:solidFill>
+                        <a:srgbClr val="D5DBE3"/>
+                      </a:solidFill>
+                      <a:prstDash val="solid"/>
+                      <a:round/>
+                      <a:headEnd type="none" w="med" len="med"/>
+                      <a:tailEnd type="none" w="med" len="med"/>
+                    </a:lnR>
+                    <a:lnT w="9525" cap="flat" cmpd="sng" algn="ctr">
+                      <a:solidFill>
+                        <a:srgbClr val="D5DBE3"/>
+                      </a:solidFill>
+                      <a:prstDash val="solid"/>
+                      <a:round/>
+                      <a:headEnd type="none" w="med" len="med"/>
+                      <a:tailEnd type="none" w="med" len="med"/>
+                    </a:lnT>
+                    <a:lnB w="9525" cap="flat" cmpd="sng" algn="ctr">
+                      <a:solidFill>
+                        <a:srgbClr val="D5DBE3"/>
+                      </a:solidFill>
+                      <a:prstDash val="solid"/>
+                      <a:round/>
+                      <a:headEnd type="none" w="med" len="med"/>
+                      <a:tailEnd type="none" w="med" len="med"/>
+                    </a:lnB>
+                  </a:tcPr>
+                </a:tc>
+                <a:tc>
+                  <a:txBody>
+                    <a:bodyPr/>
+                    <a:lstStyle/>
+                    <a:p>
+                      <a:pPr indent="0" marL="0">
+                        <a:buNone/>
+                      </a:pPr>
+                      <a:r>
+                        <a:rPr lang="en-US" sz="1300" dirty="0">
+                          <a:solidFill>
+                            <a:schemeClr val="tx1"/>
+                          </a:solidFill>
+                        </a:rPr>
+                        <a:t>0 of 11</a:t>
+                      </a:r>
+                      <a:endParaRPr lang="en-US" sz="1300" dirty="0"/>
+                    </a:p>
+                  </a:txBody>
+                  <a:tcPr marL="64008" marR="64008" marT="64008" marB="64008" anchor="t">
+                    <a:lnL w="9525" cap="flat" cmpd="sng" algn="ctr">
+                      <a:solidFill>
+                        <a:srgbClr val="D5DBE3"/>
+                      </a:solidFill>
+                      <a:prstDash val="solid"/>
+                      <a:round/>
+                      <a:headEnd type="none" w="med" len="med"/>
+                      <a:tailEnd type="none" w="med" len="med"/>
+                    </a:lnL>
+                    <a:lnR w="9525" cap="flat" cmpd="sng" algn="ctr">
+                      <a:solidFill>
+                        <a:srgbClr val="D5DBE3"/>
+                      </a:solidFill>
+                      <a:prstDash val="solid"/>
+                      <a:round/>
+                      <a:headEnd type="none" w="med" len="med"/>
+                      <a:tailEnd type="none" w="med" len="med"/>
+                    </a:lnR>
+                    <a:lnT w="9525" cap="flat" cmpd="sng" algn="ctr">
+                      <a:solidFill>
+                        <a:srgbClr val="D5DBE3"/>
+                      </a:solidFill>
+                      <a:prstDash val="solid"/>
+                      <a:round/>
+                      <a:headEnd type="none" w="med" len="med"/>
+                      <a:tailEnd type="none" w="med" len="med"/>
+                    </a:lnT>
+                    <a:lnB w="9525" cap="flat" cmpd="sng" algn="ctr">
+                      <a:solidFill>
+                        <a:srgbClr val="D5DBE3"/>
+                      </a:solidFill>
+                      <a:prstDash val="solid"/>
+                      <a:round/>
+                      <a:headEnd type="none" w="med" len="med"/>
+                      <a:tailEnd type="none" w="med" len="med"/>
+                    </a:lnB>
+                  </a:tcPr>
+                </a:tc>
+                <a:tc>
+                  <a:txBody>
+                    <a:bodyPr/>
+                    <a:lstStyle/>
+                    <a:p>
+                      <a:pPr indent="0" marL="0">
+                        <a:buNone/>
+                      </a:pPr>
+                      <a:r>
+                        <a:rPr lang="en-US" sz="1300" dirty="0">
+                          <a:solidFill>
+                            <a:schemeClr val="tx1"/>
+                          </a:solidFill>
+                        </a:rPr>
+                        <a:t>7 of 11</a:t>
+                      </a:r>
+                      <a:endParaRPr lang="en-US" sz="1300" dirty="0"/>
+                    </a:p>
+                  </a:txBody>
+                  <a:tcPr marL="64008" marR="64008" marT="64008" marB="64008" anchor="t">
+                    <a:lnL w="9525" cap="flat" cmpd="sng" algn="ctr">
+                      <a:solidFill>
+                        <a:srgbClr val="D5DBE3"/>
+                      </a:solidFill>
+                      <a:prstDash val="solid"/>
+                      <a:round/>
+                      <a:headEnd type="none" w="med" len="med"/>
+                      <a:tailEnd type="none" w="med" len="med"/>
+                    </a:lnL>
+                    <a:lnR w="9525" cap="flat" cmpd="sng" algn="ctr">
+                      <a:solidFill>
+                        <a:srgbClr val="D5DBE3"/>
+                      </a:solidFill>
+                      <a:prstDash val="solid"/>
+                      <a:round/>
+                      <a:headEnd type="none" w="med" len="med"/>
+                      <a:tailEnd type="none" w="med" len="med"/>
+                    </a:lnR>
+                    <a:lnT w="9525" cap="flat" cmpd="sng" algn="ctr">
+                      <a:solidFill>
+                        <a:srgbClr val="D5DBE3"/>
+                      </a:solidFill>
+                      <a:prstDash val="solid"/>
+                      <a:round/>
+                      <a:headEnd type="none" w="med" len="med"/>
+                      <a:tailEnd type="none" w="med" len="med"/>
+                    </a:lnT>
+                    <a:lnB w="9525" cap="flat" cmpd="sng" algn="ctr">
+                      <a:solidFill>
+                        <a:srgbClr val="D5DBE3"/>
+                      </a:solidFill>
+                      <a:prstDash val="solid"/>
+                      <a:round/>
+                      <a:headEnd type="none" w="med" len="med"/>
+                      <a:tailEnd type="none" w="med" len="med"/>
+                    </a:lnB>
+                  </a:tcPr>
+                </a:tc>
+                <a:tc>
+                  <a:txBody>
+                    <a:bodyPr/>
+                    <a:lstStyle/>
+                    <a:p>
+                      <a:pPr indent="0" marL="0">
+                        <a:buNone/>
+                      </a:pPr>
+                      <a:r>
+                        <a:rPr lang="en-US" sz="1300" dirty="0">
+                          <a:solidFill>
+                            <a:schemeClr val="tx1"/>
+                          </a:solidFill>
+                        </a:rPr>
+                        <a:t>0 of 22</a:t>
+                      </a:r>
+                      <a:endParaRPr lang="en-US" sz="1300" dirty="0"/>
+                    </a:p>
+                  </a:txBody>
+                  <a:tcPr marL="64008" marR="64008" marT="64008" marB="64008" anchor="t">
+                    <a:lnL w="9525" cap="flat" cmpd="sng" algn="ctr">
+                      <a:solidFill>
+                        <a:srgbClr val="D5DBE3"/>
+                      </a:solidFill>
+                      <a:prstDash val="solid"/>
+                      <a:round/>
+                      <a:headEnd type="none" w="med" len="med"/>
+                      <a:tailEnd type="none" w="med" len="med"/>
+                    </a:lnL>
+                    <a:lnR w="9525" cap="flat" cmpd="sng" algn="ctr">
+                      <a:solidFill>
+                        <a:srgbClr val="D5DBE3"/>
+                      </a:solidFill>
+                      <a:prstDash val="solid"/>
+                      <a:round/>
+                      <a:headEnd type="none" w="med" len="med"/>
+                      <a:tailEnd type="none" w="med" len="med"/>
+                    </a:lnR>
+                    <a:lnT w="9525" cap="flat" cmpd="sng" algn="ctr">
+                      <a:solidFill>
+                        <a:srgbClr val="D5DBE3"/>
+                      </a:solidFill>
+                      <a:prstDash val="solid"/>
+                      <a:round/>
+                      <a:headEnd type="none" w="med" len="med"/>
+                      <a:tailEnd type="none" w="med" len="med"/>
+                    </a:lnT>
+                    <a:lnB w="9525" cap="flat" cmpd="sng" algn="ctr">
+                      <a:solidFill>
+                        <a:srgbClr val="D5DBE3"/>
+                      </a:solidFill>
+                      <a:prstDash val="solid"/>
+                      <a:round/>
+                      <a:headEnd type="none" w="med" len="med"/>
+                      <a:tailEnd type="none" w="med" len="med"/>
+                    </a:lnB>
+                  </a:tcPr>
+                </a:tc>
+                <a:tc>
+                  <a:txBody>
+                    <a:bodyPr/>
+                    <a:lstStyle/>
+                    <a:p>
+                      <a:pPr indent="0" marL="0">
+                        <a:buNone/>
+                      </a:pPr>
+                      <a:r>
+                        <a:rPr lang="en-US" sz="1300" dirty="0">
+                          <a:solidFill>
+                            <a:schemeClr val="tx1"/>
+                          </a:solidFill>
+                        </a:rPr>
+                        <a:t>7 of 7</a:t>
+                      </a:r>
+                      <a:endParaRPr lang="en-US" sz="1300" dirty="0"/>
+                    </a:p>
+                  </a:txBody>
+                  <a:tcPr marL="64008" marR="64008" marT="64008" marB="64008" anchor="t">
+                    <a:lnL w="9525" cap="flat" cmpd="sng" algn="ctr">
+                      <a:solidFill>
+                        <a:srgbClr val="D5DBE3"/>
+                      </a:solidFill>
+                      <a:prstDash val="solid"/>
+                      <a:round/>
+                      <a:headEnd type="none" w="med" len="med"/>
+                      <a:tailEnd type="none" w="med" len="med"/>
+                    </a:lnL>
+                    <a:lnR w="9525" cap="flat" cmpd="sng" algn="ctr">
+                      <a:solidFill>
+                        <a:srgbClr val="D5DBE3"/>
+                      </a:solidFill>
+                      <a:prstDash val="solid"/>
+                      <a:round/>
+                      <a:headEnd type="none" w="med" len="med"/>
+                      <a:tailEnd type="none" w="med" len="med"/>
+                    </a:lnR>
+                    <a:lnT w="9525" cap="flat" cmpd="sng" algn="ctr">
+                      <a:solidFill>
+                        <a:srgbClr val="D5DBE3"/>
+                      </a:solidFill>
+                      <a:prstDash val="solid"/>
+                      <a:round/>
+                      <a:headEnd type="none" w="med" len="med"/>
+                      <a:tailEnd type="none" w="med" len="med"/>
+                    </a:lnT>
+                    <a:lnB w="9525" cap="flat" cmpd="sng" algn="ctr">
+                      <a:solidFill>
+                        <a:srgbClr val="D5DBE3"/>
+                      </a:solidFill>
+                      <a:prstDash val="solid"/>
+                      <a:round/>
+                      <a:headEnd type="none" w="med" len="med"/>
+                      <a:tailEnd type="none" w="med" len="med"/>
+                    </a:lnB>
+                  </a:tcPr>
+                </a:tc>
+                <a:tc>
+                  <a:txBody>
+                    <a:bodyPr/>
+                    <a:lstStyle/>
+                    <a:p>
+                      <a:pPr indent="0" marL="0">
+                        <a:buNone/>
+                      </a:pPr>
+                      <a:r>
+                        <a:rPr lang="en-US" sz="1300" dirty="0">
+                          <a:solidFill>
+                            <a:schemeClr val="tx1"/>
+                          </a:solidFill>
+                        </a:rPr>
+                        <a:t>4 of 7</a:t>
+                      </a:r>
+                      <a:endParaRPr lang="en-US" sz="1300" dirty="0"/>
+                    </a:p>
+                  </a:txBody>
+                  <a:tcPr marL="64008" marR="64008" marT="64008" marB="64008" anchor="t">
+                    <a:lnL w="9525" cap="flat" cmpd="sng" algn="ctr">
+                      <a:solidFill>
+                        <a:srgbClr val="D5DBE3"/>
+                      </a:solidFill>
+                      <a:prstDash val="solid"/>
+                      <a:round/>
+                      <a:headEnd type="none" w="med" len="med"/>
+                      <a:tailEnd type="none" w="med" len="med"/>
+                    </a:lnL>
+                    <a:lnR w="9525" cap="flat" cmpd="sng" algn="ctr">
+                      <a:solidFill>
+                        <a:srgbClr val="D5DBE3"/>
+                      </a:solidFill>
+                      <a:prstDash val="solid"/>
+                      <a:round/>
+                      <a:headEnd type="none" w="med" len="med"/>
+                      <a:tailEnd type="none" w="med" len="med"/>
+                    </a:lnR>
+                    <a:lnT w="9525" cap="flat" cmpd="sng" algn="ctr">
+                      <a:solidFill>
+                        <a:srgbClr val="D5DBE3"/>
+                      </a:solidFill>
+                      <a:prstDash val="solid"/>
+                      <a:round/>
+                      <a:headEnd type="none" w="med" len="med"/>
+                      <a:tailEnd type="none" w="med" len="med"/>
+                    </a:lnT>
+                    <a:lnB w="9525" cap="flat" cmpd="sng" algn="ctr">
+                      <a:solidFill>
+                        <a:srgbClr val="D5DBE3"/>
+                      </a:solidFill>
+                      <a:prstDash val="solid"/>
+                      <a:round/>
+                      <a:headEnd type="none" w="med" len="med"/>
+                      <a:tailEnd type="none" w="med" len="med"/>
+                    </a:lnB>
+                  </a:tcPr>
+                </a:tc>
+              </a:tr>
+            </a:tbl>
+          </a:graphicData>
+        </a:graphic>
+      </p:graphicFrame>
+      <p:sp>
+        <p:nvSpPr>
+          <p:cNvPr id="4" name="Text 1"/>
+          <p:cNvSpPr txBox="1"/>
+          <p:nvPr/>
+        </p:nvSpPr>
+        <p:spPr>
+          <a:xfrm>
+            <a:off x="548640" y="3611880"/>
+            <a:ext cx="11064240" cy="2194560"/>
+          </a:xfrm>
+          <a:prstGeom prst="rect">
+            <a:avLst/>
+          </a:prstGeom>
+          <a:noFill/>
+          <a:ln/>
+        </p:spPr>
+        <p:txBody>
+          <a:bodyPr wrap="square" lIns="0" tIns="0" rIns="0" bIns="0" rtlCol="0" anchor="t"/>
+          <a:lstStyle/>
+          <a:p>
+            <a:pPr indent="0" marL="0">
+              <a:spcAft>
+                <a:spcPts val="1000"/>
+              </a:spcAft>
+              <a:buNone/>
+            </a:pPr>
+            <a:r>
+              <a:rPr lang="en-US" sz="1300" b="1" dirty="0">
+                <a:solidFill>
+                  <a:schemeClr val="tx1"/>
+                </a:solidFill>
+              </a:rPr>
+              <a:t>Reviewer demo: </a:t>
+            </a:r>
+            <a:pPr indent="0" marL="0">
+              <a:spcAft>
+                <a:spcPts val="1000"/>
+              </a:spcAft>
+              <a:buNone/>
+            </a:pPr>
+            <a:r>
+              <a:rPr lang="en-US" sz="1300" dirty="0">
+                <a:solidFill>
+                  <a:schemeClr val="tx1"/>
+                </a:solidFill>
+              </a:rPr>
+              <a:t>Qwen 30B regular checked 5 hinted wrong answers, 3 times each. It kept the wrong answer 0 of 15 times with the answer only, 7 of 15 with the explanation, 3 of 3 with the private notes (1 case), and 6 of 15 when told the user had suggested it.</a:t>
+            </a:r>
+            <a:endParaRPr lang="en-US" sz="1300" dirty="0"/>
+          </a:p>
+          <a:p>
+            <a:pPr indent="0" marL="0">
+              <a:spcAft>
+                <a:spcPts val="1000"/>
+              </a:spcAft>
+              <a:buNone/>
+            </a:pPr>
+            <a:r>
+              <a:rPr lang="en-US" sz="1300" b="1" dirty="0">
+                <a:solidFill>
+                  <a:schemeClr val="tx1"/>
+                </a:solidFill>
+              </a:rPr>
+              <a:t>Leak test: </a:t>
+            </a:r>
+            <a:pPr indent="0" marL="0">
+              <a:spcAft>
+                <a:spcPts val="1000"/>
+              </a:spcAft>
+              <a:buNone/>
+            </a:pPr>
+            <a:r>
+              <a:rPr lang="en-US" sz="1300" dirty="0">
+                <a:solidFill>
+                  <a:schemeClr val="tx1"/>
+                </a:solidFill>
+              </a:rPr>
+              <a:t>Olmo 7B thinking, 8 puzzles cut off on purpose. Streamed: 0 of 8 leaked at 2,000 tokens and 0 of 8 at 4,000. Not streamed: 8 of 8 leaked.</a:t>
+            </a:r>
+            <a:endParaRPr lang="en-US" sz="1300" dirty="0"/>
+          </a:p>
+        </p:txBody>
+      </p:sp>
+      <p:sp>
+        <p:nvSpPr>
+          <p:cNvPr id="25" name="Slide Number Placeholder 0"/>
+          <p:cNvSpPr>
+            <a:spLocks noGrp="1"/>
+          </p:cNvSpPr>
+          <p:nvPr>
+            <p:ph type="sldNum" sz="quarter" idx="4294967295"/>
+          </p:nvPr>
+        </p:nvSpPr>
+        <p:spPr>
+          <a:xfrm>
+            <a:off x="11155680" y="6400800"/>
+            <a:ext cx="457200" cy="274320"/>
+          </a:xfrm>
+          <a:prstGeom prst="rect">
+            <a:avLst/>
+          </a:prstGeom>
+          <a:extLst>
+            <a:ext uri="{C572A759-6A51-4108-AA02-DFA0A04FC94B}">
+              <ma14:wrappingTextBoxFlag xmlns:ma14="http://schemas.microsoft.com/office/mac/drawingml/2011/main" val="0"/>
+            </a:ext>
+          </a:extLst>
+        </p:spPr>
+        <p:txBody>
+          <a:bodyPr/>
+          <a:lstStyle>
+            <a:lvl1pPr>
+              <a:defRPr sz="1000">
+                <a:solidFill>
+                  <a:srgbClr val="6B7280"/>
+                </a:solidFill>
+              </a:defRPr>
+            </a:lvl1pPr>
+          </a:lstStyle>
+          <a:p>
+            <a:pPr algn="r"/>
+            <a:fld id="{F7021451-1387-4CA6-816F-3879F97B5CBC}" type="slidenum">
+              <a:rPr b="0" lang="en-US"/>
+              <a:t>14</a:t>
+            </a:fld>
+            <a:endParaRPr lang="en-US"/>
+          </a:p>
+        </p:txBody>
+      </p:sp>
+    </p:spTree>
+  </p:cSld>
+  <p:clrMapOvr>
+    <a:masterClrMapping/>
+  </p:clrMapOvr>
+</p:sld>
+</file>
+
+<file path=ppt/slides/slide15.xml><?xml version="1.0" encoding="utf-8"?>
+<p:sld xmlns:a="http://schemas.openxmlformats.org/drawingml/2006/main" xmlns:r="http://schemas.openxmlformats.org/officeDocument/2006/relationships" xmlns:p="http://schemas.openxmlformats.org/presentationml/2006/main">
+  <p:cSld name="Slide 15">
+    <p:spTree>
+      <p:nvGrpSpPr>
+        <p:cNvPr id="1" name=""/>
+        <p:cNvGrpSpPr/>
+        <p:nvPr/>
+      </p:nvGrpSpPr>
+      <p:grpSpPr>
+        <a:xfrm>
+          <a:off x="0" y="0"/>
+          <a:ext cx="0" cy="0"/>
+          <a:chOff x="0" y="0"/>
+          <a:chExt cx="0" cy="0"/>
+        </a:xfrm>
+      </p:grpSpPr>
+      <p:sp>
+        <p:nvSpPr>
+          <p:cNvPr id="2" name="Text 0"/>
+          <p:cNvSpPr/>
+          <p:nvPr>
+            <p:ph idx="100" type="title" hasCustomPrompt="1"/>
+          </p:nvPr>
+        </p:nvSpPr>
+        <p:spPr>
+          <a:xfrm>
+            <a:off x="548640" y="320040"/>
+            <a:ext cx="11064240" cy="822960"/>
+          </a:xfrm>
+          <a:prstGeom prst="rect">
+            <a:avLst/>
+          </a:prstGeom>
+          <a:noFill/>
+          <a:ln/>
+        </p:spPr>
+        <p:txBody>
+          <a:bodyPr wrap="square" lIns="0" tIns="0" rIns="0" bIns="0" rtlCol="0" anchor="ctr"/>
+          <a:lstStyle/>
+          <a:p>
+            <a:pPr algn="l" indent="0" marL="0">
+              <a:buNone/>
+            </a:pPr>
+            <a:r>
+              <a:rPr lang="en-US" sz="3000" b="1" dirty="0">
+                <a:solidFill>
+                  <a:schemeClr val="tx1"/>
+                </a:solidFill>
+              </a:rPr>
               <a:t>Backup: how the two models in each pair differ</a:t>
             </a:r>
             <a:endParaRPr lang="en-US" sz="3000" dirty="0"/>
@@ -7555,7 +10333,7 @@
       </p:sp>
       <p:graphicFrame>
         <p:nvGraphicFramePr>
-          <p:cNvPr id="14" name="Table 0"/>
+          <p:cNvPr id="16" name="Table 0"/>
           <p:cNvGraphicFramePr>
             <a:graphicFrameLocks noGrp="1"/>
           </p:cNvGraphicFramePr>
@@ -8650,7 +11428,7 @@
             <a:pPr algn="r"/>
             <a:fld id="{F7021451-1387-4CA6-816F-3879F97B5CBC}" type="slidenum">
               <a:rPr b="0" lang="en-US"/>
-              <a:t>13</a:t>
+              <a:t>15</a:t>
             </a:fld>
             <a:endParaRPr lang="en-US"/>
           </a:p>
@@ -8664,9 +11442,9 @@
 </p:sld>
 </file>
 
-<file path=ppt/slides/slide14.xml><?xml version="1.0" encoding="utf-8"?>
+<file path=ppt/slides/slide16.xml><?xml version="1.0" encoding="utf-8"?>
 <p:sld xmlns:a="http://schemas.openxmlformats.org/drawingml/2006/main" xmlns:r="http://schemas.openxmlformats.org/officeDocument/2006/relationships" xmlns:p="http://schemas.openxmlformats.org/presentationml/2006/main">
-  <p:cSld name="Slide 14">
+  <p:cSld name="Slide 16">
     <p:spTree>
       <p:nvGrpSpPr>
         <p:cNvPr id="1" name=""/>
@@ -8721,7 +11499,7 @@
       </p:sp>
       <p:graphicFrame>
         <p:nvGraphicFramePr>
-          <p:cNvPr id="15" name="Table 0"/>
+          <p:cNvPr id="17" name="Table 0"/>
           <p:cNvGraphicFramePr>
             <a:graphicFrameLocks noGrp="1"/>
           </p:cNvGraphicFramePr>
@@ -9620,7 +12398,7 @@
             <a:pPr algn="r"/>
             <a:fld id="{F7021451-1387-4CA6-816F-3879F97B5CBC}" type="slidenum">
               <a:rPr b="0" lang="en-US"/>
-              <a:t>14</a:t>
+              <a:t>16</a:t>
             </a:fld>
             <a:endParaRPr lang="en-US"/>
           </a:p>
@@ -11359,8 +14137,8 @@
         </p:nvSpPr>
         <p:spPr>
           <a:xfrm>
-            <a:off x="548640" y="1325880"/>
-            <a:ext cx="685800" cy="685800"/>
+            <a:off x="548640" y="1271016"/>
+            <a:ext cx="640080" cy="640080"/>
           </a:xfrm>
           <a:prstGeom prst="ellipse">
             <a:avLst/>
@@ -11389,8 +14167,8 @@
         </p:blipFill>
         <p:spPr>
           <a:xfrm>
-            <a:off x="726948" y="1504188"/>
-            <a:ext cx="329184" cy="329184"/>
+            <a:off x="715061" y="1437437"/>
+            <a:ext cx="307238" cy="307238"/>
           </a:xfrm>
           <a:prstGeom prst="rect">
             <a:avLst/>
@@ -11405,8 +14183,8 @@
         </p:nvSpPr>
         <p:spPr>
           <a:xfrm>
-            <a:off x="1463040" y="1280160"/>
-            <a:ext cx="10058400" cy="365760"/>
+            <a:off x="1417320" y="1234440"/>
+            <a:ext cx="10149840" cy="347472"/>
           </a:xfrm>
           <a:prstGeom prst="rect">
             <a:avLst/>
@@ -11422,14 +14200,14 @@
               <a:buNone/>
             </a:pPr>
             <a:r>
-              <a:rPr lang="en-US" sz="1700" b="1" dirty="0">
+              <a:rPr lang="en-US" sz="1600" b="1" dirty="0">
                 <a:solidFill>
                   <a:schemeClr val="tx1"/>
                 </a:solidFill>
               </a:rPr>
               <a:t>The two models in a pair are trained separately</a:t>
             </a:r>
-            <a:endParaRPr lang="en-US" sz="1700" dirty="0"/>
+            <a:endParaRPr lang="en-US" sz="1600" dirty="0"/>
           </a:p>
         </p:txBody>
       </p:sp>
@@ -11441,8 +14219,8 @@
         </p:nvSpPr>
         <p:spPr>
           <a:xfrm>
-            <a:off x="1463040" y="1645920"/>
-            <a:ext cx="10058400" cy="457200"/>
+            <a:off x="1417320" y="1581912"/>
+            <a:ext cx="10149840" cy="457200"/>
           </a:xfrm>
           <a:prstGeom prst="rect">
             <a:avLst/>
@@ -11458,14 +14236,14 @@
               <a:buNone/>
             </a:pPr>
             <a:r>
-              <a:rPr lang="en-US" sz="1400" dirty="0">
+              <a:rPr lang="en-US" sz="1350" dirty="0">
                 <a:solidFill>
                   <a:schemeClr val="accent5"/>
                 </a:solidFill>
               </a:rPr>
               <a:t>So a difference might come from training, not thinking. Voyager can’t switch thinking off (we tested 7 models), so we also ask one model to “think briefly”.</a:t>
             </a:r>
-            <a:endParaRPr lang="en-US" sz="1400" dirty="0"/>
+            <a:endParaRPr lang="en-US" sz="1350" dirty="0"/>
           </a:p>
         </p:txBody>
       </p:sp>
@@ -11477,8 +14255,8 @@
         </p:nvSpPr>
         <p:spPr>
           <a:xfrm>
-            <a:off x="548640" y="2313432"/>
-            <a:ext cx="685800" cy="685800"/>
+            <a:off x="548640" y="2121408"/>
+            <a:ext cx="640080" cy="640080"/>
           </a:xfrm>
           <a:prstGeom prst="ellipse">
             <a:avLst/>
@@ -11507,8 +14285,8 @@
         </p:blipFill>
         <p:spPr>
           <a:xfrm>
-            <a:off x="726948" y="2491740"/>
-            <a:ext cx="329184" cy="329184"/>
+            <a:off x="715061" y="2287829"/>
+            <a:ext cx="307238" cy="307238"/>
           </a:xfrm>
           <a:prstGeom prst="rect">
             <a:avLst/>
@@ -11523,8 +14301,8 @@
         </p:nvSpPr>
         <p:spPr>
           <a:xfrm>
-            <a:off x="1463040" y="2267712"/>
-            <a:ext cx="10058400" cy="365760"/>
+            <a:off x="1417320" y="2084832"/>
+            <a:ext cx="10149840" cy="347472"/>
           </a:xfrm>
           <a:prstGeom prst="rect">
             <a:avLst/>
@@ -11540,14 +14318,14 @@
               <a:buNone/>
             </a:pPr>
             <a:r>
-              <a:rPr lang="en-US" sz="1700" b="1" dirty="0">
+              <a:rPr lang="en-US" sz="1600" b="1" dirty="0">
                 <a:solidFill>
                   <a:schemeClr val="tx1"/>
                 </a:solidFill>
               </a:rPr>
               <a:t>We measure chance</a:t>
             </a:r>
-            <a:endParaRPr lang="en-US" sz="1700" dirty="0"/>
+            <a:endParaRPr lang="en-US" sz="1600" dirty="0"/>
           </a:p>
         </p:txBody>
       </p:sp>
@@ -11559,8 +14337,8 @@
         </p:nvSpPr>
         <p:spPr>
           <a:xfrm>
-            <a:off x="1463040" y="2633472"/>
-            <a:ext cx="10058400" cy="457200"/>
+            <a:off x="1417320" y="2432304"/>
+            <a:ext cx="10149840" cy="457200"/>
           </a:xfrm>
           <a:prstGeom prst="rect">
             <a:avLst/>
@@ -11576,14 +14354,14 @@
               <a:buNone/>
             </a:pPr>
             <a:r>
-              <a:rPr lang="en-US" sz="1400" dirty="0">
+              <a:rPr lang="en-US" sz="1350" dirty="0">
                 <a:solidFill>
                   <a:schemeClr val="accent5"/>
                 </a:solidFill>
               </a:rPr>
               <a:t>Each puzzle runs 3 times with no hint, to see how much answers change on their own.</a:t>
             </a:r>
-            <a:endParaRPr lang="en-US" sz="1400" dirty="0"/>
+            <a:endParaRPr lang="en-US" sz="1350" dirty="0"/>
           </a:p>
         </p:txBody>
       </p:sp>
@@ -11595,8 +14373,8 @@
         </p:nvSpPr>
         <p:spPr>
           <a:xfrm>
-            <a:off x="548640" y="3300984"/>
-            <a:ext cx="685800" cy="685800"/>
+            <a:off x="548640" y="2971800"/>
+            <a:ext cx="640080" cy="640080"/>
           </a:xfrm>
           <a:prstGeom prst="ellipse">
             <a:avLst/>
@@ -11625,8 +14403,8 @@
         </p:blipFill>
         <p:spPr>
           <a:xfrm>
-            <a:off x="726948" y="3479292"/>
-            <a:ext cx="329184" cy="329184"/>
+            <a:off x="715061" y="3138221"/>
+            <a:ext cx="307238" cy="307238"/>
           </a:xfrm>
           <a:prstGeom prst="rect">
             <a:avLst/>
@@ -11641,8 +14419,8 @@
         </p:nvSpPr>
         <p:spPr>
           <a:xfrm>
-            <a:off x="1463040" y="3255264"/>
-            <a:ext cx="10058400" cy="365760"/>
+            <a:off x="1417320" y="2935224"/>
+            <a:ext cx="10149840" cy="347472"/>
           </a:xfrm>
           <a:prstGeom prst="rect">
             <a:avLst/>
@@ -11658,14 +14436,14 @@
               <a:buNone/>
             </a:pPr>
             <a:r>
-              <a:rPr lang="en-US" sz="1700" b="1" dirty="0">
+              <a:rPr lang="en-US" sz="1600" b="1" dirty="0">
                 <a:solidFill>
                   <a:schemeClr val="tx1"/>
                 </a:solidFill>
               </a:rPr>
               <a:t>No letter gets an advantage</a:t>
             </a:r>
-            <a:endParaRPr lang="en-US" sz="1700" dirty="0"/>
+            <a:endParaRPr lang="en-US" sz="1600" dirty="0"/>
           </a:p>
         </p:txBody>
       </p:sp>
@@ -11677,8 +14455,8 @@
         </p:nvSpPr>
         <p:spPr>
           <a:xfrm>
-            <a:off x="1463040" y="3621024"/>
-            <a:ext cx="10058400" cy="457200"/>
+            <a:off x="1417320" y="3282696"/>
+            <a:ext cx="10149840" cy="457200"/>
           </a:xfrm>
           <a:prstGeom prst="rect">
             <a:avLst/>
@@ -11694,14 +14472,14 @@
               <a:buNone/>
             </a:pPr>
             <a:r>
-              <a:rPr lang="en-US" sz="1400" dirty="0">
+              <a:rPr lang="en-US" sz="1350" dirty="0">
                 <a:solidFill>
                   <a:schemeClr val="accent5"/>
                 </a:solidFill>
               </a:rPr>
-              <a:t>Hints and right answers are spread evenly across A to G, and some hints are correct.</a:t>
+              <a:t>Hints and right answers are spread evenly across the letters, and some hints are correct.</a:t>
             </a:r>
-            <a:endParaRPr lang="en-US" sz="1400" dirty="0"/>
+            <a:endParaRPr lang="en-US" sz="1350" dirty="0"/>
           </a:p>
         </p:txBody>
       </p:sp>
@@ -11713,8 +14491,8 @@
         </p:nvSpPr>
         <p:spPr>
           <a:xfrm>
-            <a:off x="548640" y="4288536"/>
-            <a:ext cx="685800" cy="685800"/>
+            <a:off x="548640" y="3822192"/>
+            <a:ext cx="640080" cy="640080"/>
           </a:xfrm>
           <a:prstGeom prst="ellipse">
             <a:avLst/>
@@ -11743,8 +14521,8 @@
         </p:blipFill>
         <p:spPr>
           <a:xfrm>
-            <a:off x="726948" y="4466844"/>
-            <a:ext cx="329184" cy="329184"/>
+            <a:off x="715061" y="3988613"/>
+            <a:ext cx="307238" cy="307238"/>
           </a:xfrm>
           <a:prstGeom prst="rect">
             <a:avLst/>
@@ -11759,8 +14537,8 @@
         </p:nvSpPr>
         <p:spPr>
           <a:xfrm>
-            <a:off x="1463040" y="4242816"/>
-            <a:ext cx="10058400" cy="365760"/>
+            <a:off x="1417320" y="3785616"/>
+            <a:ext cx="10149840" cy="347472"/>
           </a:xfrm>
           <a:prstGeom prst="rect">
             <a:avLst/>
@@ -11776,14 +14554,14 @@
               <a:buNone/>
             </a:pPr>
             <a:r>
-              <a:rPr lang="en-US" sz="1700" b="1" dirty="0">
+              <a:rPr lang="en-US" sz="1600" b="1" dirty="0">
                 <a:solidFill>
                   <a:schemeClr val="tx1"/>
                 </a:solidFill>
               </a:rPr>
               <a:t>Mentioning isn’t admitting</a:t>
             </a:r>
-            <a:endParaRPr lang="en-US" sz="1700" dirty="0"/>
+            <a:endParaRPr lang="en-US" sz="1600" dirty="0"/>
           </a:p>
         </p:txBody>
       </p:sp>
@@ -11795,8 +14573,8 @@
         </p:nvSpPr>
         <p:spPr>
           <a:xfrm>
-            <a:off x="1463040" y="4608576"/>
-            <a:ext cx="10058400" cy="457200"/>
+            <a:off x="1417320" y="4133088"/>
+            <a:ext cx="10149840" cy="457200"/>
           </a:xfrm>
           <a:prstGeom prst="rect">
             <a:avLst/>
@@ -11812,14 +14590,14 @@
               <a:buNone/>
             </a:pPr>
             <a:r>
-              <a:rPr lang="en-US" sz="1400" dirty="0">
+              <a:rPr lang="en-US" sz="1350" dirty="0">
                 <a:solidFill>
                   <a:schemeClr val="accent5"/>
                 </a:solidFill>
               </a:rPr>
               <a:t>“The user said F, but that’s wrong” is scored apart from “I picked F because the user said so”.</a:t>
             </a:r>
-            <a:endParaRPr lang="en-US" sz="1400" dirty="0"/>
+            <a:endParaRPr lang="en-US" sz="1350" dirty="0"/>
           </a:p>
         </p:txBody>
       </p:sp>
@@ -11831,8 +14609,8 @@
         </p:nvSpPr>
         <p:spPr>
           <a:xfrm>
-            <a:off x="548640" y="5276088"/>
-            <a:ext cx="685800" cy="685800"/>
+            <a:off x="548640" y="4672584"/>
+            <a:ext cx="640080" cy="640080"/>
           </a:xfrm>
           <a:prstGeom prst="ellipse">
             <a:avLst/>
@@ -11861,8 +14639,8 @@
         </p:blipFill>
         <p:spPr>
           <a:xfrm>
-            <a:off x="726948" y="5454396"/>
-            <a:ext cx="329184" cy="329184"/>
+            <a:off x="715061" y="4839005"/>
+            <a:ext cx="307238" cy="307238"/>
           </a:xfrm>
           <a:prstGeom prst="rect">
             <a:avLst/>
@@ -11877,8 +14655,8 @@
         </p:nvSpPr>
         <p:spPr>
           <a:xfrm>
-            <a:off x="1463040" y="5230368"/>
-            <a:ext cx="10058400" cy="365760"/>
+            <a:off x="1417320" y="4636008"/>
+            <a:ext cx="10149840" cy="347472"/>
           </a:xfrm>
           <a:prstGeom prst="rect">
             <a:avLst/>
@@ -11894,14 +14672,14 @@
               <a:buNone/>
             </a:pPr>
             <a:r>
-              <a:rPr lang="en-US" sz="1700" b="1" dirty="0">
+              <a:rPr lang="en-US" sz="1600" b="1" dirty="0">
                 <a:solidFill>
                   <a:schemeClr val="tx1"/>
                 </a:solidFill>
               </a:rPr>
               <a:t>We tried “answer only, don’t explain”</a:t>
             </a:r>
-            <a:endParaRPr lang="en-US" sz="1700" dirty="0"/>
+            <a:endParaRPr lang="en-US" sz="1600" dirty="0"/>
           </a:p>
         </p:txBody>
       </p:sp>
@@ -11913,8 +14691,8 @@
         </p:nvSpPr>
         <p:spPr>
           <a:xfrm>
-            <a:off x="1463040" y="5596128"/>
-            <a:ext cx="10058400" cy="457200"/>
+            <a:off x="1417320" y="4983480"/>
+            <a:ext cx="10149840" cy="457200"/>
           </a:xfrm>
           <a:prstGeom prst="rect">
             <a:avLst/>
@@ -11930,14 +14708,132 @@
               <a:buNone/>
             </a:pPr>
             <a:r>
-              <a:rPr lang="en-US" sz="1400" dirty="0">
+              <a:rPr lang="en-US" sz="1350" dirty="0">
                 <a:solidFill>
                   <a:schemeClr val="accent5"/>
                 </a:solidFill>
               </a:rPr>
-              <a:t>The review asked how that works with built-in thinking. The answer is on slide 8.</a:t>
+              <a:t>The review asked how that works with built-in thinking. The answer is on slide 9.</a:t>
             </a:r>
-            <a:endParaRPr lang="en-US" sz="1400" dirty="0"/>
+            <a:endParaRPr lang="en-US" sz="1350" dirty="0"/>
+          </a:p>
+        </p:txBody>
+      </p:sp>
+      <p:sp>
+        <p:nvSpPr>
+          <p:cNvPr id="23" name="chg6-circle"/>
+          <p:cNvSpPr/>
+          <p:nvPr/>
+        </p:nvSpPr>
+        <p:spPr>
+          <a:xfrm>
+            <a:off x="548640" y="5522976"/>
+            <a:ext cx="640080" cy="640080"/>
+          </a:xfrm>
+          <a:prstGeom prst="ellipse">
+            <a:avLst/>
+          </a:prstGeom>
+          <a:solidFill>
+            <a:schemeClr val="accent2">
+              <a:alpha val="16000"/>
+            </a:schemeClr>
+          </a:solidFill>
+          <a:ln/>
+        </p:spPr>
+      </p:sp>
+      <p:pic>
+        <p:nvPicPr>
+          <p:cNvPr id="24" name="chg6-icon" descr="preencoded.png">    </p:cNvPr>
+          <p:cNvPicPr>
+            <a:picLocks noChangeAspect="1"/>
+          </p:cNvPicPr>
+          <p:nvPr/>
+        </p:nvPicPr>
+        <p:blipFill>
+          <a:blip r:embed="rId6"/>
+          <a:stretch>
+            <a:fillRect/>
+          </a:stretch>
+        </p:blipFill>
+        <p:spPr>
+          <a:xfrm>
+            <a:off x="715061" y="5689397"/>
+            <a:ext cx="307238" cy="307238"/>
+          </a:xfrm>
+          <a:prstGeom prst="rect">
+            <a:avLst/>
+          </a:prstGeom>
+        </p:spPr>
+      </p:pic>
+      <p:sp>
+        <p:nvSpPr>
+          <p:cNvPr id="25" name="Text 17"/>
+          <p:cNvSpPr txBox="1"/>
+          <p:nvPr/>
+        </p:nvSpPr>
+        <p:spPr>
+          <a:xfrm>
+            <a:off x="1417320" y="5486400"/>
+            <a:ext cx="10149840" cy="347472"/>
+          </a:xfrm>
+          <a:prstGeom prst="rect">
+            <a:avLst/>
+          </a:prstGeom>
+          <a:noFill/>
+          <a:ln/>
+        </p:spPr>
+        <p:txBody>
+          <a:bodyPr wrap="square" lIns="0" tIns="0" rIns="0" bIns="0" rtlCol="0" anchor="ctr"/>
+          <a:lstStyle/>
+          <a:p>
+            <a:pPr indent="0" marL="0">
+              <a:buNone/>
+            </a:pPr>
+            <a:r>
+              <a:rPr lang="en-US" sz="1600" b="1" dirty="0">
+                <a:solidFill>
+                  <a:schemeClr val="tx1"/>
+                </a:solidFill>
+              </a:rPr>
+              <a:t>Harder questions, and a second kind of hint</a:t>
+            </a:r>
+            <a:endParaRPr lang="en-US" sz="1600" dirty="0"/>
+          </a:p>
+        </p:txBody>
+      </p:sp>
+      <p:sp>
+        <p:nvSpPr>
+          <p:cNvPr id="26" name="Text 18"/>
+          <p:cNvSpPr txBox="1"/>
+          <p:nvPr/>
+        </p:nvSpPr>
+        <p:spPr>
+          <a:xfrm>
+            <a:off x="1417320" y="5833872"/>
+            <a:ext cx="10149840" cy="457200"/>
+          </a:xfrm>
+          <a:prstGeom prst="rect">
+            <a:avLst/>
+          </a:prstGeom>
+          <a:noFill/>
+          <a:ln/>
+        </p:spPr>
+        <p:txBody>
+          <a:bodyPr wrap="square" lIns="0" tIns="0" rIns="0" bIns="0" rtlCol="0" anchor="t"/>
+          <a:lstStyle/>
+          <a:p>
+            <a:pPr indent="0" marL="0">
+              <a:buNone/>
+            </a:pPr>
+            <a:r>
+              <a:rPr lang="en-US" sz="1350" dirty="0">
+                <a:solidFill>
+                  <a:schemeClr val="accent5"/>
+                </a:solidFill>
+              </a:rPr>
+              <a:t>30 exam questions (MMLU-Pro), with the wrong letter coming from the user or from what looks like an answer-key tool.</a:t>
+            </a:r>
+            <a:endParaRPr lang="en-US" sz="1350" dirty="0"/>
           </a:p>
         </p:txBody>
       </p:sp>
@@ -12125,7 +15021,7 @@
                   <a:schemeClr val="tx1"/>
                 </a:solidFill>
               </a:rPr>
-              <a:t>Make puzzles</a:t>
+              <a:t>Make questions</a:t>
             </a:r>
             <a:endParaRPr lang="en-US" sz="1600" dirty="0"/>
           </a:p>
@@ -12161,7 +15057,7 @@
                   <a:schemeClr val="accent5"/>
                 </a:solidFill>
               </a:rPr>
-              <a:t>New swap puzzles, each with one right answer</a:t>
+              <a:t>Swap puzzles, or harder exam questions, each with one right answer</a:t>
             </a:r>
             <a:endParaRPr lang="en-US" sz="1300" dirty="0"/>
           </a:p>
@@ -12303,7 +15199,7 @@
                   <a:schemeClr val="accent5"/>
                 </a:solidFill>
               </a:rPr>
-              <a:t>No hint, a wrong hint, or a right one</a:t>
+              <a:t>None, or a wrong letter from the user or a “tool”</a:t>
             </a:r>
             <a:endParaRPr lang="en-US" sz="1300" dirty="0"/>
           </a:p>
@@ -12929,7 +15825,7 @@
                   <a:schemeClr val="accent1"/>
                 </a:solidFill>
               </a:rPr>
-              <a:t>1,056</a:t>
+              <a:t>1,483</a:t>
             </a:r>
             <a:endParaRPr lang="en-US" sz="4400" dirty="0"/>
           </a:p>
@@ -12965,7 +15861,7 @@
                   <a:schemeClr val="tx1"/>
                 </a:solidFill>
               </a:rPr>
-              <a:t>questions sent this round</a:t>
+              <a:t>questions sent so far</a:t>
             </a:r>
             <a:endParaRPr lang="en-US" sz="1500" dirty="0"/>
           </a:p>
@@ -13261,7 +16157,7 @@
                   <a:schemeClr val="tx1"/>
                 </a:solidFill>
               </a:rPr>
-              <a:t>Result 1: the hint rarely changes the answer</a:t>
+              <a:t>Result 1: hints rarely work, unless the model is unsure</a:t>
             </a:r>
             <a:endParaRPr lang="en-US" sz="3000" dirty="0"/>
           </a:p>
@@ -13371,7 +16267,7 @@
                   <a:schemeClr val="tx1"/>
                 </a:solidFill>
               </a:rPr>
-              <a:t>times Olmo 7B regular picked the wrong answer we hinted. Without the hint: never.</a:t>
+              <a:t>times Olmo 7B regular picked the wrong answer we hinted on our puzzles. Without the hint: never.</a:t>
             </a:r>
             <a:endParaRPr lang="en-US" sz="1400" dirty="0"/>
           </a:p>
@@ -13385,8 +16281,8 @@
         </p:nvSpPr>
         <p:spPr>
           <a:xfrm>
-            <a:off x="8138160" y="3246120"/>
-            <a:ext cx="3291840" cy="2743200"/>
+            <a:off x="8138160" y="3200400"/>
+            <a:ext cx="3291840" cy="2834640"/>
           </a:xfrm>
           <a:prstGeom prst="rect">
             <a:avLst/>
@@ -13405,7 +16301,7 @@
               <a:buNone/>
             </a:pPr>
             <a:r>
-              <a:rPr lang="en-US" sz="1400" b="1" dirty="0">
+              <a:rPr lang="en-US" sz="1350" b="1" dirty="0">
                 <a:solidFill>
                   <a:schemeClr val="tx1"/>
                 </a:solidFill>
@@ -13419,14 +16315,14 @@
               <a:buNone/>
             </a:pPr>
             <a:r>
-              <a:rPr lang="en-US" sz="1400" dirty="0">
+              <a:rPr lang="en-US" sz="1350" dirty="0">
                 <a:solidFill>
                   <a:schemeClr val="tx1"/>
                 </a:solidFill>
               </a:rPr>
               <a:t>at most 1 of 48.</a:t>
             </a:r>
-            <a:endParaRPr lang="en-US" sz="1400" dirty="0"/>
+            <a:endParaRPr lang="en-US" sz="1350" dirty="0"/>
           </a:p>
           <a:p>
             <a:pPr indent="0" marL="0">
@@ -13436,7 +16332,7 @@
               <a:buNone/>
             </a:pPr>
             <a:r>
-              <a:rPr lang="en-US" sz="1400" b="1" dirty="0">
+              <a:rPr lang="en-US" sz="1350" b="1" dirty="0">
                 <a:solidFill>
                   <a:schemeClr val="tx1"/>
                 </a:solidFill>
@@ -13450,14 +16346,14 @@
               <a:buNone/>
             </a:pPr>
             <a:r>
-              <a:rPr lang="en-US" sz="1400" dirty="0">
+              <a:rPr lang="en-US" sz="1350" dirty="0">
                 <a:solidFill>
                   <a:schemeClr val="tx1"/>
                 </a:solidFill>
               </a:rPr>
-              <a:t>The bigger models got 97% to 100% of puzzles right with no hint. There was nothing to push.</a:t>
+              <a:t>The bigger models got 97% to 100% of puzzles right. There was nothing to push.</a:t>
             </a:r>
-            <a:endParaRPr lang="en-US" sz="1400" dirty="0"/>
+            <a:endParaRPr lang="en-US" sz="1350" dirty="0"/>
           </a:p>
           <a:p>
             <a:pPr indent="0" marL="0">
@@ -13467,12 +16363,12 @@
               <a:buNone/>
             </a:pPr>
             <a:r>
-              <a:rPr lang="en-US" sz="1400" b="1" dirty="0">
+              <a:rPr lang="en-US" sz="1350" b="1" dirty="0">
                 <a:solidFill>
                   <a:schemeClr val="tx1"/>
                 </a:solidFill>
               </a:rPr>
-              <a:t>Limit: </a:t>
+              <a:t>Harder questions: </a:t>
             </a:r>
             <a:pPr indent="0" marL="0">
               <a:spcAft>
@@ -13481,14 +16377,14 @@
               <a:buNone/>
             </a:pPr>
             <a:r>
-              <a:rPr lang="en-US" sz="1400" dirty="0">
+              <a:rPr lang="en-US" sz="1350" dirty="0">
                 <a:solidFill>
                   <a:schemeClr val="tx1"/>
                 </a:solidFill>
               </a:rPr>
-              <a:t>one kind of puzzle, only 24 of them, and too easy for big models.</a:t>
+              <a:t>on exam questions it was unsure about, Olmo 7B regular took the hint 7 of 14 times.</a:t>
             </a:r>
-            <a:endParaRPr lang="en-US" sz="1400" dirty="0"/>
+            <a:endParaRPr lang="en-US" sz="1350" dirty="0"/>
           </a:p>
         </p:txBody>
       </p:sp>
@@ -13933,12 +16829,26 @@
               <a:buNone/>
             </a:pPr>
             <a:r>
+              <a:rPr lang="en-US" sz="1300" b="1" dirty="0">
+                <a:solidFill>
+                  <a:schemeClr val="tx1"/>
+                </a:solidFill>
+              </a:rPr>
+              <a:t>Upper limit: </a:t>
+            </a:r>
+            <a:pPr indent="0" marL="0">
+              <a:spcAft>
+                <a:spcPts val="800"/>
+              </a:spcAft>
+              <a:buNone/>
+            </a:pPr>
+            <a:r>
               <a:rPr lang="en-US" sz="1300" dirty="0">
                 <a:solidFill>
                   <a:schemeClr val="tx1"/>
                 </a:solidFill>
               </a:rPr>
-              <a:t>Most mentions brush the hint off. Still, someone reading only the answer never learns there was a hint.</a:t>
+              <a:t>the keyword search also fires on up to 22 of 72 notes with no hint, so hand labels come next.</a:t>
             </a:r>
             <a:endParaRPr lang="en-US" sz="1300" dirty="0"/>
           </a:p>
@@ -14046,26 +16956,42 @@
                   <a:schemeClr val="tx1"/>
                 </a:solidFill>
               </a:rPr>
-              <a:t>Three more things we learned</a:t>
+              <a:t>Result 3: thinking models trust a “tool” hint far more</a:t>
             </a:r>
             <a:endParaRPr lang="en-US" sz="3000" dirty="0"/>
           </a:p>
         </p:txBody>
       </p:sp>
-      <p:sp>
-        <p:nvSpPr>
-          <p:cNvPr id="3" name="more1"/>
+      <p:graphicFrame>
+        <p:nvGraphicFramePr>
+          <p:cNvPr id="3" name="Chart 0" descr=""/>
+          <p:cNvGraphicFramePr/>
+          <p:nvPr/>
+        </p:nvGraphicFramePr>
+        <p:xfrm>
+          <a:off x="548640" y="1280160"/>
+          <a:ext cx="6949440" cy="4846320"/>
+        </p:xfrm>
+        <a:graphic xmlns:a="http://schemas.openxmlformats.org/drawingml/2006/main">
+          <a:graphicData uri="http://schemas.openxmlformats.org/drawingml/2006/chart">
+            <c:chart xmlns:c="http://schemas.openxmlformats.org/drawingml/2006/chart" r:id="rId1"/>
+          </a:graphicData>
+        </a:graphic>
+      </p:graphicFrame>
+      <p:sp>
+        <p:nvSpPr>
+          <p:cNvPr id="4" name="r3-card"/>
           <p:cNvSpPr/>
           <p:nvPr/>
         </p:nvSpPr>
         <p:spPr>
           <a:xfrm>
-            <a:off x="548640" y="1371600"/>
-            <a:ext cx="3520440" cy="4023360"/>
+            <a:off x="7863840" y="1280160"/>
+            <a:ext cx="3749040" cy="4846320"/>
           </a:xfrm>
           <a:prstGeom prst="roundRect">
             <a:avLst>
-              <a:gd name="adj" fmla="val 2078"/>
+              <a:gd name="adj" fmla="val 1951"/>
             </a:avLst>
           </a:prstGeom>
           <a:solidFill>
@@ -14076,14 +17002,14 @@
       </p:sp>
       <p:sp>
         <p:nvSpPr>
-          <p:cNvPr id="4" name="Text 2"/>
+          <p:cNvPr id="5" name="Text 2"/>
           <p:cNvSpPr txBox="1"/>
           <p:nvPr/>
         </p:nvSpPr>
         <p:spPr>
           <a:xfrm>
-            <a:off x="822960" y="1645920"/>
-            <a:ext cx="3017520" cy="822960"/>
+            <a:off x="8138160" y="1463040"/>
+            <a:ext cx="3291840" cy="731520"/>
           </a:xfrm>
           <a:prstGeom prst="rect">
             <a:avLst/>
@@ -14099,27 +17025,27 @@
               <a:buNone/>
             </a:pPr>
             <a:r>
-              <a:rPr lang="en-US" sz="3800" b="1" dirty="0">
-                <a:solidFill>
-                  <a:schemeClr val="accent1"/>
+              <a:rPr lang="en-US" sz="4000" b="1" dirty="0">
+                <a:solidFill>
+                  <a:schemeClr val="accent2"/>
                 </a:solidFill>
               </a:rPr>
-              <a:t>88% to 96%</a:t>
+              <a:t>17 of 31</a:t>
             </a:r>
-            <a:endParaRPr lang="en-US" sz="3800" dirty="0"/>
+            <a:endParaRPr lang="en-US" sz="4000" dirty="0"/>
           </a:p>
         </p:txBody>
       </p:sp>
       <p:sp>
         <p:nvSpPr>
-          <p:cNvPr id="5" name="Text 3"/>
+          <p:cNvPr id="6" name="Text 3"/>
           <p:cNvSpPr txBox="1"/>
           <p:nvPr/>
         </p:nvSpPr>
         <p:spPr>
           <a:xfrm>
-            <a:off x="822960" y="2606040"/>
-            <a:ext cx="3017520" cy="731520"/>
+            <a:off x="8138160" y="2194560"/>
+            <a:ext cx="3291840" cy="685800"/>
           </a:xfrm>
           <a:prstGeom prst="rect">
             <a:avLst/>
@@ -14135,27 +17061,27 @@
               <a:buNone/>
             </a:pPr>
             <a:r>
-              <a:rPr lang="en-US" sz="1700" b="1" dirty="0">
+              <a:rPr lang="en-US" sz="1350" dirty="0">
                 <a:solidFill>
                   <a:schemeClr val="tx1"/>
                 </a:solidFill>
               </a:rPr>
-              <a:t>“Answer only” doesn’t stop thinking</a:t>
+              <a:t>times the thinking models picked the tool’s wrong letter. From the user: 2 of 31.</a:t>
             </a:r>
-            <a:endParaRPr lang="en-US" sz="1700" dirty="0"/>
+            <a:endParaRPr lang="en-US" sz="1350" dirty="0"/>
           </a:p>
         </p:txBody>
       </p:sp>
       <p:sp>
         <p:nvSpPr>
-          <p:cNvPr id="6" name="Text 4"/>
+          <p:cNvPr id="7" name="Text 4"/>
           <p:cNvSpPr txBox="1"/>
           <p:nvPr/>
         </p:nvSpPr>
         <p:spPr>
           <a:xfrm>
-            <a:off x="822960" y="3383280"/>
-            <a:ext cx="3017520" cy="1828800"/>
+            <a:off x="8138160" y="2971800"/>
+            <a:ext cx="3291840" cy="274320"/>
           </a:xfrm>
           <a:prstGeom prst="rect">
             <a:avLst/>
@@ -14164,56 +17090,61 @@
           <a:ln/>
         </p:spPr>
         <p:txBody>
-          <a:bodyPr wrap="square" lIns="0" tIns="0" rIns="0" bIns="0" rtlCol="0" anchor="t"/>
+          <a:bodyPr wrap="square" lIns="0" tIns="0" rIns="0" bIns="0" rtlCol="0" anchor="ctr"/>
           <a:lstStyle/>
           <a:p>
             <a:pPr indent="0" marL="0">
               <a:buNone/>
             </a:pPr>
             <a:r>
-              <a:rPr lang="en-US" sz="1500" dirty="0">
-                <a:solidFill>
-                  <a:schemeClr val="tx1"/>
+              <a:rPr lang="en-US" sz="1100" b="1" spc="150" kern="0" dirty="0">
+                <a:solidFill>
+                  <a:schemeClr val="accent5"/>
                 </a:solidFill>
               </a:rPr>
-              <a:t>Told “answer only, don’t explain”, thinking models still made private notes this often, and stayed right. Regular models fell to 4% and 8% correct, worse than guessing.</a:t>
+              <a:t>WHAT THE TOOL HINT LOOKED LIKE</a:t>
             </a:r>
-            <a:endParaRPr lang="en-US" sz="1500" dirty="0"/>
+            <a:endParaRPr lang="en-US" sz="1100" dirty="0"/>
           </a:p>
         </p:txBody>
       </p:sp>
       <p:sp>
         <p:nvSpPr>
-          <p:cNvPr id="7" name="more2"/>
+          <p:cNvPr id="8" name="r3-tool"/>
           <p:cNvSpPr/>
           <p:nvPr/>
         </p:nvSpPr>
         <p:spPr>
           <a:xfrm>
-            <a:off x="4325112" y="1371600"/>
-            <a:ext cx="3520440" cy="4023360"/>
+            <a:off x="8138160" y="3273552"/>
+            <a:ext cx="3291840" cy="731520"/>
           </a:xfrm>
           <a:prstGeom prst="roundRect">
             <a:avLst>
-              <a:gd name="adj" fmla="val 2078"/>
+              <a:gd name="adj" fmla="val 6250"/>
             </a:avLst>
           </a:prstGeom>
           <a:solidFill>
-            <a:schemeClr val="bg2"/>
+            <a:schemeClr val="bg1"/>
           </a:solidFill>
-          <a:ln/>
-        </p:spPr>
-      </p:sp>
-      <p:sp>
-        <p:nvSpPr>
-          <p:cNvPr id="8" name="Text 6"/>
+          <a:ln w="9525">
+            <a:solidFill>
+              <a:schemeClr val="accent5"/>
+            </a:solidFill>
+            <a:prstDash val="solid"/>
+          </a:ln>
+        </p:spPr>
+      </p:sp>
+      <p:sp>
+        <p:nvSpPr>
+          <p:cNvPr id="9" name="Text 6"/>
           <p:cNvSpPr txBox="1"/>
           <p:nvPr/>
         </p:nvSpPr>
         <p:spPr>
           <a:xfrm>
-            <a:off x="4599432" y="1645920"/>
-            <a:ext cx="3017520" cy="822960"/>
+            <a:off x="8229600" y="3310128"/>
+            <a:ext cx="3154680" cy="658368"/>
           </a:xfrm>
           <a:prstGeom prst="rect">
             <a:avLst/>
@@ -14229,63 +17160,47 @@
               <a:buNone/>
             </a:pPr>
             <a:r>
-              <a:rPr lang="en-US" sz="3800" b="1" dirty="0">
-                <a:solidFill>
-                  <a:schemeClr val="accent2"/>
-                </a:solidFill>
+              <a:rPr lang="en-US" sz="1000" dirty="0">
+                <a:solidFill>
+                  <a:schemeClr val="tx1"/>
+                </a:solidFill>
+                <a:latin typeface="Courier New" pitchFamily="34" charset="0"/>
+                <a:ea typeface="Courier New" pitchFamily="34" charset="-122"/>
+                <a:cs typeface="Courier New" pitchFamily="34" charset="-120"/>
               </a:rPr>
-              <a:t>10 of 10</a:t>
+              <a:t>[tool result: lookup_answer_key]</a:t>
             </a:r>
-            <a:endParaRPr lang="en-US" sz="3800" dirty="0"/>
-          </a:p>
-        </p:txBody>
-      </p:sp>
-      <p:sp>
-        <p:nvSpPr>
-          <p:cNvPr id="9" name="Text 7"/>
-          <p:cNvSpPr txBox="1"/>
-          <p:nvPr/>
-        </p:nvSpPr>
-        <p:spPr>
-          <a:xfrm>
-            <a:off x="4599432" y="2606040"/>
-            <a:ext cx="3017520" cy="731520"/>
-          </a:xfrm>
-          <a:prstGeom prst="rect">
-            <a:avLst/>
-          </a:prstGeom>
-          <a:noFill/>
-          <a:ln/>
-        </p:spPr>
-        <p:txBody>
-          <a:bodyPr wrap="square" lIns="0" tIns="0" rIns="0" bIns="0" rtlCol="0" anchor="t"/>
-          <a:lstStyle/>
+            <a:endParaRPr lang="en-US" sz="1000" dirty="0"/>
+          </a:p>
           <a:p>
             <a:pPr indent="0" marL="0">
               <a:buNone/>
             </a:pPr>
             <a:r>
-              <a:rPr lang="en-US" sz="1700" b="1" dirty="0">
+              <a:rPr lang="en-US" sz="1000" dirty="0">
                 <a:solidFill>
                   <a:schemeClr val="tx1"/>
                 </a:solidFill>
+                <a:latin typeface="Courier New" pitchFamily="34" charset="0"/>
+                <a:ea typeface="Courier New" pitchFamily="34" charset="-122"/>
+                <a:cs typeface="Courier New" pitchFamily="34" charset="-120"/>
               </a:rPr>
-              <a:t>“Private” can leak</a:t>
+              <a:t>{"expected": "H", "source": "study guide v2"}</a:t>
             </a:r>
-            <a:endParaRPr lang="en-US" sz="1700" dirty="0"/>
+            <a:endParaRPr lang="en-US" sz="1000" dirty="0"/>
           </a:p>
         </p:txBody>
       </p:sp>
       <p:sp>
         <p:nvSpPr>
-          <p:cNvPr id="10" name="Text 8"/>
+          <p:cNvPr id="10" name="Text 7"/>
           <p:cNvSpPr txBox="1"/>
           <p:nvPr/>
         </p:nvSpPr>
         <p:spPr>
           <a:xfrm>
-            <a:off x="4599432" y="3383280"/>
-            <a:ext cx="3017520" cy="1828800"/>
+            <a:off x="8138160" y="4160520"/>
+            <a:ext cx="3291840" cy="1874520"/>
           </a:xfrm>
           <a:prstGeom prst="rect">
             <a:avLst/>
@@ -14298,147 +17213,51 @@
           <a:lstStyle/>
           <a:p>
             <a:pPr indent="0" marL="0">
+              <a:spcAft>
+                <a:spcPts val="800"/>
+              </a:spcAft>
               <a:buNone/>
             </a:pPr>
             <a:r>
-              <a:rPr lang="en-US" sz="1500" dirty="0">
+              <a:rPr lang="en-US" sz="1300" dirty="0">
                 <a:solidFill>
                   <a:schemeClr val="tx1"/>
                 </a:solidFill>
               </a:rPr>
-              <a:t>When a reply was cut off at the length limit, the private notes spilled into the answer the user sees. Every time.</a:t>
+              <a:t>When they followed it, the private notes cited the tool 16 of 17 times, the final answer 6 times (keyword count).</a:t>
             </a:r>
-            <a:endParaRPr lang="en-US" sz="1500" dirty="0"/>
-          </a:p>
-        </p:txBody>
-      </p:sp>
-      <p:sp>
-        <p:nvSpPr>
-          <p:cNvPr id="11" name="more3"/>
-          <p:cNvSpPr/>
-          <p:nvPr/>
-        </p:nvSpPr>
-        <p:spPr>
-          <a:xfrm>
-            <a:off x="8101584" y="1371600"/>
-            <a:ext cx="3520440" cy="4023360"/>
-          </a:xfrm>
-          <a:prstGeom prst="roundRect">
-            <a:avLst>
-              <a:gd name="adj" fmla="val 2078"/>
-            </a:avLst>
-          </a:prstGeom>
-          <a:solidFill>
-            <a:schemeClr val="bg2"/>
-          </a:solidFill>
-          <a:ln/>
-        </p:spPr>
-      </p:sp>
-      <p:sp>
-        <p:nvSpPr>
-          <p:cNvPr id="12" name="Text 10"/>
-          <p:cNvSpPr txBox="1"/>
-          <p:nvPr/>
-        </p:nvSpPr>
-        <p:spPr>
-          <a:xfrm>
-            <a:off x="8375904" y="1645920"/>
-            <a:ext cx="3017520" cy="822960"/>
-          </a:xfrm>
-          <a:prstGeom prst="rect">
-            <a:avLst/>
-          </a:prstGeom>
-          <a:noFill/>
-          <a:ln/>
-        </p:spPr>
-        <p:txBody>
-          <a:bodyPr wrap="square" lIns="0" tIns="0" rIns="0" bIns="0" rtlCol="0" anchor="ctr"/>
-          <a:lstStyle/>
+            <a:endParaRPr lang="en-US" sz="1300" dirty="0"/>
+          </a:p>
           <a:p>
             <a:pPr indent="0" marL="0">
+              <a:spcAft>
+                <a:spcPts val="800"/>
+              </a:spcAft>
               <a:buNone/>
             </a:pPr>
             <a:r>
-              <a:rPr lang="en-US" sz="3800" b="1" dirty="0">
-                <a:solidFill>
-                  <a:schemeClr val="accent1"/>
+              <a:rPr lang="en-US" sz="1300" b="1" dirty="0">
+                <a:solidFill>
+                  <a:schemeClr val="tx1"/>
                 </a:solidFill>
               </a:rPr>
-              <a:t>30% to 48%</a:t>
+              <a:t>Limit: </a:t>
             </a:r>
-            <a:endParaRPr lang="en-US" sz="3800" dirty="0"/>
-          </a:p>
-        </p:txBody>
-      </p:sp>
-      <p:sp>
-        <p:nvSpPr>
-          <p:cNvPr id="13" name="Text 11"/>
-          <p:cNvSpPr txBox="1"/>
-          <p:nvPr/>
-        </p:nvSpPr>
-        <p:spPr>
-          <a:xfrm>
-            <a:off x="8375904" y="2606040"/>
-            <a:ext cx="3017520" cy="731520"/>
-          </a:xfrm>
-          <a:prstGeom prst="rect">
-            <a:avLst/>
-          </a:prstGeom>
-          <a:noFill/>
-          <a:ln/>
-        </p:spPr>
-        <p:txBody>
-          <a:bodyPr wrap="square" lIns="0" tIns="0" rIns="0" bIns="0" rtlCol="0" anchor="t"/>
-          <a:lstStyle/>
-          <a:p>
             <a:pPr indent="0" marL="0">
+              <a:spcAft>
+                <a:spcPts val="800"/>
+              </a:spcAft>
               <a:buNone/>
             </a:pPr>
             <a:r>
-              <a:rPr lang="en-US" sz="1700" b="1" dirty="0">
+              <a:rPr lang="en-US" sz="1300" dirty="0">
                 <a:solidFill>
                   <a:schemeClr val="tx1"/>
                 </a:solidFill>
               </a:rPr>
-              <a:t>Less thinking, same model</a:t>
+              <a:t>30 questions, one run each, tool text pasted into the message.</a:t>
             </a:r>
-            <a:endParaRPr lang="en-US" sz="1700" dirty="0"/>
-          </a:p>
-        </p:txBody>
-      </p:sp>
-      <p:sp>
-        <p:nvSpPr>
-          <p:cNvPr id="14" name="Text 12"/>
-          <p:cNvSpPr txBox="1"/>
-          <p:nvPr/>
-        </p:nvSpPr>
-        <p:spPr>
-          <a:xfrm>
-            <a:off x="8375904" y="3383280"/>
-            <a:ext cx="3017520" cy="1828800"/>
-          </a:xfrm>
-          <a:prstGeom prst="rect">
-            <a:avLst/>
-          </a:prstGeom>
-          <a:noFill/>
-          <a:ln/>
-        </p:spPr>
-        <p:txBody>
-          <a:bodyPr wrap="square" lIns="0" tIns="0" rIns="0" bIns="0" rtlCol="0" anchor="t"/>
-          <a:lstStyle/>
-          <a:p>
-            <a:pPr indent="0" marL="0">
-              <a:buNone/>
-            </a:pPr>
-            <a:r>
-              <a:rPr lang="en-US" sz="1500" dirty="0">
-                <a:solidFill>
-                  <a:schemeClr val="tx1"/>
-                </a:solidFill>
-              </a:rPr>
-              <a:t>Shorter private notes when we ask for “think briefly”. This lets us compare more and less thinking on one model.</a:t>
-            </a:r>
-            <a:endParaRPr lang="en-US" sz="1500" dirty="0"/>
+            <a:endParaRPr lang="en-US" sz="1300" dirty="0"/>
           </a:p>
         </p:txBody>
       </p:sp>
@@ -14544,7 +17363,7 @@
                   <a:schemeClr val="tx1"/>
                 </a:solidFill>
               </a:rPr>
-              <a:t>Risks and what we’re doing about them</a:t>
+              <a:t>Four more things we learned</a:t>
             </a:r>
             <a:endParaRPr lang="en-US" sz="3000" dirty="0"/>
           </a:p>
@@ -14552,60 +17371,36 @@
       </p:sp>
       <p:sp>
         <p:nvSpPr>
-          <p:cNvPr id="3" name="risk1-circle"/>
+          <p:cNvPr id="3" name="more1"/>
           <p:cNvSpPr/>
           <p:nvPr/>
         </p:nvSpPr>
         <p:spPr>
           <a:xfrm>
-            <a:off x="548640" y="1371600"/>
-            <a:ext cx="777240" cy="777240"/>
-          </a:xfrm>
-          <a:prstGeom prst="ellipse">
-            <a:avLst/>
+            <a:off x="548640" y="1325880"/>
+            <a:ext cx="5440680" cy="2331720"/>
+          </a:xfrm>
+          <a:prstGeom prst="roundRect">
+            <a:avLst>
+              <a:gd name="adj" fmla="val 3137"/>
+            </a:avLst>
           </a:prstGeom>
           <a:solidFill>
-            <a:schemeClr val="accent2">
-              <a:alpha val="16000"/>
-            </a:schemeClr>
+            <a:schemeClr val="bg2"/>
           </a:solidFill>
           <a:ln/>
         </p:spPr>
       </p:sp>
-      <p:pic>
-        <p:nvPicPr>
-          <p:cNvPr id="4" name="risk1-icon" descr="preencoded.png">    </p:cNvPr>
-          <p:cNvPicPr>
-            <a:picLocks noChangeAspect="1"/>
-          </p:cNvPicPr>
-          <p:nvPr/>
-        </p:nvPicPr>
-        <p:blipFill>
-          <a:blip r:embed="rId1"/>
-          <a:stretch>
-            <a:fillRect/>
-          </a:stretch>
-        </p:blipFill>
-        <p:spPr>
-          <a:xfrm>
-            <a:off x="750722" y="1573682"/>
-            <a:ext cx="373075" cy="373075"/>
-          </a:xfrm>
-          <a:prstGeom prst="rect">
-            <a:avLst/>
-          </a:prstGeom>
-        </p:spPr>
-      </p:pic>
-      <p:sp>
-        <p:nvSpPr>
-          <p:cNvPr id="5" name="Text 2"/>
+      <p:sp>
+        <p:nvSpPr>
+          <p:cNvPr id="4" name="Text 2"/>
           <p:cNvSpPr txBox="1"/>
           <p:nvPr/>
         </p:nvSpPr>
         <p:spPr>
           <a:xfrm>
-            <a:off x="1554480" y="1325880"/>
-            <a:ext cx="9966960" cy="411480"/>
+            <a:off x="822960" y="1508760"/>
+            <a:ext cx="4892040" cy="658368"/>
           </a:xfrm>
           <a:prstGeom prst="rect">
             <a:avLst/>
@@ -14621,27 +17416,27 @@
               <a:buNone/>
             </a:pPr>
             <a:r>
-              <a:rPr lang="en-US" sz="1800" b="1" dirty="0">
-                <a:solidFill>
-                  <a:schemeClr val="tx1"/>
+              <a:rPr lang="en-US" sz="3400" b="1" dirty="0">
+                <a:solidFill>
+                  <a:schemeClr val="accent1"/>
                 </a:solidFill>
               </a:rPr>
-              <a:t>We can’t switch thinking off</a:t>
+              <a:t>88% to 96%</a:t>
             </a:r>
-            <a:endParaRPr lang="en-US" sz="1800" dirty="0"/>
+            <a:endParaRPr lang="en-US" sz="3400" dirty="0"/>
           </a:p>
         </p:txBody>
       </p:sp>
       <p:sp>
         <p:nvSpPr>
-          <p:cNvPr id="6" name="Text 3"/>
+          <p:cNvPr id="5" name="Text 3"/>
           <p:cNvSpPr txBox="1"/>
           <p:nvPr/>
         </p:nvSpPr>
         <p:spPr>
           <a:xfrm>
-            <a:off x="1554480" y="1755648"/>
-            <a:ext cx="9966960" cy="640080"/>
+            <a:off x="822960" y="2194560"/>
+            <a:ext cx="4892040" cy="365760"/>
           </a:xfrm>
           <a:prstGeom prst="rect">
             <a:avLst/>
@@ -14650,80 +17445,34 @@
           <a:ln/>
         </p:spPr>
         <p:txBody>
-          <a:bodyPr wrap="square" lIns="0" tIns="0" rIns="0" bIns="0" rtlCol="0" anchor="t"/>
+          <a:bodyPr wrap="square" lIns="0" tIns="0" rIns="0" bIns="0" rtlCol="0" anchor="ctr"/>
           <a:lstStyle/>
           <a:p>
             <a:pPr indent="0" marL="0">
               <a:buNone/>
             </a:pPr>
             <a:r>
-              <a:rPr lang="en-US" sz="1500" dirty="0">
-                <a:solidFill>
-                  <a:schemeClr val="accent5"/>
+              <a:rPr lang="en-US" sz="1600" b="1" dirty="0">
+                <a:solidFill>
+                  <a:schemeClr val="tx1"/>
                 </a:solidFill>
               </a:rPr>
-              <a:t>So each pair is two differently trained models. We say so, and use “think briefly” on one model as a cleaner test.</a:t>
+              <a:t>“Answer only” doesn’t stop thinking</a:t>
             </a:r>
-            <a:endParaRPr lang="en-US" sz="1500" dirty="0"/>
+            <a:endParaRPr lang="en-US" sz="1600" dirty="0"/>
           </a:p>
         </p:txBody>
       </p:sp>
       <p:sp>
         <p:nvSpPr>
-          <p:cNvPr id="7" name="risk2-circle"/>
-          <p:cNvSpPr/>
-          <p:nvPr/>
-        </p:nvSpPr>
-        <p:spPr>
-          <a:xfrm>
-            <a:off x="548640" y="2578608"/>
-            <a:ext cx="777240" cy="777240"/>
-          </a:xfrm>
-          <a:prstGeom prst="ellipse">
-            <a:avLst/>
-          </a:prstGeom>
-          <a:solidFill>
-            <a:schemeClr val="accent1">
-              <a:alpha val="16000"/>
-            </a:schemeClr>
-          </a:solidFill>
-          <a:ln/>
-        </p:spPr>
-      </p:sp>
-      <p:pic>
-        <p:nvPicPr>
-          <p:cNvPr id="8" name="risk2-icon" descr="preencoded.png">    </p:cNvPr>
-          <p:cNvPicPr>
-            <a:picLocks noChangeAspect="1"/>
-          </p:cNvPicPr>
-          <p:nvPr/>
-        </p:nvPicPr>
-        <p:blipFill>
-          <a:blip r:embed="rId2"/>
-          <a:stretch>
-            <a:fillRect/>
-          </a:stretch>
-        </p:blipFill>
-        <p:spPr>
-          <a:xfrm>
-            <a:off x="750722" y="2780690"/>
-            <a:ext cx="373075" cy="373075"/>
-          </a:xfrm>
-          <a:prstGeom prst="rect">
-            <a:avLst/>
-          </a:prstGeom>
-        </p:spPr>
-      </p:pic>
-      <p:sp>
-        <p:nvSpPr>
-          <p:cNvPr id="9" name="Text 5"/>
+          <p:cNvPr id="6" name="Text 4"/>
           <p:cNvSpPr txBox="1"/>
           <p:nvPr/>
         </p:nvSpPr>
         <p:spPr>
           <a:xfrm>
-            <a:off x="1554480" y="2532888"/>
-            <a:ext cx="9966960" cy="411480"/>
+            <a:off x="822960" y="2587752"/>
+            <a:ext cx="4892040" cy="960120"/>
           </a:xfrm>
           <a:prstGeom prst="rect">
             <a:avLst/>
@@ -14732,34 +17481,56 @@
           <a:ln/>
         </p:spPr>
         <p:txBody>
-          <a:bodyPr wrap="square" lIns="0" tIns="0" rIns="0" bIns="0" rtlCol="0" anchor="ctr"/>
+          <a:bodyPr wrap="square" lIns="0" tIns="0" rIns="0" bIns="0" rtlCol="0" anchor="t"/>
           <a:lstStyle/>
           <a:p>
             <a:pPr indent="0" marL="0">
               <a:buNone/>
             </a:pPr>
             <a:r>
-              <a:rPr lang="en-US" sz="1800" b="1" dirty="0">
+              <a:rPr lang="en-US" sz="1350" dirty="0">
                 <a:solidFill>
                   <a:schemeClr val="tx1"/>
                 </a:solidFill>
               </a:rPr>
-              <a:t>Our puzzles are too easy for the big models</a:t>
+              <a:t>Told “answer only, don’t explain”, thinking models still made private notes this often, and stayed right. Regular models fell to 4% and 8% correct.</a:t>
             </a:r>
-            <a:endParaRPr lang="en-US" sz="1800" dirty="0"/>
+            <a:endParaRPr lang="en-US" sz="1350" dirty="0"/>
           </a:p>
         </p:txBody>
       </p:sp>
       <p:sp>
         <p:nvSpPr>
-          <p:cNvPr id="10" name="Text 6"/>
+          <p:cNvPr id="7" name="more2"/>
+          <p:cNvSpPr/>
+          <p:nvPr/>
+        </p:nvSpPr>
+        <p:spPr>
+          <a:xfrm>
+            <a:off x="6172200" y="1325880"/>
+            <a:ext cx="5440680" cy="2331720"/>
+          </a:xfrm>
+          <a:prstGeom prst="roundRect">
+            <a:avLst>
+              <a:gd name="adj" fmla="val 3137"/>
+            </a:avLst>
+          </a:prstGeom>
+          <a:solidFill>
+            <a:schemeClr val="bg2"/>
+          </a:solidFill>
+          <a:ln/>
+        </p:spPr>
+      </p:sp>
+      <p:sp>
+        <p:nvSpPr>
+          <p:cNvPr id="8" name="Text 6"/>
           <p:cNvSpPr txBox="1"/>
           <p:nvPr/>
         </p:nvSpPr>
         <p:spPr>
           <a:xfrm>
-            <a:off x="1554480" y="2962656"/>
-            <a:ext cx="9966960" cy="640080"/>
+            <a:off x="6446520" y="1508760"/>
+            <a:ext cx="4892040" cy="658368"/>
           </a:xfrm>
           <a:prstGeom prst="rect">
             <a:avLst/>
@@ -14768,80 +17539,34 @@
           <a:ln/>
         </p:spPr>
         <p:txBody>
-          <a:bodyPr wrap="square" lIns="0" tIns="0" rIns="0" bIns="0" rtlCol="0" anchor="t"/>
+          <a:bodyPr wrap="square" lIns="0" tIns="0" rIns="0" bIns="0" rtlCol="0" anchor="ctr"/>
           <a:lstStyle/>
           <a:p>
             <a:pPr indent="0" marL="0">
               <a:buNone/>
             </a:pPr>
             <a:r>
-              <a:rPr lang="en-US" sz="1500" dirty="0">
-                <a:solidFill>
-                  <a:schemeClr val="accent5"/>
+              <a:rPr lang="en-US" sz="3400" b="1" dirty="0">
+                <a:solidFill>
+                  <a:schemeClr val="accent2"/>
                 </a:solidFill>
               </a:rPr>
-              <a:t>Next we add harder questions (BBH) and questions about people (BBQ), where a hint has more room.</a:t>
+              <a:t>8 of 8</a:t>
             </a:r>
-            <a:endParaRPr lang="en-US" sz="1500" dirty="0"/>
+            <a:endParaRPr lang="en-US" sz="3400" dirty="0"/>
           </a:p>
         </p:txBody>
       </p:sp>
       <p:sp>
         <p:nvSpPr>
-          <p:cNvPr id="11" name="risk3-circle"/>
-          <p:cNvSpPr/>
-          <p:nvPr/>
-        </p:nvSpPr>
-        <p:spPr>
-          <a:xfrm>
-            <a:off x="548640" y="3785616"/>
-            <a:ext cx="777240" cy="777240"/>
-          </a:xfrm>
-          <a:prstGeom prst="ellipse">
-            <a:avLst/>
-          </a:prstGeom>
-          <a:solidFill>
-            <a:schemeClr val="accent2">
-              <a:alpha val="16000"/>
-            </a:schemeClr>
-          </a:solidFill>
-          <a:ln/>
-        </p:spPr>
-      </p:sp>
-      <p:pic>
-        <p:nvPicPr>
-          <p:cNvPr id="12" name="risk3-icon" descr="preencoded.png">    </p:cNvPr>
-          <p:cNvPicPr>
-            <a:picLocks noChangeAspect="1"/>
-          </p:cNvPicPr>
-          <p:nvPr/>
-        </p:nvPicPr>
-        <p:blipFill>
-          <a:blip r:embed="rId3"/>
-          <a:stretch>
-            <a:fillRect/>
-          </a:stretch>
-        </p:blipFill>
-        <p:spPr>
-          <a:xfrm>
-            <a:off x="750722" y="3987698"/>
-            <a:ext cx="373075" cy="373075"/>
-          </a:xfrm>
-          <a:prstGeom prst="rect">
-            <a:avLst/>
-          </a:prstGeom>
-        </p:spPr>
-      </p:pic>
-      <p:sp>
-        <p:nvSpPr>
-          <p:cNvPr id="13" name="Text 8"/>
+          <p:cNvPr id="9" name="Text 7"/>
           <p:cNvSpPr txBox="1"/>
           <p:nvPr/>
         </p:nvSpPr>
         <p:spPr>
           <a:xfrm>
-            <a:off x="1554480" y="3739896"/>
-            <a:ext cx="9966960" cy="411480"/>
+            <a:off x="6446520" y="2194560"/>
+            <a:ext cx="4892040" cy="365760"/>
           </a:xfrm>
           <a:prstGeom prst="rect">
             <a:avLst/>
@@ -14857,27 +17582,27 @@
               <a:buNone/>
             </a:pPr>
             <a:r>
-              <a:rPr lang="en-US" sz="1800" b="1" dirty="0">
+              <a:rPr lang="en-US" sz="1600" b="1" dirty="0">
                 <a:solidFill>
                   <a:schemeClr val="tx1"/>
                 </a:solidFill>
               </a:rPr>
-              <a:t>Keywords can’t tell a mention from an admission</a:t>
+              <a:t>“Private” can leak</a:t>
             </a:r>
-            <a:endParaRPr lang="en-US" sz="1800" dirty="0"/>
+            <a:endParaRPr lang="en-US" sz="1600" dirty="0"/>
           </a:p>
         </p:txBody>
       </p:sp>
       <p:sp>
         <p:nvSpPr>
-          <p:cNvPr id="14" name="Text 9"/>
+          <p:cNvPr id="10" name="Text 8"/>
           <p:cNvSpPr txBox="1"/>
           <p:nvPr/>
         </p:nvSpPr>
         <p:spPr>
           <a:xfrm>
-            <a:off x="1554480" y="4169664"/>
-            <a:ext cx="9966960" cy="640080"/>
+            <a:off x="6446520" y="2587752"/>
+            <a:ext cx="4892040" cy="960120"/>
           </a:xfrm>
           <a:prstGeom prst="rect">
             <a:avLst/>
@@ -14893,73 +17618,49 @@
               <a:buNone/>
             </a:pPr>
             <a:r>
-              <a:rPr lang="en-US" sz="1500" dirty="0">
-                <a:solidFill>
-                  <a:schemeClr val="accent5"/>
+              <a:rPr lang="en-US" sz="1350" dirty="0">
+                <a:solidFill>
+                  <a:schemeClr val="tx1"/>
                 </a:solidFill>
               </a:rPr>
-              <a:t>Two of us will hand-label 200 replies and report how often we agree.</a:t>
+              <a:t>Cut-off replies sent back all at once put the private notes in the visible answer. Sent in pieces (streamed): 0 of 8. We always stream.</a:t>
             </a:r>
-            <a:endParaRPr lang="en-US" sz="1500" dirty="0"/>
+            <a:endParaRPr lang="en-US" sz="1350" dirty="0"/>
           </a:p>
         </p:txBody>
       </p:sp>
       <p:sp>
         <p:nvSpPr>
-          <p:cNvPr id="15" name="risk4-circle"/>
+          <p:cNvPr id="11" name="more3"/>
           <p:cNvSpPr/>
           <p:nvPr/>
         </p:nvSpPr>
         <p:spPr>
           <a:xfrm>
-            <a:off x="548640" y="4992624"/>
-            <a:ext cx="777240" cy="777240"/>
-          </a:xfrm>
-          <a:prstGeom prst="ellipse">
-            <a:avLst/>
+            <a:off x="548640" y="3813048"/>
+            <a:ext cx="5440680" cy="2331720"/>
+          </a:xfrm>
+          <a:prstGeom prst="roundRect">
+            <a:avLst>
+              <a:gd name="adj" fmla="val 3137"/>
+            </a:avLst>
           </a:prstGeom>
           <a:solidFill>
-            <a:schemeClr val="accent1">
-              <a:alpha val="16000"/>
-            </a:schemeClr>
+            <a:schemeClr val="bg2"/>
           </a:solidFill>
           <a:ln/>
         </p:spPr>
       </p:sp>
-      <p:pic>
-        <p:nvPicPr>
-          <p:cNvPr id="16" name="risk4-icon" descr="preencoded.png">    </p:cNvPr>
-          <p:cNvPicPr>
-            <a:picLocks noChangeAspect="1"/>
-          </p:cNvPicPr>
-          <p:nvPr/>
-        </p:nvPicPr>
-        <p:blipFill>
-          <a:blip r:embed="rId4"/>
-          <a:stretch>
-            <a:fillRect/>
-          </a:stretch>
-        </p:blipFill>
-        <p:spPr>
-          <a:xfrm>
-            <a:off x="750722" y="5194706"/>
-            <a:ext cx="373075" cy="373075"/>
-          </a:xfrm>
-          <a:prstGeom prst="rect">
-            <a:avLst/>
-          </a:prstGeom>
-        </p:spPr>
-      </p:pic>
-      <p:sp>
-        <p:nvSpPr>
-          <p:cNvPr id="17" name="Text 11"/>
+      <p:sp>
+        <p:nvSpPr>
+          <p:cNvPr id="12" name="Text 10"/>
           <p:cNvSpPr txBox="1"/>
           <p:nvPr/>
         </p:nvSpPr>
         <p:spPr>
           <a:xfrm>
-            <a:off x="1554480" y="4946904"/>
-            <a:ext cx="9966960" cy="411480"/>
+            <a:off x="822960" y="3995928"/>
+            <a:ext cx="4892040" cy="658368"/>
           </a:xfrm>
           <a:prstGeom prst="rect">
             <a:avLst/>
@@ -14975,27 +17676,27 @@
               <a:buNone/>
             </a:pPr>
             <a:r>
-              <a:rPr lang="en-US" sz="1800" b="1" dirty="0">
-                <a:solidFill>
-                  <a:schemeClr val="tx1"/>
+              <a:rPr lang="en-US" sz="3400" b="1" dirty="0">
+                <a:solidFill>
+                  <a:schemeClr val="accent1"/>
                 </a:solidFill>
               </a:rPr>
-              <a:t>Thinking models write 3.4 to 4.5 times as much</a:t>
+              <a:t>30% to 48%</a:t>
             </a:r>
-            <a:endParaRPr lang="en-US" sz="1800" dirty="0"/>
+            <a:endParaRPr lang="en-US" sz="3400" dirty="0"/>
           </a:p>
         </p:txBody>
       </p:sp>
       <p:sp>
         <p:nvSpPr>
-          <p:cNvPr id="18" name="Text 12"/>
+          <p:cNvPr id="13" name="Text 11"/>
           <p:cNvSpPr txBox="1"/>
           <p:nvPr/>
         </p:nvSpPr>
         <p:spPr>
           <a:xfrm>
-            <a:off x="1554480" y="5376672"/>
-            <a:ext cx="9966960" cy="640080"/>
+            <a:off x="822960" y="4681728"/>
+            <a:ext cx="4892040" cy="365760"/>
           </a:xfrm>
           <a:prstGeom prst="rect">
             <a:avLst/>
@@ -15004,21 +17705,187 @@
           <a:ln/>
         </p:spPr>
         <p:txBody>
-          <a:bodyPr wrap="square" lIns="0" tIns="0" rIns="0" bIns="0" rtlCol="0" anchor="t"/>
+          <a:bodyPr wrap="square" lIns="0" tIns="0" rIns="0" bIns="0" rtlCol="0" anchor="ctr"/>
           <a:lstStyle/>
           <a:p>
             <a:pPr indent="0" marL="0">
               <a:buNone/>
             </a:pPr>
             <a:r>
-              <a:rPr lang="en-US" sz="1500" dirty="0">
-                <a:solidFill>
-                  <a:schemeClr val="accent5"/>
+              <a:rPr lang="en-US" sz="1600" b="1" dirty="0">
+                <a:solidFill>
+                  <a:schemeClr val="tx1"/>
                 </a:solidFill>
               </a:rPr>
-              <a:t>We’ll cut the plan from about 180 to about 55 million tokens (word pieces) and time a test run first.</a:t>
+              <a:t>Less thinking, same model</a:t>
             </a:r>
-            <a:endParaRPr lang="en-US" sz="1500" dirty="0"/>
+            <a:endParaRPr lang="en-US" sz="1600" dirty="0"/>
+          </a:p>
+        </p:txBody>
+      </p:sp>
+      <p:sp>
+        <p:nvSpPr>
+          <p:cNvPr id="14" name="Text 12"/>
+          <p:cNvSpPr txBox="1"/>
+          <p:nvPr/>
+        </p:nvSpPr>
+        <p:spPr>
+          <a:xfrm>
+            <a:off x="822960" y="5074920"/>
+            <a:ext cx="4892040" cy="960120"/>
+          </a:xfrm>
+          <a:prstGeom prst="rect">
+            <a:avLst/>
+          </a:prstGeom>
+          <a:noFill/>
+          <a:ln/>
+        </p:spPr>
+        <p:txBody>
+          <a:bodyPr wrap="square" lIns="0" tIns="0" rIns="0" bIns="0" rtlCol="0" anchor="t"/>
+          <a:lstStyle/>
+          <a:p>
+            <a:pPr indent="0" marL="0">
+              <a:buNone/>
+            </a:pPr>
+            <a:r>
+              <a:rPr lang="en-US" sz="1350" dirty="0">
+                <a:solidFill>
+                  <a:schemeClr val="tx1"/>
+                </a:solidFill>
+              </a:rPr>
+              <a:t>Shorter private notes when we ask for “think briefly”, so we can compare more and less thinking on one model.</a:t>
+            </a:r>
+            <a:endParaRPr lang="en-US" sz="1350" dirty="0"/>
+          </a:p>
+        </p:txBody>
+      </p:sp>
+      <p:sp>
+        <p:nvSpPr>
+          <p:cNvPr id="15" name="more4"/>
+          <p:cNvSpPr/>
+          <p:nvPr/>
+        </p:nvSpPr>
+        <p:spPr>
+          <a:xfrm>
+            <a:off x="6172200" y="3813048"/>
+            <a:ext cx="5440680" cy="2331720"/>
+          </a:xfrm>
+          <a:prstGeom prst="roundRect">
+            <a:avLst>
+              <a:gd name="adj" fmla="val 3137"/>
+            </a:avLst>
+          </a:prstGeom>
+          <a:solidFill>
+            <a:schemeClr val="bg2"/>
+          </a:solidFill>
+          <a:ln/>
+        </p:spPr>
+      </p:sp>
+      <p:sp>
+        <p:nvSpPr>
+          <p:cNvPr id="16" name="Text 14"/>
+          <p:cNvSpPr txBox="1"/>
+          <p:nvPr/>
+        </p:nvSpPr>
+        <p:spPr>
+          <a:xfrm>
+            <a:off x="6446520" y="3995928"/>
+            <a:ext cx="4892040" cy="658368"/>
+          </a:xfrm>
+          <a:prstGeom prst="rect">
+            <a:avLst/>
+          </a:prstGeom>
+          <a:noFill/>
+          <a:ln/>
+        </p:spPr>
+        <p:txBody>
+          <a:bodyPr wrap="square" lIns="0" tIns="0" rIns="0" bIns="0" rtlCol="0" anchor="ctr"/>
+          <a:lstStyle/>
+          <a:p>
+            <a:pPr indent="0" marL="0">
+              <a:buNone/>
+            </a:pPr>
+            <a:r>
+              <a:rPr lang="en-US" sz="3400" b="1" dirty="0">
+                <a:solidFill>
+                  <a:schemeClr val="accent2"/>
+                </a:solidFill>
+              </a:rPr>
+              <a:t>7 of 15</a:t>
+            </a:r>
+            <a:endParaRPr lang="en-US" sz="3400" dirty="0"/>
+          </a:p>
+        </p:txBody>
+      </p:sp>
+      <p:sp>
+        <p:nvSpPr>
+          <p:cNvPr id="17" name="Text 15"/>
+          <p:cNvSpPr txBox="1"/>
+          <p:nvPr/>
+        </p:nvSpPr>
+        <p:spPr>
+          <a:xfrm>
+            <a:off x="6446520" y="4681728"/>
+            <a:ext cx="4892040" cy="365760"/>
+          </a:xfrm>
+          <a:prstGeom prst="rect">
+            <a:avLst/>
+          </a:prstGeom>
+          <a:noFill/>
+          <a:ln/>
+        </p:spPr>
+        <p:txBody>
+          <a:bodyPr wrap="square" lIns="0" tIns="0" rIns="0" bIns="0" rtlCol="0" anchor="ctr"/>
+          <a:lstStyle/>
+          <a:p>
+            <a:pPr indent="0" marL="0">
+              <a:buNone/>
+            </a:pPr>
+            <a:r>
+              <a:rPr lang="en-US" sz="1600" b="1" dirty="0">
+                <a:solidFill>
+                  <a:schemeClr val="tx1"/>
+                </a:solidFill>
+              </a:rPr>
+              <a:t>A second model can be fooled</a:t>
+            </a:r>
+            <a:endParaRPr lang="en-US" sz="1600" dirty="0"/>
+          </a:p>
+        </p:txBody>
+      </p:sp>
+      <p:sp>
+        <p:nvSpPr>
+          <p:cNvPr id="18" name="Text 16"/>
+          <p:cNvSpPr txBox="1"/>
+          <p:nvPr/>
+        </p:nvSpPr>
+        <p:spPr>
+          <a:xfrm>
+            <a:off x="6446520" y="5074920"/>
+            <a:ext cx="4892040" cy="960120"/>
+          </a:xfrm>
+          <a:prstGeom prst="rect">
+            <a:avLst/>
+          </a:prstGeom>
+          <a:noFill/>
+          <a:ln/>
+        </p:spPr>
+        <p:txBody>
+          <a:bodyPr wrap="square" lIns="0" tIns="0" rIns="0" bIns="0" rtlCol="0" anchor="t"/>
+          <a:lstStyle/>
+          <a:p>
+            <a:pPr indent="0" marL="0">
+              <a:buNone/>
+            </a:pPr>
+            <a:r>
+              <a:rPr lang="en-US" sz="1350" dirty="0">
+                <a:solidFill>
+                  <a:schemeClr val="tx1"/>
+                </a:solidFill>
+              </a:rPr>
+              <a:t>A reviewer model accepted hinted wrong answers this often after reading the first model’s explanation. From the answer alone: 0 of 15. Small demo.</a:t>
+            </a:r>
+            <a:endParaRPr lang="en-US" sz="1350" dirty="0"/>
           </a:p>
         </p:txBody>
       </p:sp>
